--- a/Thesis_Documentation/Presentaion_slides/main_slide.pptx
+++ b/Thesis_Documentation/Presentaion_slides/main_slide.pptx
@@ -1,6 +1,6 @@
 
 <file path=ppt/presentation.xml><?xml version="1.0" encoding="utf-8"?>
-<p:presentation xmlns:a="http://schemas.openxmlformats.org/drawingml/2006/main" xmlns:r="http://schemas.openxmlformats.org/officeDocument/2006/relationships" xmlns:p="http://schemas.openxmlformats.org/presentationml/2006/main" embedTrueTypeFonts="1" saveSubsetFonts="1">
+<p:presentation xmlns:a="http://schemas.openxmlformats.org/drawingml/2006/main" xmlns:r="http://schemas.openxmlformats.org/officeDocument/2006/relationships" xmlns:p="http://schemas.openxmlformats.org/presentationml/2006/main" showSpecialPlsOnTitleSld="0" embedTrueTypeFonts="1" saveSubsetFonts="1">
   <p:sldMasterIdLst>
     <p:sldMasterId id="2147483648" r:id="rId1"/>
   </p:sldMasterIdLst>
@@ -16,9 +16,9 @@
     <p:sldId id="259" r:id="rId7"/>
     <p:sldId id="280" r:id="rId8"/>
     <p:sldId id="261" r:id="rId9"/>
-    <p:sldId id="278" r:id="rId10"/>
-    <p:sldId id="279" r:id="rId11"/>
-    <p:sldId id="281" r:id="rId12"/>
+    <p:sldId id="281" r:id="rId10"/>
+    <p:sldId id="278" r:id="rId11"/>
+    <p:sldId id="279" r:id="rId12"/>
     <p:sldId id="262" r:id="rId13"/>
     <p:sldId id="263" r:id="rId14"/>
     <p:sldId id="264" r:id="rId15"/>
@@ -678,9 +678,8 @@
           <a:bodyPr/>
           <a:lstStyle/>
           <a:p>
-            <a:fld id="{1D8BD707-D9CF-40AE-B4C6-C98DA3205C09}" type="datetimeFigureOut">
+            <a:fld id="{81CC1B71-5788-48EB-BCC5-A4EEB9E69422}" type="datetime1">
               <a:rPr lang="en-US" smtClean="0"/>
-              <a:pPr/>
               <a:t>8/7/2026</a:t>
             </a:fld>
             <a:endParaRPr lang="en-US"/>
@@ -843,9 +842,8 @@
           <a:bodyPr/>
           <a:lstStyle/>
           <a:p>
-            <a:fld id="{1D8BD707-D9CF-40AE-B4C6-C98DA3205C09}" type="datetimeFigureOut">
+            <a:fld id="{675AA47A-A65F-423E-96EC-786539C00F1E}" type="datetime1">
               <a:rPr lang="en-US" smtClean="0"/>
-              <a:pPr/>
               <a:t>8/7/2026</a:t>
             </a:fld>
             <a:endParaRPr lang="en-US"/>
@@ -1018,9 +1016,8 @@
           <a:bodyPr/>
           <a:lstStyle/>
           <a:p>
-            <a:fld id="{1D8BD707-D9CF-40AE-B4C6-C98DA3205C09}" type="datetimeFigureOut">
+            <a:fld id="{5E62AB71-EA7A-4ACE-BA5A-215301402B5A}" type="datetime1">
               <a:rPr lang="en-US" smtClean="0"/>
-              <a:pPr/>
               <a:t>8/7/2026</a:t>
             </a:fld>
             <a:endParaRPr lang="en-US"/>
@@ -1183,9 +1180,8 @@
           <a:bodyPr/>
           <a:lstStyle/>
           <a:p>
-            <a:fld id="{1D8BD707-D9CF-40AE-B4C6-C98DA3205C09}" type="datetimeFigureOut">
+            <a:fld id="{8D8C82BB-4737-4715-AB82-00EF233F749E}" type="datetime1">
               <a:rPr lang="en-US" smtClean="0"/>
-              <a:pPr/>
               <a:t>8/7/2026</a:t>
             </a:fld>
             <a:endParaRPr lang="en-US"/>
@@ -1425,9 +1421,8 @@
           <a:bodyPr/>
           <a:lstStyle/>
           <a:p>
-            <a:fld id="{1D8BD707-D9CF-40AE-B4C6-C98DA3205C09}" type="datetimeFigureOut">
+            <a:fld id="{1AAEAE89-510D-44DE-8FFC-A9BACA73B0BE}" type="datetime1">
               <a:rPr lang="en-US" smtClean="0"/>
-              <a:pPr/>
               <a:t>8/7/2026</a:t>
             </a:fld>
             <a:endParaRPr lang="en-US"/>
@@ -1707,9 +1702,8 @@
           <a:bodyPr/>
           <a:lstStyle/>
           <a:p>
-            <a:fld id="{1D8BD707-D9CF-40AE-B4C6-C98DA3205C09}" type="datetimeFigureOut">
+            <a:fld id="{80889779-A1AF-40D0-B702-EAAE24EDAE51}" type="datetime1">
               <a:rPr lang="en-US" smtClean="0"/>
-              <a:pPr/>
               <a:t>8/7/2026</a:t>
             </a:fld>
             <a:endParaRPr lang="en-US"/>
@@ -2123,9 +2117,8 @@
           <a:bodyPr/>
           <a:lstStyle/>
           <a:p>
-            <a:fld id="{1D8BD707-D9CF-40AE-B4C6-C98DA3205C09}" type="datetimeFigureOut">
+            <a:fld id="{C6F955D0-3A04-4D83-B84B-CC1126B4E0C8}" type="datetime1">
               <a:rPr lang="en-US" smtClean="0"/>
-              <a:pPr/>
               <a:t>8/7/2026</a:t>
             </a:fld>
             <a:endParaRPr lang="en-US"/>
@@ -2237,9 +2230,8 @@
           <a:bodyPr/>
           <a:lstStyle/>
           <a:p>
-            <a:fld id="{1D8BD707-D9CF-40AE-B4C6-C98DA3205C09}" type="datetimeFigureOut">
+            <a:fld id="{D96CCD82-3202-4C83-A2A0-104A2BD69AF5}" type="datetime1">
               <a:rPr lang="en-US" smtClean="0"/>
-              <a:pPr/>
               <a:t>8/7/2026</a:t>
             </a:fld>
             <a:endParaRPr lang="en-US"/>
@@ -2534,9 +2526,8 @@
           <a:bodyPr/>
           <a:lstStyle/>
           <a:p>
-            <a:fld id="{1D8BD707-D9CF-40AE-B4C6-C98DA3205C09}" type="datetimeFigureOut">
+            <a:fld id="{4DAB15B0-4424-44B5-8D73-AB7F7BEC1066}" type="datetime1">
               <a:rPr lang="en-US" smtClean="0"/>
-              <a:pPr/>
               <a:t>8/7/2026</a:t>
             </a:fld>
             <a:endParaRPr lang="en-US"/>
@@ -2783,9 +2774,8 @@
           <a:bodyPr/>
           <a:lstStyle/>
           <a:p>
-            <a:fld id="{1D8BD707-D9CF-40AE-B4C6-C98DA3205C09}" type="datetimeFigureOut">
+            <a:fld id="{176FA05C-0771-4E52-8A0A-F9B7F25B382F}" type="datetime1">
               <a:rPr lang="en-US" smtClean="0"/>
-              <a:pPr/>
               <a:t>8/7/2026</a:t>
             </a:fld>
             <a:endParaRPr lang="en-US"/>
@@ -2991,9 +2981,8 @@
             </a:lvl1pPr>
           </a:lstStyle>
           <a:p>
-            <a:fld id="{1D8BD707-D9CF-40AE-B4C6-C98DA3205C09}" type="datetimeFigureOut">
+            <a:fld id="{9E341256-5426-4061-837A-3B6336B9BC80}" type="datetime1">
               <a:rPr lang="en-US" smtClean="0"/>
-              <a:pPr/>
               <a:t>8/7/2026</a:t>
             </a:fld>
             <a:endParaRPr lang="en-US"/>
@@ -3095,6 +3084,7 @@
     <p:sldLayoutId id="2147483658" r:id="rId10"/>
     <p:sldLayoutId id="2147483659" r:id="rId11"/>
   </p:sldLayoutIdLst>
+  <p:hf hdr="0" ftr="0" dt="0"/>
   <p:txStyles>
     <p:titleStyle>
       <a:lvl1pPr algn="ctr" defTabSz="914400" rtl="0" eaLnBrk="1" latinLnBrk="0" hangingPunct="1">
@@ -3373,8 +3363,8 @@
         </p:nvSpPr>
         <p:spPr>
           <a:xfrm>
-            <a:off x="8428177" y="6515100"/>
-            <a:ext cx="1431643" cy="1639128"/>
+            <a:off x="8595590" y="6761146"/>
+            <a:ext cx="1096820" cy="1258128"/>
           </a:xfrm>
           <a:custGeom>
             <a:avLst/>
@@ -3793,37 +3783,13 @@
       </p:sp>
       <p:sp>
         <p:nvSpPr>
-          <p:cNvPr id="6" name="AutoShape 6"/>
-          <p:cNvSpPr/>
-          <p:nvPr/>
-        </p:nvSpPr>
-        <p:spPr>
-          <a:xfrm>
-            <a:off x="6543629" y="5124450"/>
-            <a:ext cx="5200741" cy="0"/>
-          </a:xfrm>
-          <a:prstGeom prst="line">
-            <a:avLst/>
-          </a:prstGeom>
-          <a:ln w="38100" cap="flat">
-            <a:solidFill>
-              <a:srgbClr val="000000"/>
-            </a:solidFill>
-            <a:prstDash val="solid"/>
-            <a:headEnd type="none" w="sm" len="sm"/>
-            <a:tailEnd type="none" w="sm" len="sm"/>
-          </a:ln>
-        </p:spPr>
-      </p:sp>
-      <p:sp>
-        <p:nvSpPr>
           <p:cNvPr id="7" name="TextBox 7"/>
           <p:cNvSpPr txBox="1"/>
           <p:nvPr/>
         </p:nvSpPr>
         <p:spPr>
           <a:xfrm>
-            <a:off x="4592848" y="8896465"/>
+            <a:off x="4592848" y="9390575"/>
             <a:ext cx="9102300" cy="494110"/>
           </a:xfrm>
           <a:prstGeom prst="rect">
@@ -3882,8 +3848,8 @@
         </p:nvSpPr>
         <p:spPr>
           <a:xfrm>
-            <a:off x="6713875" y="5124450"/>
-            <a:ext cx="4860248" cy="411779"/>
+            <a:off x="15163800" y="9390575"/>
+            <a:ext cx="2802848" cy="411779"/>
           </a:xfrm>
           <a:prstGeom prst="rect">
             <a:avLst/>
@@ -3928,7 +3894,37 @@
                 <a:cs typeface="Times New Roman"/>
                 <a:sym typeface="Times New Roman"/>
               </a:rPr>
-              <a:t>Date of defense: 08 August, 2026</a:t>
+              <a:t> </a:t>
+            </a:r>
+            <a:r>
+              <a:rPr lang="en-FI" sz="2500" dirty="0">
+                <a:solidFill>
+                  <a:srgbClr val="000000"/>
+                </a:solidFill>
+                <a:latin typeface="Times New Roman"/>
+                <a:ea typeface="Times New Roman"/>
+                <a:cs typeface="Times New Roman"/>
+                <a:sym typeface="Times New Roman"/>
+              </a:rPr>
+              <a:t>0</a:t>
+            </a:r>
+            <a:r>
+              <a:rPr kumimoji="0" lang="en-US" sz="2500" b="0" i="0" u="none" strike="noStrike" kern="1200" cap="none" spc="0" normalizeH="0" baseline="0" noProof="0" dirty="0">
+                <a:ln>
+                  <a:noFill/>
+                </a:ln>
+                <a:solidFill>
+                  <a:srgbClr val="000000"/>
+                </a:solidFill>
+                <a:effectLst/>
+                <a:uLnTx/>
+                <a:uFillTx/>
+                <a:latin typeface="Times New Roman"/>
+                <a:ea typeface="Times New Roman"/>
+                <a:cs typeface="Times New Roman"/>
+                <a:sym typeface="Times New Roman"/>
+              </a:rPr>
+              <a:t>8 August, 2026</a:t>
             </a:r>
           </a:p>
         </p:txBody>
@@ -3942,6 +3938,1425 @@
 </file>
 
 <file path=ppt/slides/slide10.xml><?xml version="1.0" encoding="utf-8"?>
+<p:sld xmlns:a="http://schemas.openxmlformats.org/drawingml/2006/main" xmlns:r="http://schemas.openxmlformats.org/officeDocument/2006/relationships" xmlns:p="http://schemas.openxmlformats.org/presentationml/2006/main">
+  <p:cSld>
+    <p:spTree>
+      <p:nvGrpSpPr>
+        <p:cNvPr id="1" name="">
+          <a:extLst>
+            <a:ext uri="{FF2B5EF4-FFF2-40B4-BE49-F238E27FC236}">
+              <a16:creationId xmlns:a16="http://schemas.microsoft.com/office/drawing/2014/main" id="{453DECE7-96E7-F847-6742-6C7D71EBE799}"/>
+            </a:ext>
+          </a:extLst>
+        </p:cNvPr>
+        <p:cNvGrpSpPr/>
+        <p:nvPr/>
+      </p:nvGrpSpPr>
+      <p:grpSpPr>
+        <a:xfrm>
+          <a:off x="0" y="0"/>
+          <a:ext cx="0" cy="0"/>
+          <a:chOff x="0" y="0"/>
+          <a:chExt cx="0" cy="0"/>
+        </a:xfrm>
+      </p:grpSpPr>
+      <p:sp>
+        <p:nvSpPr>
+          <p:cNvPr id="3" name="TextBox 3">
+            <a:extLst>
+              <a:ext uri="{FF2B5EF4-FFF2-40B4-BE49-F238E27FC236}">
+                <a16:creationId xmlns:a16="http://schemas.microsoft.com/office/drawing/2014/main" id="{C25103C8-BF22-41B6-86FF-517D2CB7E653}"/>
+              </a:ext>
+            </a:extLst>
+          </p:cNvPr>
+          <p:cNvSpPr txBox="1"/>
+          <p:nvPr/>
+        </p:nvSpPr>
+        <p:spPr>
+          <a:xfrm>
+            <a:off x="228600" y="756371"/>
+            <a:ext cx="4715042" cy="658835"/>
+          </a:xfrm>
+          <a:prstGeom prst="rect">
+            <a:avLst/>
+          </a:prstGeom>
+        </p:spPr>
+        <p:txBody>
+          <a:bodyPr wrap="square" lIns="0" tIns="0" rIns="0" bIns="0" rtlCol="0" anchor="t">
+            <a:spAutoFit/>
+          </a:bodyPr>
+          <a:lstStyle/>
+          <a:p>
+            <a:pPr algn="ctr">
+              <a:lnSpc>
+                <a:spcPts val="5599"/>
+              </a:lnSpc>
+            </a:pPr>
+            <a:r>
+              <a:rPr lang="en-US" sz="3999" b="1" dirty="0">
+                <a:solidFill>
+                  <a:srgbClr val="000000"/>
+                </a:solidFill>
+                <a:latin typeface="Times New Roman Bold"/>
+                <a:ea typeface="Times New Roman Bold"/>
+                <a:cs typeface="Times New Roman Bold"/>
+                <a:sym typeface="Times New Roman Bold"/>
+              </a:rPr>
+              <a:t>Methodology:</a:t>
+            </a:r>
+          </a:p>
+        </p:txBody>
+      </p:sp>
+      <p:grpSp>
+        <p:nvGrpSpPr>
+          <p:cNvPr id="4" name="Group 3">
+            <a:extLst>
+              <a:ext uri="{FF2B5EF4-FFF2-40B4-BE49-F238E27FC236}">
+                <a16:creationId xmlns:a16="http://schemas.microsoft.com/office/drawing/2014/main" id="{3D0BBEB8-EEF4-16D4-42B5-A598A9F12E6B}"/>
+              </a:ext>
+            </a:extLst>
+          </p:cNvPr>
+          <p:cNvGrpSpPr/>
+          <p:nvPr/>
+        </p:nvGrpSpPr>
+        <p:grpSpPr>
+          <a:xfrm>
+            <a:off x="1267953" y="2019300"/>
+            <a:ext cx="15752094" cy="1295400"/>
+            <a:chOff x="1173946" y="2857500"/>
+            <a:chExt cx="15752094" cy="1295400"/>
+          </a:xfrm>
+        </p:grpSpPr>
+        <p:sp>
+          <p:nvSpPr>
+            <p:cNvPr id="31" name="Arrow: Right 30">
+              <a:extLst>
+                <a:ext uri="{FF2B5EF4-FFF2-40B4-BE49-F238E27FC236}">
+                  <a16:creationId xmlns:a16="http://schemas.microsoft.com/office/drawing/2014/main" id="{6D76A05C-2C76-1089-120B-32C5E3167AD5}"/>
+                </a:ext>
+              </a:extLst>
+            </p:cNvPr>
+            <p:cNvSpPr/>
+            <p:nvPr/>
+          </p:nvSpPr>
+          <p:spPr>
+            <a:xfrm>
+              <a:off x="4292987" y="3181350"/>
+              <a:ext cx="721697" cy="647700"/>
+            </a:xfrm>
+            <a:prstGeom prst="rightArrow">
+              <a:avLst/>
+            </a:prstGeom>
+            <a:solidFill>
+              <a:schemeClr val="bg1"/>
+            </a:solidFill>
+          </p:spPr>
+          <p:style>
+            <a:lnRef idx="2">
+              <a:schemeClr val="accent1">
+                <a:shade val="15000"/>
+              </a:schemeClr>
+            </a:lnRef>
+            <a:fillRef idx="1">
+              <a:schemeClr val="accent1"/>
+            </a:fillRef>
+            <a:effectRef idx="0">
+              <a:schemeClr val="accent1"/>
+            </a:effectRef>
+            <a:fontRef idx="minor">
+              <a:schemeClr val="lt1"/>
+            </a:fontRef>
+          </p:style>
+          <p:txBody>
+            <a:bodyPr rtlCol="0" anchor="ctr"/>
+            <a:lstStyle/>
+            <a:p>
+              <a:pPr algn="ctr"/>
+              <a:endParaRPr lang="en-GB"/>
+            </a:p>
+          </p:txBody>
+        </p:sp>
+        <p:grpSp>
+          <p:nvGrpSpPr>
+            <p:cNvPr id="2" name="Group 1">
+              <a:extLst>
+                <a:ext uri="{FF2B5EF4-FFF2-40B4-BE49-F238E27FC236}">
+                  <a16:creationId xmlns:a16="http://schemas.microsoft.com/office/drawing/2014/main" id="{71954D66-6D18-665A-6B0E-67A3F3762767}"/>
+                </a:ext>
+              </a:extLst>
+            </p:cNvPr>
+            <p:cNvGrpSpPr/>
+            <p:nvPr/>
+          </p:nvGrpSpPr>
+          <p:grpSpPr>
+            <a:xfrm>
+              <a:off x="1173946" y="2857500"/>
+              <a:ext cx="15752094" cy="1295400"/>
+              <a:chOff x="1173946" y="2857500"/>
+              <a:chExt cx="15752094" cy="1295400"/>
+            </a:xfrm>
+          </p:grpSpPr>
+          <p:sp>
+            <p:nvSpPr>
+              <p:cNvPr id="24" name="Rectangle: Rounded Corners 23">
+                <a:extLst>
+                  <a:ext uri="{FF2B5EF4-FFF2-40B4-BE49-F238E27FC236}">
+                    <a16:creationId xmlns:a16="http://schemas.microsoft.com/office/drawing/2014/main" id="{DA429AC6-5E5E-2968-C18C-7EC1A05B9D5A}"/>
+                  </a:ext>
+                </a:extLst>
+              </p:cNvPr>
+              <p:cNvSpPr/>
+              <p:nvPr/>
+            </p:nvSpPr>
+            <p:spPr>
+              <a:xfrm>
+                <a:off x="1173946" y="2857500"/>
+                <a:ext cx="2636054" cy="1295400"/>
+              </a:xfrm>
+              <a:prstGeom prst="roundRect">
+                <a:avLst/>
+              </a:prstGeom>
+              <a:solidFill>
+                <a:schemeClr val="tx2">
+                  <a:lumMod val="40000"/>
+                  <a:lumOff val="60000"/>
+                </a:schemeClr>
+              </a:solidFill>
+            </p:spPr>
+            <p:style>
+              <a:lnRef idx="2">
+                <a:schemeClr val="accent1">
+                  <a:shade val="15000"/>
+                </a:schemeClr>
+              </a:lnRef>
+              <a:fillRef idx="1">
+                <a:schemeClr val="accent1"/>
+              </a:fillRef>
+              <a:effectRef idx="0">
+                <a:schemeClr val="accent1"/>
+              </a:effectRef>
+              <a:fontRef idx="minor">
+                <a:schemeClr val="lt1"/>
+              </a:fontRef>
+            </p:style>
+            <p:txBody>
+              <a:bodyPr rtlCol="0" anchor="ctr"/>
+              <a:lstStyle/>
+              <a:p>
+                <a:pPr algn="ctr"/>
+                <a:r>
+                  <a:rPr lang="en-FI" sz="2400" b="1" dirty="0">
+                    <a:solidFill>
+                      <a:schemeClr val="tx1"/>
+                    </a:solidFill>
+                    <a:latin typeface="Times New Roman" panose="02020603050405020304" pitchFamily="18" charset="0"/>
+                    <a:cs typeface="Times New Roman" panose="02020603050405020304" pitchFamily="18" charset="0"/>
+                  </a:rPr>
+                  <a:t>Environment Setup</a:t>
+                </a:r>
+                <a:endParaRPr lang="en-GB" sz="2400" b="1" dirty="0">
+                  <a:solidFill>
+                    <a:schemeClr val="tx1"/>
+                  </a:solidFill>
+                  <a:latin typeface="Times New Roman" panose="02020603050405020304" pitchFamily="18" charset="0"/>
+                  <a:cs typeface="Times New Roman" panose="02020603050405020304" pitchFamily="18" charset="0"/>
+                </a:endParaRPr>
+              </a:p>
+            </p:txBody>
+          </p:sp>
+          <p:sp>
+            <p:nvSpPr>
+              <p:cNvPr id="26" name="Rectangle: Rounded Corners 25">
+                <a:extLst>
+                  <a:ext uri="{FF2B5EF4-FFF2-40B4-BE49-F238E27FC236}">
+                    <a16:creationId xmlns:a16="http://schemas.microsoft.com/office/drawing/2014/main" id="{7926AD9A-B080-19F7-9CF0-279FAA6CB4CE}"/>
+                  </a:ext>
+                </a:extLst>
+              </p:cNvPr>
+              <p:cNvSpPr/>
+              <p:nvPr/>
+            </p:nvSpPr>
+            <p:spPr>
+              <a:xfrm>
+                <a:off x="5497673" y="2857500"/>
+                <a:ext cx="2636054" cy="1295400"/>
+              </a:xfrm>
+              <a:prstGeom prst="roundRect">
+                <a:avLst/>
+              </a:prstGeom>
+              <a:solidFill>
+                <a:srgbClr val="00B050"/>
+              </a:solidFill>
+            </p:spPr>
+            <p:style>
+              <a:lnRef idx="2">
+                <a:schemeClr val="accent1">
+                  <a:shade val="15000"/>
+                </a:schemeClr>
+              </a:lnRef>
+              <a:fillRef idx="1">
+                <a:schemeClr val="accent1"/>
+              </a:fillRef>
+              <a:effectRef idx="0">
+                <a:schemeClr val="accent1"/>
+              </a:effectRef>
+              <a:fontRef idx="minor">
+                <a:schemeClr val="lt1"/>
+              </a:fontRef>
+            </p:style>
+            <p:txBody>
+              <a:bodyPr rtlCol="0" anchor="ctr"/>
+              <a:lstStyle/>
+              <a:p>
+                <a:pPr algn="ctr"/>
+                <a:r>
+                  <a:rPr lang="en-FI" sz="2400" b="1" dirty="0">
+                    <a:solidFill>
+                      <a:schemeClr val="tx1"/>
+                    </a:solidFill>
+                    <a:latin typeface="Times New Roman" panose="02020603050405020304" pitchFamily="18" charset="0"/>
+                    <a:cs typeface="Times New Roman" panose="02020603050405020304" pitchFamily="18" charset="0"/>
+                  </a:rPr>
+                  <a:t>Safety Cost</a:t>
+                </a:r>
+                <a:endParaRPr lang="en-GB" sz="2400" b="1" dirty="0">
+                  <a:solidFill>
+                    <a:schemeClr val="tx1"/>
+                  </a:solidFill>
+                  <a:latin typeface="Times New Roman" panose="02020603050405020304" pitchFamily="18" charset="0"/>
+                  <a:cs typeface="Times New Roman" panose="02020603050405020304" pitchFamily="18" charset="0"/>
+                </a:endParaRPr>
+              </a:p>
+            </p:txBody>
+          </p:sp>
+          <p:sp>
+            <p:nvSpPr>
+              <p:cNvPr id="28" name="Rectangle: Rounded Corners 27">
+                <a:extLst>
+                  <a:ext uri="{FF2B5EF4-FFF2-40B4-BE49-F238E27FC236}">
+                    <a16:creationId xmlns:a16="http://schemas.microsoft.com/office/drawing/2014/main" id="{3106749C-75BF-D639-B188-0DA5E70E9335}"/>
+                  </a:ext>
+                </a:extLst>
+              </p:cNvPr>
+              <p:cNvSpPr/>
+              <p:nvPr/>
+            </p:nvSpPr>
+            <p:spPr>
+              <a:xfrm>
+                <a:off x="14145125" y="2857500"/>
+                <a:ext cx="2780915" cy="1295400"/>
+              </a:xfrm>
+              <a:prstGeom prst="roundRect">
+                <a:avLst/>
+              </a:prstGeom>
+              <a:solidFill>
+                <a:schemeClr val="accent4">
+                  <a:lumMod val="40000"/>
+                  <a:lumOff val="60000"/>
+                </a:schemeClr>
+              </a:solidFill>
+            </p:spPr>
+            <p:style>
+              <a:lnRef idx="2">
+                <a:schemeClr val="accent1">
+                  <a:shade val="15000"/>
+                </a:schemeClr>
+              </a:lnRef>
+              <a:fillRef idx="1">
+                <a:schemeClr val="accent1"/>
+              </a:fillRef>
+              <a:effectRef idx="0">
+                <a:schemeClr val="accent1"/>
+              </a:effectRef>
+              <a:fontRef idx="minor">
+                <a:schemeClr val="lt1"/>
+              </a:fontRef>
+            </p:style>
+            <p:txBody>
+              <a:bodyPr rtlCol="0" anchor="ctr"/>
+              <a:lstStyle/>
+              <a:p>
+                <a:pPr algn="ctr"/>
+                <a:r>
+                  <a:rPr lang="en-FI" sz="2800" b="1" dirty="0">
+                    <a:solidFill>
+                      <a:schemeClr val="tx1"/>
+                    </a:solidFill>
+                    <a:latin typeface="Times New Roman" panose="02020603050405020304" pitchFamily="18" charset="0"/>
+                    <a:cs typeface="Times New Roman" panose="02020603050405020304" pitchFamily="18" charset="0"/>
+                  </a:rPr>
+                  <a:t>Evaluation</a:t>
+                </a:r>
+                <a:r>
+                  <a:rPr lang="en-FI" sz="2400" b="1" dirty="0">
+                    <a:solidFill>
+                      <a:schemeClr val="tx1"/>
+                    </a:solidFill>
+                  </a:rPr>
+                  <a:t> </a:t>
+                </a:r>
+                <a:endParaRPr lang="en-GB" sz="2400" b="1" dirty="0">
+                  <a:solidFill>
+                    <a:schemeClr val="tx1"/>
+                  </a:solidFill>
+                </a:endParaRPr>
+              </a:p>
+            </p:txBody>
+          </p:sp>
+          <p:sp>
+            <p:nvSpPr>
+              <p:cNvPr id="30" name="Rectangle: Rounded Corners 29">
+                <a:extLst>
+                  <a:ext uri="{FF2B5EF4-FFF2-40B4-BE49-F238E27FC236}">
+                    <a16:creationId xmlns:a16="http://schemas.microsoft.com/office/drawing/2014/main" id="{D38AC2E5-DCD1-88C0-1926-AFA955933DDB}"/>
+                  </a:ext>
+                </a:extLst>
+              </p:cNvPr>
+              <p:cNvSpPr/>
+              <p:nvPr/>
+            </p:nvSpPr>
+            <p:spPr>
+              <a:xfrm>
+                <a:off x="9821399" y="2857500"/>
+                <a:ext cx="2636054" cy="1295400"/>
+              </a:xfrm>
+              <a:prstGeom prst="roundRect">
+                <a:avLst/>
+              </a:prstGeom>
+              <a:solidFill>
+                <a:srgbClr val="0070C0"/>
+              </a:solidFill>
+            </p:spPr>
+            <p:style>
+              <a:lnRef idx="2">
+                <a:schemeClr val="accent1">
+                  <a:shade val="15000"/>
+                </a:schemeClr>
+              </a:lnRef>
+              <a:fillRef idx="1">
+                <a:schemeClr val="accent1"/>
+              </a:fillRef>
+              <a:effectRef idx="0">
+                <a:schemeClr val="accent1"/>
+              </a:effectRef>
+              <a:fontRef idx="minor">
+                <a:schemeClr val="lt1"/>
+              </a:fontRef>
+            </p:style>
+            <p:txBody>
+              <a:bodyPr rtlCol="0" anchor="ctr"/>
+              <a:lstStyle/>
+              <a:p>
+                <a:pPr algn="ctr"/>
+                <a:r>
+                  <a:rPr lang="en-FI" sz="2400" b="1" dirty="0">
+                    <a:solidFill>
+                      <a:schemeClr val="tx1"/>
+                    </a:solidFill>
+                    <a:latin typeface="Times New Roman" panose="02020603050405020304" pitchFamily="18" charset="0"/>
+                    <a:cs typeface="Times New Roman" panose="02020603050405020304" pitchFamily="18" charset="0"/>
+                  </a:rPr>
+                  <a:t>Algorithm Arms</a:t>
+                </a:r>
+                <a:endParaRPr lang="en-GB" sz="2400" b="1" dirty="0">
+                  <a:solidFill>
+                    <a:schemeClr val="tx1"/>
+                  </a:solidFill>
+                  <a:latin typeface="Times New Roman" panose="02020603050405020304" pitchFamily="18" charset="0"/>
+                  <a:cs typeface="Times New Roman" panose="02020603050405020304" pitchFamily="18" charset="0"/>
+                </a:endParaRPr>
+              </a:p>
+            </p:txBody>
+          </p:sp>
+          <p:sp>
+            <p:nvSpPr>
+              <p:cNvPr id="33" name="Arrow: Right 32">
+                <a:extLst>
+                  <a:ext uri="{FF2B5EF4-FFF2-40B4-BE49-F238E27FC236}">
+                    <a16:creationId xmlns:a16="http://schemas.microsoft.com/office/drawing/2014/main" id="{2752135B-9498-22FC-971D-0DC11933675B}"/>
+                  </a:ext>
+                </a:extLst>
+              </p:cNvPr>
+              <p:cNvSpPr/>
+              <p:nvPr/>
+            </p:nvSpPr>
+            <p:spPr>
+              <a:xfrm>
+                <a:off x="8610980" y="3181350"/>
+                <a:ext cx="688258" cy="647700"/>
+              </a:xfrm>
+              <a:prstGeom prst="rightArrow">
+                <a:avLst/>
+              </a:prstGeom>
+              <a:solidFill>
+                <a:schemeClr val="bg1"/>
+              </a:solidFill>
+            </p:spPr>
+            <p:style>
+              <a:lnRef idx="2">
+                <a:schemeClr val="accent1">
+                  <a:shade val="15000"/>
+                </a:schemeClr>
+              </a:lnRef>
+              <a:fillRef idx="1">
+                <a:schemeClr val="accent1"/>
+              </a:fillRef>
+              <a:effectRef idx="0">
+                <a:schemeClr val="accent1"/>
+              </a:effectRef>
+              <a:fontRef idx="minor">
+                <a:schemeClr val="lt1"/>
+              </a:fontRef>
+            </p:style>
+            <p:txBody>
+              <a:bodyPr rtlCol="0" anchor="ctr"/>
+              <a:lstStyle/>
+              <a:p>
+                <a:pPr algn="ctr"/>
+                <a:endParaRPr lang="en-GB"/>
+              </a:p>
+            </p:txBody>
+          </p:sp>
+          <p:sp>
+            <p:nvSpPr>
+              <p:cNvPr id="35" name="Arrow: Right 34">
+                <a:extLst>
+                  <a:ext uri="{FF2B5EF4-FFF2-40B4-BE49-F238E27FC236}">
+                    <a16:creationId xmlns:a16="http://schemas.microsoft.com/office/drawing/2014/main" id="{5F634524-A969-3CC2-4B18-864DE7037E3D}"/>
+                  </a:ext>
+                </a:extLst>
+              </p:cNvPr>
+              <p:cNvSpPr/>
+              <p:nvPr/>
+            </p:nvSpPr>
+            <p:spPr>
+              <a:xfrm>
+                <a:off x="12957160" y="3137137"/>
+                <a:ext cx="688258" cy="647700"/>
+              </a:xfrm>
+              <a:prstGeom prst="rightArrow">
+                <a:avLst/>
+              </a:prstGeom>
+              <a:solidFill>
+                <a:schemeClr val="bg1"/>
+              </a:solidFill>
+            </p:spPr>
+            <p:style>
+              <a:lnRef idx="2">
+                <a:schemeClr val="accent1">
+                  <a:shade val="15000"/>
+                </a:schemeClr>
+              </a:lnRef>
+              <a:fillRef idx="1">
+                <a:schemeClr val="accent1"/>
+              </a:fillRef>
+              <a:effectRef idx="0">
+                <a:schemeClr val="accent1"/>
+              </a:effectRef>
+              <a:fontRef idx="minor">
+                <a:schemeClr val="lt1"/>
+              </a:fontRef>
+            </p:style>
+            <p:txBody>
+              <a:bodyPr rtlCol="0" anchor="ctr"/>
+              <a:lstStyle/>
+              <a:p>
+                <a:pPr algn="ctr"/>
+                <a:endParaRPr lang="en-GB"/>
+              </a:p>
+            </p:txBody>
+          </p:sp>
+        </p:grpSp>
+      </p:grpSp>
+      <p:sp>
+        <p:nvSpPr>
+          <p:cNvPr id="8" name="Rectangle 7">
+            <a:extLst>
+              <a:ext uri="{FF2B5EF4-FFF2-40B4-BE49-F238E27FC236}">
+                <a16:creationId xmlns:a16="http://schemas.microsoft.com/office/drawing/2014/main" id="{348E54A0-3C8D-4256-94D1-4C971C130021}"/>
+              </a:ext>
+            </a:extLst>
+          </p:cNvPr>
+          <p:cNvSpPr/>
+          <p:nvPr/>
+        </p:nvSpPr>
+        <p:spPr>
+          <a:xfrm>
+            <a:off x="5395907" y="1711747"/>
+            <a:ext cx="3048000" cy="1905000"/>
+          </a:xfrm>
+          <a:prstGeom prst="rect">
+            <a:avLst/>
+          </a:prstGeom>
+          <a:noFill/>
+          <a:ln>
+            <a:solidFill>
+              <a:srgbClr val="FF0000"/>
+            </a:solidFill>
+          </a:ln>
+        </p:spPr>
+        <p:style>
+          <a:lnRef idx="2">
+            <a:schemeClr val="accent1">
+              <a:shade val="15000"/>
+            </a:schemeClr>
+          </a:lnRef>
+          <a:fillRef idx="1">
+            <a:schemeClr val="accent1"/>
+          </a:fillRef>
+          <a:effectRef idx="0">
+            <a:schemeClr val="accent1"/>
+          </a:effectRef>
+          <a:fontRef idx="minor">
+            <a:schemeClr val="lt1"/>
+          </a:fontRef>
+        </p:style>
+        <p:txBody>
+          <a:bodyPr rtlCol="0" anchor="ctr"/>
+          <a:lstStyle/>
+          <a:p>
+            <a:pPr algn="ctr"/>
+            <a:endParaRPr lang="en-GB"/>
+          </a:p>
+        </p:txBody>
+      </p:sp>
+      <p:grpSp>
+        <p:nvGrpSpPr>
+          <p:cNvPr id="61" name="Group 60">
+            <a:extLst>
+              <a:ext uri="{FF2B5EF4-FFF2-40B4-BE49-F238E27FC236}">
+                <a16:creationId xmlns:a16="http://schemas.microsoft.com/office/drawing/2014/main" id="{635FA145-3127-0A4D-D82E-A153D461705F}"/>
+              </a:ext>
+            </a:extLst>
+          </p:cNvPr>
+          <p:cNvGrpSpPr/>
+          <p:nvPr/>
+        </p:nvGrpSpPr>
+        <p:grpSpPr>
+          <a:xfrm>
+            <a:off x="1267953" y="4128154"/>
+            <a:ext cx="15752094" cy="5084200"/>
+            <a:chOff x="1171463" y="4333072"/>
+            <a:chExt cx="16354537" cy="5084200"/>
+          </a:xfrm>
+        </p:grpSpPr>
+        <p:sp>
+          <p:nvSpPr>
+            <p:cNvPr id="37" name="Rounded Rectangle 3">
+              <a:extLst>
+                <a:ext uri="{FF2B5EF4-FFF2-40B4-BE49-F238E27FC236}">
+                  <a16:creationId xmlns:a16="http://schemas.microsoft.com/office/drawing/2014/main" id="{2A586DE9-9E9D-026B-70A4-0FA2868C6D57}"/>
+                </a:ext>
+              </a:extLst>
+            </p:cNvPr>
+            <p:cNvSpPr/>
+            <p:nvPr/>
+          </p:nvSpPr>
+          <p:spPr>
+            <a:xfrm>
+              <a:off x="1171463" y="4333072"/>
+              <a:ext cx="4748661" cy="1191428"/>
+            </a:xfrm>
+            <a:prstGeom prst="roundRect">
+              <a:avLst>
+                <a:gd name="adj" fmla="val 10000"/>
+              </a:avLst>
+            </a:prstGeom>
+            <a:solidFill>
+              <a:schemeClr val="accent1">
+                <a:lumMod val="20000"/>
+                <a:lumOff val="80000"/>
+              </a:schemeClr>
+            </a:solidFill>
+            <a:ln w="15875">
+              <a:solidFill>
+                <a:schemeClr val="tx1"/>
+              </a:solidFill>
+            </a:ln>
+            <a:effectLst/>
+          </p:spPr>
+          <p:style>
+            <a:lnRef idx="1">
+              <a:schemeClr val="accent1"/>
+            </a:lnRef>
+            <a:fillRef idx="3">
+              <a:schemeClr val="accent1"/>
+            </a:fillRef>
+            <a:effectRef idx="2">
+              <a:schemeClr val="accent1"/>
+            </a:effectRef>
+            <a:fontRef idx="minor">
+              <a:schemeClr val="lt1"/>
+            </a:fontRef>
+          </p:style>
+          <p:txBody>
+            <a:bodyPr wrap="square" lIns="128016" tIns="54864" rIns="128016" bIns="54864" rtlCol="0" anchor="ctr"/>
+            <a:lstStyle/>
+            <a:p>
+              <a:pPr algn="ctr"/>
+              <a:r>
+                <a:rPr sz="2400" b="1" dirty="0">
+                  <a:solidFill>
+                    <a:schemeClr val="tx1"/>
+                  </a:solidFill>
+                  <a:latin typeface="Times New Roman"/>
+                </a:rPr>
+                <a:t>Manipulability floor</a:t>
+              </a:r>
+            </a:p>
+            <a:p>
+              <a:pPr algn="ctr"/>
+              <a:r>
+                <a:rPr sz="1900" b="0" dirty="0">
+                  <a:solidFill>
+                    <a:schemeClr val="tx1"/>
+                  </a:solidFill>
+                  <a:latin typeface="Times New Roman"/>
+                </a:rPr>
+                <a:t>w = √det(JJᵀ)  below 0.06</a:t>
+              </a:r>
+            </a:p>
+            <a:p>
+              <a:pPr algn="ctr"/>
+              <a:r>
+                <a:rPr sz="1600" b="0" dirty="0">
+                  <a:solidFill>
+                    <a:schemeClr val="tx1"/>
+                  </a:solidFill>
+                  <a:latin typeface="Times New Roman"/>
+                </a:rPr>
+                <a:t>near-singular: arm loses a direction</a:t>
+              </a:r>
+            </a:p>
+          </p:txBody>
+        </p:sp>
+        <p:grpSp>
+          <p:nvGrpSpPr>
+            <p:cNvPr id="60" name="Group 59">
+              <a:extLst>
+                <a:ext uri="{FF2B5EF4-FFF2-40B4-BE49-F238E27FC236}">
+                  <a16:creationId xmlns:a16="http://schemas.microsoft.com/office/drawing/2014/main" id="{E6DFDB16-1706-7CED-61CE-0CC6A9A70885}"/>
+                </a:ext>
+              </a:extLst>
+            </p:cNvPr>
+            <p:cNvGrpSpPr/>
+            <p:nvPr/>
+          </p:nvGrpSpPr>
+          <p:grpSpPr>
+            <a:xfrm>
+              <a:off x="1171463" y="4772026"/>
+              <a:ext cx="16354537" cy="4645246"/>
+              <a:chOff x="1171463" y="4772026"/>
+              <a:chExt cx="16680552" cy="4645246"/>
+            </a:xfrm>
+          </p:grpSpPr>
+          <p:sp>
+            <p:nvSpPr>
+              <p:cNvPr id="39" name="Rounded Rectangle 4">
+                <a:extLst>
+                  <a:ext uri="{FF2B5EF4-FFF2-40B4-BE49-F238E27FC236}">
+                    <a16:creationId xmlns:a16="http://schemas.microsoft.com/office/drawing/2014/main" id="{80209C48-5E03-2EB8-EA0A-B46A5027791B}"/>
+                  </a:ext>
+                </a:extLst>
+              </p:cNvPr>
+              <p:cNvSpPr/>
+              <p:nvPr/>
+            </p:nvSpPr>
+            <p:spPr>
+              <a:xfrm>
+                <a:off x="1173946" y="6279458"/>
+                <a:ext cx="4845854" cy="1191428"/>
+              </a:xfrm>
+              <a:prstGeom prst="roundRect">
+                <a:avLst>
+                  <a:gd name="adj" fmla="val 10000"/>
+                </a:avLst>
+              </a:prstGeom>
+              <a:solidFill>
+                <a:schemeClr val="accent1">
+                  <a:lumMod val="20000"/>
+                  <a:lumOff val="80000"/>
+                </a:schemeClr>
+              </a:solidFill>
+              <a:ln w="15875">
+                <a:solidFill>
+                  <a:schemeClr val="tx1"/>
+                </a:solidFill>
+              </a:ln>
+              <a:effectLst/>
+            </p:spPr>
+            <p:style>
+              <a:lnRef idx="1">
+                <a:schemeClr val="accent1"/>
+              </a:lnRef>
+              <a:fillRef idx="3">
+                <a:schemeClr val="accent1"/>
+              </a:fillRef>
+              <a:effectRef idx="2">
+                <a:schemeClr val="accent1"/>
+              </a:effectRef>
+              <a:fontRef idx="minor">
+                <a:schemeClr val="lt1"/>
+              </a:fontRef>
+            </p:style>
+            <p:txBody>
+              <a:bodyPr wrap="square" lIns="128016" tIns="54864" rIns="128016" bIns="54864" rtlCol="0" anchor="ctr"/>
+              <a:lstStyle/>
+              <a:p>
+                <a:pPr algn="ctr"/>
+                <a:r>
+                  <a:rPr sz="2400" b="1" dirty="0">
+                    <a:solidFill>
+                      <a:schemeClr val="tx1"/>
+                    </a:solidFill>
+                    <a:latin typeface="Times New Roman"/>
+                  </a:rPr>
+                  <a:t>Joint-limit margin</a:t>
+                </a:r>
+              </a:p>
+              <a:p>
+                <a:pPr algn="ctr"/>
+                <a:r>
+                  <a:rPr sz="1900" b="0" dirty="0">
+                    <a:solidFill>
+                      <a:schemeClr val="tx1"/>
+                    </a:solidFill>
+                    <a:latin typeface="Times New Roman"/>
+                  </a:rPr>
+                  <a:t>clearance under 0.175 rad</a:t>
+                </a:r>
+              </a:p>
+              <a:p>
+                <a:pPr algn="ctr"/>
+                <a:r>
+                  <a:rPr sz="1600" b="0" dirty="0">
+                    <a:solidFill>
+                      <a:schemeClr val="tx1"/>
+                    </a:solidFill>
+                    <a:latin typeface="Times New Roman"/>
+                  </a:rPr>
+                  <a:t>joint approaching its mechanical stop</a:t>
+                </a:r>
+              </a:p>
+            </p:txBody>
+          </p:sp>
+          <p:sp>
+            <p:nvSpPr>
+              <p:cNvPr id="41" name="Rounded Rectangle 5">
+                <a:extLst>
+                  <a:ext uri="{FF2B5EF4-FFF2-40B4-BE49-F238E27FC236}">
+                    <a16:creationId xmlns:a16="http://schemas.microsoft.com/office/drawing/2014/main" id="{93486293-BAAE-062A-2E58-25395736AC2E}"/>
+                  </a:ext>
+                </a:extLst>
+              </p:cNvPr>
+              <p:cNvSpPr/>
+              <p:nvPr/>
+            </p:nvSpPr>
+            <p:spPr>
+              <a:xfrm>
+                <a:off x="1171463" y="8225844"/>
+                <a:ext cx="4845854" cy="1191428"/>
+              </a:xfrm>
+              <a:prstGeom prst="roundRect">
+                <a:avLst>
+                  <a:gd name="adj" fmla="val 10000"/>
+                </a:avLst>
+              </a:prstGeom>
+              <a:solidFill>
+                <a:schemeClr val="accent1">
+                  <a:lumMod val="20000"/>
+                  <a:lumOff val="80000"/>
+                </a:schemeClr>
+              </a:solidFill>
+              <a:ln w="15875">
+                <a:solidFill>
+                  <a:schemeClr val="tx1">
+                    <a:lumMod val="95000"/>
+                    <a:lumOff val="5000"/>
+                  </a:schemeClr>
+                </a:solidFill>
+              </a:ln>
+              <a:effectLst/>
+            </p:spPr>
+            <p:style>
+              <a:lnRef idx="1">
+                <a:schemeClr val="accent1"/>
+              </a:lnRef>
+              <a:fillRef idx="3">
+                <a:schemeClr val="accent1"/>
+              </a:fillRef>
+              <a:effectRef idx="2">
+                <a:schemeClr val="accent1"/>
+              </a:effectRef>
+              <a:fontRef idx="minor">
+                <a:schemeClr val="lt1"/>
+              </a:fontRef>
+            </p:style>
+            <p:txBody>
+              <a:bodyPr wrap="square" lIns="128016" tIns="54864" rIns="128016" bIns="54864" rtlCol="0" anchor="ctr"/>
+              <a:lstStyle/>
+              <a:p>
+                <a:pPr algn="ctr"/>
+                <a:r>
+                  <a:rPr sz="2400" b="1" dirty="0">
+                    <a:solidFill>
+                      <a:schemeClr val="tx1"/>
+                    </a:solidFill>
+                    <a:latin typeface="Times New Roman"/>
+                  </a:rPr>
+                  <a:t>Collision keep-out</a:t>
+                </a:r>
+              </a:p>
+              <a:p>
+                <a:pPr algn="ctr"/>
+                <a:r>
+                  <a:rPr sz="1900" b="0" dirty="0">
+                    <a:solidFill>
+                      <a:schemeClr val="tx1"/>
+                    </a:solidFill>
+                    <a:latin typeface="Times New Roman"/>
+                  </a:rPr>
+                  <a:t>link below 0.05 m</a:t>
+                </a:r>
+              </a:p>
+              <a:p>
+                <a:pPr algn="ctr"/>
+                <a:r>
+                  <a:rPr sz="1600" b="0" dirty="0">
+                    <a:solidFill>
+                      <a:schemeClr val="tx1"/>
+                    </a:solidFill>
+                    <a:latin typeface="Times New Roman"/>
+                  </a:rPr>
+                  <a:t>monitored, inactive in every run</a:t>
+                </a:r>
+              </a:p>
+            </p:txBody>
+          </p:sp>
+          <p:cxnSp>
+            <p:nvCxnSpPr>
+              <p:cNvPr id="46" name="Connector 9">
+                <a:extLst>
+                  <a:ext uri="{FF2B5EF4-FFF2-40B4-BE49-F238E27FC236}">
+                    <a16:creationId xmlns:a16="http://schemas.microsoft.com/office/drawing/2014/main" id="{314C70F3-22A7-BFED-9FB8-E4BFBD4C7842}"/>
+                  </a:ext>
+                </a:extLst>
+              </p:cNvPr>
+              <p:cNvCxnSpPr/>
+              <p:nvPr/>
+            </p:nvCxnSpPr>
+            <p:spPr>
+              <a:xfrm>
+                <a:off x="6032500" y="4772026"/>
+                <a:ext cx="1143000" cy="2057400"/>
+              </a:xfrm>
+              <a:prstGeom prst="bentConnector3">
+                <a:avLst/>
+              </a:prstGeom>
+              <a:ln w="22225">
+                <a:solidFill>
+                  <a:schemeClr val="tx1"/>
+                </a:solidFill>
+                <a:tailEnd type="triangle" w="med" len="med"/>
+              </a:ln>
+            </p:spPr>
+            <p:style>
+              <a:lnRef idx="2">
+                <a:schemeClr val="accent1"/>
+              </a:lnRef>
+              <a:fillRef idx="0">
+                <a:schemeClr val="accent1"/>
+              </a:fillRef>
+              <a:effectRef idx="1">
+                <a:schemeClr val="accent1"/>
+              </a:effectRef>
+              <a:fontRef idx="minor">
+                <a:schemeClr val="tx1"/>
+              </a:fontRef>
+            </p:style>
+          </p:cxnSp>
+          <p:cxnSp>
+            <p:nvCxnSpPr>
+              <p:cNvPr id="47" name="Connector 10">
+                <a:extLst>
+                  <a:ext uri="{FF2B5EF4-FFF2-40B4-BE49-F238E27FC236}">
+                    <a16:creationId xmlns:a16="http://schemas.microsoft.com/office/drawing/2014/main" id="{A4A8301D-E921-A6F7-CE4E-71B13F7F8936}"/>
+                  </a:ext>
+                </a:extLst>
+              </p:cNvPr>
+              <p:cNvCxnSpPr/>
+              <p:nvPr/>
+            </p:nvCxnSpPr>
+            <p:spPr>
+              <a:xfrm flipV="1">
+                <a:off x="6032500" y="6829426"/>
+                <a:ext cx="1143000" cy="0"/>
+              </a:xfrm>
+              <a:prstGeom prst="bentConnector3">
+                <a:avLst/>
+              </a:prstGeom>
+              <a:ln w="22225">
+                <a:solidFill>
+                  <a:schemeClr val="tx1"/>
+                </a:solidFill>
+                <a:tailEnd type="triangle" w="med" len="med"/>
+              </a:ln>
+            </p:spPr>
+            <p:style>
+              <a:lnRef idx="2">
+                <a:schemeClr val="accent1"/>
+              </a:lnRef>
+              <a:fillRef idx="0">
+                <a:schemeClr val="accent1"/>
+              </a:fillRef>
+              <a:effectRef idx="1">
+                <a:schemeClr val="accent1"/>
+              </a:effectRef>
+              <a:fontRef idx="minor">
+                <a:schemeClr val="tx1"/>
+              </a:fontRef>
+            </p:style>
+          </p:cxnSp>
+          <p:cxnSp>
+            <p:nvCxnSpPr>
+              <p:cNvPr id="48" name="Connector 11">
+                <a:extLst>
+                  <a:ext uri="{FF2B5EF4-FFF2-40B4-BE49-F238E27FC236}">
+                    <a16:creationId xmlns:a16="http://schemas.microsoft.com/office/drawing/2014/main" id="{B5104F4D-7293-4F05-2524-2BCFE4E231AE}"/>
+                  </a:ext>
+                </a:extLst>
+              </p:cNvPr>
+              <p:cNvCxnSpPr/>
+              <p:nvPr/>
+            </p:nvCxnSpPr>
+            <p:spPr>
+              <a:xfrm flipV="1">
+                <a:off x="6032500" y="6829426"/>
+                <a:ext cx="1143000" cy="2057400"/>
+              </a:xfrm>
+              <a:prstGeom prst="bentConnector3">
+                <a:avLst/>
+              </a:prstGeom>
+              <a:ln w="22225">
+                <a:solidFill>
+                  <a:schemeClr val="tx1"/>
+                </a:solidFill>
+                <a:tailEnd type="triangle" w="med" len="med"/>
+              </a:ln>
+            </p:spPr>
+            <p:style>
+              <a:lnRef idx="2">
+                <a:schemeClr val="accent1"/>
+              </a:lnRef>
+              <a:fillRef idx="0">
+                <a:schemeClr val="accent1"/>
+              </a:fillRef>
+              <a:effectRef idx="1">
+                <a:schemeClr val="accent1"/>
+              </a:effectRef>
+              <a:fontRef idx="minor">
+                <a:schemeClr val="tx1"/>
+              </a:fontRef>
+            </p:style>
+          </p:cxnSp>
+          <p:sp>
+            <p:nvSpPr>
+              <p:cNvPr id="49" name="Rounded Rectangle 6">
+                <a:extLst>
+                  <a:ext uri="{FF2B5EF4-FFF2-40B4-BE49-F238E27FC236}">
+                    <a16:creationId xmlns:a16="http://schemas.microsoft.com/office/drawing/2014/main" id="{58B4A15D-1408-BC02-A3F4-DB283DA3AA33}"/>
+                  </a:ext>
+                </a:extLst>
+              </p:cNvPr>
+              <p:cNvSpPr/>
+              <p:nvPr/>
+            </p:nvSpPr>
+            <p:spPr>
+              <a:xfrm>
+                <a:off x="7190683" y="6029326"/>
+                <a:ext cx="3200400" cy="1600200"/>
+              </a:xfrm>
+              <a:prstGeom prst="roundRect">
+                <a:avLst>
+                  <a:gd name="adj" fmla="val 10000"/>
+                </a:avLst>
+              </a:prstGeom>
+              <a:solidFill>
+                <a:schemeClr val="accent5">
+                  <a:lumMod val="20000"/>
+                  <a:lumOff val="80000"/>
+                </a:schemeClr>
+              </a:solidFill>
+              <a:ln w="15875">
+                <a:solidFill>
+                  <a:schemeClr val="tx1">
+                    <a:lumMod val="95000"/>
+                    <a:lumOff val="5000"/>
+                  </a:schemeClr>
+                </a:solidFill>
+              </a:ln>
+              <a:effectLst/>
+            </p:spPr>
+            <p:style>
+              <a:lnRef idx="1">
+                <a:schemeClr val="accent1"/>
+              </a:lnRef>
+              <a:fillRef idx="3">
+                <a:schemeClr val="accent1"/>
+              </a:fillRef>
+              <a:effectRef idx="2">
+                <a:schemeClr val="accent1"/>
+              </a:effectRef>
+              <a:fontRef idx="minor">
+                <a:schemeClr val="lt1"/>
+              </a:fontRef>
+            </p:style>
+            <p:txBody>
+              <a:bodyPr wrap="square" lIns="128016" tIns="54864" rIns="128016" bIns="54864" rtlCol="0" anchor="ctr"/>
+              <a:lstStyle/>
+              <a:p>
+                <a:pPr algn="ctr"/>
+                <a:r>
+                  <a:rPr sz="2800" b="1" dirty="0">
+                    <a:solidFill>
+                      <a:schemeClr val="tx1"/>
+                    </a:solidFill>
+                    <a:latin typeface="Times New Roman"/>
+                  </a:rPr>
+                  <a:t>Aggregate cost</a:t>
+                </a:r>
+              </a:p>
+              <a:p>
+                <a:pPr algn="ctr"/>
+                <a:r>
+                  <a:rPr sz="2000" b="0" dirty="0">
+                    <a:solidFill>
+                      <a:schemeClr val="tx1"/>
+                    </a:solidFill>
+                    <a:latin typeface="Times New Roman"/>
+                  </a:rPr>
+                  <a:t>c = sum of the three</a:t>
+                </a:r>
+              </a:p>
+              <a:p>
+                <a:pPr algn="ctr"/>
+                <a:r>
+                  <a:rPr b="0" dirty="0">
+                    <a:solidFill>
+                      <a:schemeClr val="tx1"/>
+                    </a:solidFill>
+                    <a:latin typeface="Times New Roman"/>
+                  </a:rPr>
+                  <a:t>one λ governs all</a:t>
+                </a:r>
+              </a:p>
+            </p:txBody>
+          </p:sp>
+          <p:sp>
+            <p:nvSpPr>
+              <p:cNvPr id="50" name="Rounded Rectangle 7">
+                <a:extLst>
+                  <a:ext uri="{FF2B5EF4-FFF2-40B4-BE49-F238E27FC236}">
+                    <a16:creationId xmlns:a16="http://schemas.microsoft.com/office/drawing/2014/main" id="{A2DD266C-AA7F-9414-3616-BFE1A8445320}"/>
+                  </a:ext>
+                </a:extLst>
+              </p:cNvPr>
+              <p:cNvSpPr/>
+              <p:nvPr/>
+            </p:nvSpPr>
+            <p:spPr>
+              <a:xfrm>
+                <a:off x="11396923" y="6029326"/>
+                <a:ext cx="3017520" cy="1600200"/>
+              </a:xfrm>
+              <a:prstGeom prst="roundRect">
+                <a:avLst>
+                  <a:gd name="adj" fmla="val 10000"/>
+                </a:avLst>
+              </a:prstGeom>
+              <a:solidFill>
+                <a:schemeClr val="accent5">
+                  <a:lumMod val="20000"/>
+                  <a:lumOff val="80000"/>
+                </a:schemeClr>
+              </a:solidFill>
+              <a:ln w="15875">
+                <a:solidFill>
+                  <a:schemeClr val="tx1">
+                    <a:lumMod val="95000"/>
+                    <a:lumOff val="5000"/>
+                  </a:schemeClr>
+                </a:solidFill>
+              </a:ln>
+              <a:effectLst/>
+            </p:spPr>
+            <p:style>
+              <a:lnRef idx="1">
+                <a:schemeClr val="accent1"/>
+              </a:lnRef>
+              <a:fillRef idx="3">
+                <a:schemeClr val="accent1"/>
+              </a:fillRef>
+              <a:effectRef idx="2">
+                <a:schemeClr val="accent1"/>
+              </a:effectRef>
+              <a:fontRef idx="minor">
+                <a:schemeClr val="lt1"/>
+              </a:fontRef>
+            </p:style>
+            <p:txBody>
+              <a:bodyPr wrap="square" lIns="128016" tIns="54864" rIns="128016" bIns="54864" rtlCol="0" anchor="ctr"/>
+              <a:lstStyle/>
+              <a:p>
+                <a:pPr algn="ctr"/>
+                <a:r>
+                  <a:rPr sz="2800" b="1" dirty="0">
+                    <a:solidFill>
+                      <a:schemeClr val="tx1"/>
+                    </a:solidFill>
+                    <a:latin typeface="Times New Roman"/>
+                  </a:rPr>
+                  <a:t>Episodic cost</a:t>
+                </a:r>
+              </a:p>
+              <a:p>
+                <a:pPr algn="ctr"/>
+                <a:r>
+                  <a:rPr sz="2000" b="0" dirty="0">
+                    <a:solidFill>
+                      <a:schemeClr val="tx1"/>
+                    </a:solidFill>
+                    <a:latin typeface="Times New Roman"/>
+                  </a:rPr>
+                  <a:t>undiscounted sum</a:t>
+                </a:r>
+              </a:p>
+              <a:p>
+                <a:pPr algn="ctr"/>
+                <a:r>
+                  <a:rPr b="0" dirty="0">
+                    <a:solidFill>
+                      <a:schemeClr val="tx1"/>
+                    </a:solidFill>
+                    <a:latin typeface="Times New Roman"/>
+                  </a:rPr>
+                  <a:t>over 250 steps</a:t>
+                </a:r>
+              </a:p>
+            </p:txBody>
+          </p:sp>
+          <p:sp>
+            <p:nvSpPr>
+              <p:cNvPr id="51" name="Rounded Rectangle 8">
+                <a:extLst>
+                  <a:ext uri="{FF2B5EF4-FFF2-40B4-BE49-F238E27FC236}">
+                    <a16:creationId xmlns:a16="http://schemas.microsoft.com/office/drawing/2014/main" id="{6E2C77B0-5827-8546-8EE7-99E1125FC651}"/>
+                  </a:ext>
+                </a:extLst>
+              </p:cNvPr>
+              <p:cNvSpPr/>
+              <p:nvPr/>
+            </p:nvSpPr>
+            <p:spPr>
+              <a:xfrm>
+                <a:off x="15420282" y="6029326"/>
+                <a:ext cx="2431733" cy="1600200"/>
+              </a:xfrm>
+              <a:prstGeom prst="roundRect">
+                <a:avLst>
+                  <a:gd name="adj" fmla="val 10000"/>
+                </a:avLst>
+              </a:prstGeom>
+              <a:solidFill>
+                <a:schemeClr val="accent5">
+                  <a:lumMod val="20000"/>
+                  <a:lumOff val="80000"/>
+                </a:schemeClr>
+              </a:solidFill>
+              <a:ln w="15875">
+                <a:solidFill>
+                  <a:schemeClr val="tx1">
+                    <a:lumMod val="95000"/>
+                    <a:lumOff val="5000"/>
+                  </a:schemeClr>
+                </a:solidFill>
+              </a:ln>
+              <a:effectLst/>
+            </p:spPr>
+            <p:style>
+              <a:lnRef idx="1">
+                <a:schemeClr val="accent1"/>
+              </a:lnRef>
+              <a:fillRef idx="3">
+                <a:schemeClr val="accent1"/>
+              </a:fillRef>
+              <a:effectRef idx="2">
+                <a:schemeClr val="accent1"/>
+              </a:effectRef>
+              <a:fontRef idx="minor">
+                <a:schemeClr val="lt1"/>
+              </a:fontRef>
+            </p:style>
+            <p:txBody>
+              <a:bodyPr wrap="square" lIns="128016" tIns="54864" rIns="128016" bIns="54864" rtlCol="0" anchor="ctr"/>
+              <a:lstStyle/>
+              <a:p>
+                <a:pPr algn="ctr"/>
+                <a:r>
+                  <a:rPr sz="2800" b="1" dirty="0">
+                    <a:solidFill>
+                      <a:schemeClr val="tx1"/>
+                    </a:solidFill>
+                    <a:latin typeface="Times New Roman"/>
+                  </a:rPr>
+                  <a:t>Budget</a:t>
+                </a:r>
+              </a:p>
+              <a:p>
+                <a:pPr algn="ctr"/>
+                <a:r>
+                  <a:rPr sz="2400" b="1" dirty="0">
+                    <a:solidFill>
+                      <a:schemeClr val="tx1"/>
+                    </a:solidFill>
+                    <a:latin typeface="Times New Roman"/>
+                  </a:rPr>
+                  <a:t>d = 25</a:t>
+                </a:r>
+              </a:p>
+              <a:p>
+                <a:pPr algn="ctr"/>
+                <a:r>
+                  <a:rPr sz="2400" b="1" dirty="0">
+                    <a:solidFill>
+                      <a:schemeClr val="tx1"/>
+                    </a:solidFill>
+                    <a:latin typeface="Times New Roman"/>
+                  </a:rPr>
+                  <a:t>or d = 15</a:t>
+                </a:r>
+              </a:p>
+            </p:txBody>
+          </p:sp>
+          <p:cxnSp>
+            <p:nvCxnSpPr>
+              <p:cNvPr id="52" name="Connector 12">
+                <a:extLst>
+                  <a:ext uri="{FF2B5EF4-FFF2-40B4-BE49-F238E27FC236}">
+                    <a16:creationId xmlns:a16="http://schemas.microsoft.com/office/drawing/2014/main" id="{6040B8B3-0235-1B43-B53A-3AA0F8A85578}"/>
+                  </a:ext>
+                </a:extLst>
+              </p:cNvPr>
+              <p:cNvCxnSpPr>
+                <a:stCxn id="49" idx="3"/>
+                <a:endCxn id="50" idx="1"/>
+              </p:cNvCxnSpPr>
+              <p:nvPr/>
+            </p:nvCxnSpPr>
+            <p:spPr>
+              <a:xfrm>
+                <a:off x="10391083" y="6829426"/>
+                <a:ext cx="1005840" cy="0"/>
+              </a:xfrm>
+              <a:prstGeom prst="line">
+                <a:avLst/>
+              </a:prstGeom>
+              <a:ln w="22225">
+                <a:solidFill>
+                  <a:schemeClr val="tx1"/>
+                </a:solidFill>
+                <a:tailEnd type="triangle" w="med" len="med"/>
+              </a:ln>
+            </p:spPr>
+            <p:style>
+              <a:lnRef idx="2">
+                <a:schemeClr val="accent1"/>
+              </a:lnRef>
+              <a:fillRef idx="0">
+                <a:schemeClr val="accent1"/>
+              </a:fillRef>
+              <a:effectRef idx="1">
+                <a:schemeClr val="accent1"/>
+              </a:effectRef>
+              <a:fontRef idx="minor">
+                <a:schemeClr val="tx1"/>
+              </a:fontRef>
+            </p:style>
+          </p:cxnSp>
+          <p:cxnSp>
+            <p:nvCxnSpPr>
+              <p:cNvPr id="53" name="Connector 13">
+                <a:extLst>
+                  <a:ext uri="{FF2B5EF4-FFF2-40B4-BE49-F238E27FC236}">
+                    <a16:creationId xmlns:a16="http://schemas.microsoft.com/office/drawing/2014/main" id="{385EFE4E-390A-769E-D18C-417A24137E3A}"/>
+                  </a:ext>
+                </a:extLst>
+              </p:cNvPr>
+              <p:cNvCxnSpPr>
+                <a:cxnSpLocks/>
+                <a:stCxn id="50" idx="3"/>
+                <a:endCxn id="51" idx="1"/>
+              </p:cNvCxnSpPr>
+              <p:nvPr/>
+            </p:nvCxnSpPr>
+            <p:spPr>
+              <a:xfrm>
+                <a:off x="14414443" y="6829426"/>
+                <a:ext cx="1005839" cy="0"/>
+              </a:xfrm>
+              <a:prstGeom prst="line">
+                <a:avLst/>
+              </a:prstGeom>
+              <a:ln w="22225">
+                <a:solidFill>
+                  <a:schemeClr val="tx1"/>
+                </a:solidFill>
+                <a:tailEnd type="triangle" w="med" len="med"/>
+              </a:ln>
+            </p:spPr>
+            <p:style>
+              <a:lnRef idx="2">
+                <a:schemeClr val="accent1"/>
+              </a:lnRef>
+              <a:fillRef idx="0">
+                <a:schemeClr val="accent1"/>
+              </a:fillRef>
+              <a:effectRef idx="1">
+                <a:schemeClr val="accent1"/>
+              </a:effectRef>
+              <a:fontRef idx="minor">
+                <a:schemeClr val="tx1"/>
+              </a:fontRef>
+            </p:style>
+          </p:cxnSp>
+        </p:grpSp>
+      </p:grpSp>
+    </p:spTree>
+    <p:extLst>
+      <p:ext uri="{BB962C8B-B14F-4D97-AF65-F5344CB8AC3E}">
+        <p14:creationId xmlns:p14="http://schemas.microsoft.com/office/powerpoint/2010/main" val="826378533"/>
+      </p:ext>
+    </p:extLst>
+  </p:cSld>
+  <p:clrMapOvr>
+    <a:masterClrMapping/>
+  </p:clrMapOvr>
+  <mc:AlternateContent xmlns:mc="http://schemas.openxmlformats.org/markup-compatibility/2006">
+    <mc:Choice xmlns:p159="http://schemas.microsoft.com/office/powerpoint/2015/09/main" Requires="p159">
+      <p:transition spd="slow">
+        <p159:morph option="byObject"/>
+      </p:transition>
+    </mc:Choice>
+    <mc:Fallback>
+      <p:transition spd="slow">
+        <p:fade/>
+      </p:transition>
+    </mc:Fallback>
+  </mc:AlternateContent>
+</p:sld>
+</file>
+
+<file path=ppt/slides/slide11.xml><?xml version="1.0" encoding="utf-8"?>
 <p:sld xmlns:a="http://schemas.openxmlformats.org/drawingml/2006/main" xmlns:r="http://schemas.openxmlformats.org/officeDocument/2006/relationships" xmlns:p="http://schemas.openxmlformats.org/presentationml/2006/main">
   <p:cSld>
     <p:spTree>
@@ -4119,7 +5534,7 @@
         <p:grpSpPr>
           <a:xfrm>
             <a:off x="1267953" y="2019300"/>
-            <a:ext cx="15752094" cy="1143000"/>
+            <a:ext cx="15752094" cy="1295400"/>
             <a:chOff x="1173946" y="2857500"/>
             <a:chExt cx="15752094" cy="1295400"/>
           </a:xfrm>
@@ -4347,8 +5762,9 @@
                 <a:avLst/>
               </a:prstGeom>
               <a:solidFill>
-                <a:schemeClr val="accent6">
-                  <a:lumMod val="75000"/>
+                <a:schemeClr val="accent4">
+                  <a:lumMod val="40000"/>
+                  <a:lumOff val="60000"/>
                 </a:schemeClr>
               </a:solidFill>
             </p:spPr>
@@ -4578,836 +5994,7 @@
         </p:nvSpPr>
         <p:spPr>
           <a:xfrm>
-            <a:off x="9709433" y="1711747"/>
-            <a:ext cx="3048000" cy="1755353"/>
-          </a:xfrm>
-          <a:prstGeom prst="rect">
-            <a:avLst/>
-          </a:prstGeom>
-          <a:noFill/>
-          <a:ln>
-            <a:solidFill>
-              <a:srgbClr val="FF0000"/>
-            </a:solidFill>
-          </a:ln>
-        </p:spPr>
-        <p:style>
-          <a:lnRef idx="2">
-            <a:schemeClr val="accent1">
-              <a:shade val="15000"/>
-            </a:schemeClr>
-          </a:lnRef>
-          <a:fillRef idx="1">
-            <a:schemeClr val="accent1"/>
-          </a:fillRef>
-          <a:effectRef idx="0">
-            <a:schemeClr val="accent1"/>
-          </a:effectRef>
-          <a:fontRef idx="minor">
-            <a:schemeClr val="lt1"/>
-          </a:fontRef>
-        </p:style>
-        <p:txBody>
-          <a:bodyPr rtlCol="0" anchor="ctr"/>
-          <a:lstStyle/>
-          <a:p>
-            <a:pPr algn="ctr"/>
-            <a:endParaRPr lang="en-GB"/>
-          </a:p>
-        </p:txBody>
-      </p:sp>
-      <p:sp>
-        <p:nvSpPr>
-          <p:cNvPr id="6" name="TextBox 5">
-            <a:extLst>
-              <a:ext uri="{FF2B5EF4-FFF2-40B4-BE49-F238E27FC236}">
-                <a16:creationId xmlns:a16="http://schemas.microsoft.com/office/drawing/2014/main" id="{5C1531D1-2654-1EDB-498B-E2C82E985FFD}"/>
-              </a:ext>
-            </a:extLst>
-          </p:cNvPr>
-          <p:cNvSpPr txBox="1"/>
-          <p:nvPr/>
-        </p:nvSpPr>
-        <p:spPr>
-          <a:xfrm>
-            <a:off x="4717287" y="4525641"/>
-            <a:ext cx="8853426" cy="3539430"/>
-          </a:xfrm>
-          <a:prstGeom prst="rect">
-            <a:avLst/>
-          </a:prstGeom>
-          <a:noFill/>
-        </p:spPr>
-        <p:txBody>
-          <a:bodyPr wrap="square" rtlCol="0">
-            <a:spAutoFit/>
-          </a:bodyPr>
-          <a:lstStyle/>
-          <a:p>
-            <a:pPr marL="514350" indent="-514350">
-              <a:buFont typeface="Wingdings" panose="05000000000000000000" pitchFamily="2" charset="2"/>
-              <a:buChar char="§"/>
-            </a:pPr>
-            <a:r>
-              <a:rPr lang="en-FI" sz="3200" dirty="0">
-                <a:latin typeface="Times New Roman" panose="02020603050405020304" pitchFamily="18" charset="0"/>
-                <a:cs typeface="Times New Roman" panose="02020603050405020304" pitchFamily="18" charset="0"/>
-              </a:rPr>
-              <a:t>Proximal Policy Optimization (PPO)</a:t>
-            </a:r>
-          </a:p>
-          <a:p>
-            <a:pPr marL="514350" indent="-514350">
-              <a:buFont typeface="Wingdings" panose="05000000000000000000" pitchFamily="2" charset="2"/>
-              <a:buChar char="§"/>
-            </a:pPr>
-            <a:endParaRPr lang="en-FI" sz="3200" dirty="0">
-              <a:latin typeface="Times New Roman" panose="02020603050405020304" pitchFamily="18" charset="0"/>
-              <a:cs typeface="Times New Roman" panose="02020603050405020304" pitchFamily="18" charset="0"/>
-            </a:endParaRPr>
-          </a:p>
-          <a:p>
-            <a:pPr marL="514350" indent="-514350">
-              <a:buFont typeface="Wingdings" panose="05000000000000000000" pitchFamily="2" charset="2"/>
-              <a:buChar char="§"/>
-            </a:pPr>
-            <a:r>
-              <a:rPr lang="en-FI" sz="3200" dirty="0">
-                <a:latin typeface="Times New Roman" panose="02020603050405020304" pitchFamily="18" charset="0"/>
-                <a:cs typeface="Times New Roman" panose="02020603050405020304" pitchFamily="18" charset="0"/>
-              </a:rPr>
-              <a:t>PPO (baseline)</a:t>
-            </a:r>
-          </a:p>
-          <a:p>
-            <a:pPr marL="514350" indent="-514350">
-              <a:buFont typeface="Wingdings" panose="05000000000000000000" pitchFamily="2" charset="2"/>
-              <a:buChar char="§"/>
-            </a:pPr>
-            <a:endParaRPr lang="en-FI" sz="3200" dirty="0">
-              <a:latin typeface="Times New Roman" panose="02020603050405020304" pitchFamily="18" charset="0"/>
-              <a:cs typeface="Times New Roman" panose="02020603050405020304" pitchFamily="18" charset="0"/>
-            </a:endParaRPr>
-          </a:p>
-          <a:p>
-            <a:pPr marL="514350" indent="-514350">
-              <a:buFont typeface="Wingdings" panose="05000000000000000000" pitchFamily="2" charset="2"/>
-              <a:buChar char="§"/>
-            </a:pPr>
-            <a:r>
-              <a:rPr lang="en-FI" sz="3200" dirty="0">
-                <a:latin typeface="Times New Roman" panose="02020603050405020304" pitchFamily="18" charset="0"/>
-                <a:cs typeface="Times New Roman" panose="02020603050405020304" pitchFamily="18" charset="0"/>
-              </a:rPr>
-              <a:t>Constraint Proximal Policy Optimization (</a:t>
-            </a:r>
-            <a:r>
-              <a:rPr lang="en-FI" sz="3200" dirty="0" err="1">
-                <a:latin typeface="Times New Roman" panose="02020603050405020304" pitchFamily="18" charset="0"/>
-                <a:cs typeface="Times New Roman" panose="02020603050405020304" pitchFamily="18" charset="0"/>
-              </a:rPr>
-              <a:t>cPPO</a:t>
-            </a:r>
-            <a:r>
-              <a:rPr lang="en-FI" sz="3200" dirty="0">
-                <a:latin typeface="Times New Roman" panose="02020603050405020304" pitchFamily="18" charset="0"/>
-                <a:cs typeface="Times New Roman" panose="02020603050405020304" pitchFamily="18" charset="0"/>
-              </a:rPr>
-              <a:t>)</a:t>
-            </a:r>
-          </a:p>
-          <a:p>
-            <a:pPr marL="514350" indent="-514350">
-              <a:buFont typeface="Wingdings" panose="05000000000000000000" pitchFamily="2" charset="2"/>
-              <a:buChar char="§"/>
-            </a:pPr>
-            <a:endParaRPr lang="en-FI" sz="3200" dirty="0">
-              <a:latin typeface="Times New Roman" panose="02020603050405020304" pitchFamily="18" charset="0"/>
-              <a:cs typeface="Times New Roman" panose="02020603050405020304" pitchFamily="18" charset="0"/>
-            </a:endParaRPr>
-          </a:p>
-          <a:p>
-            <a:pPr marL="514350" indent="-514350">
-              <a:buFont typeface="Wingdings" panose="05000000000000000000" pitchFamily="2" charset="2"/>
-              <a:buChar char="§"/>
-            </a:pPr>
-            <a:r>
-              <a:rPr lang="en-FI" sz="3200" dirty="0">
-                <a:latin typeface="Times New Roman" panose="02020603050405020304" pitchFamily="18" charset="0"/>
-                <a:cs typeface="Times New Roman" panose="02020603050405020304" pitchFamily="18" charset="0"/>
-              </a:rPr>
-              <a:t>Budget Limit d = 25 &amp; 15 </a:t>
-            </a:r>
-            <a:endParaRPr lang="en-GB" sz="3200" dirty="0">
-              <a:latin typeface="Times New Roman" panose="02020603050405020304" pitchFamily="18" charset="0"/>
-              <a:cs typeface="Times New Roman" panose="02020603050405020304" pitchFamily="18" charset="0"/>
-            </a:endParaRPr>
-          </a:p>
-        </p:txBody>
-      </p:sp>
-    </p:spTree>
-    <p:extLst>
-      <p:ext uri="{BB962C8B-B14F-4D97-AF65-F5344CB8AC3E}">
-        <p14:creationId xmlns:p14="http://schemas.microsoft.com/office/powerpoint/2010/main" val="483871233"/>
-      </p:ext>
-    </p:extLst>
-  </p:cSld>
-  <p:clrMapOvr>
-    <a:masterClrMapping/>
-  </p:clrMapOvr>
-  <mc:AlternateContent xmlns:mc="http://schemas.openxmlformats.org/markup-compatibility/2006">
-    <mc:Choice xmlns:p159="http://schemas.microsoft.com/office/powerpoint/2015/09/main" Requires="p159">
-      <p:transition spd="med">
-        <p159:morph option="byObject"/>
-      </p:transition>
-    </mc:Choice>
-    <mc:Fallback>
-      <p:transition spd="med">
-        <p:fade/>
-      </p:transition>
-    </mc:Fallback>
-  </mc:AlternateContent>
-</p:sld>
-</file>
-
-<file path=ppt/slides/slide11.xml><?xml version="1.0" encoding="utf-8"?>
-<p:sld xmlns:a="http://schemas.openxmlformats.org/drawingml/2006/main" xmlns:r="http://schemas.openxmlformats.org/officeDocument/2006/relationships" xmlns:p="http://schemas.openxmlformats.org/presentationml/2006/main">
-  <p:cSld>
-    <p:spTree>
-      <p:nvGrpSpPr>
-        <p:cNvPr id="1" name="">
-          <a:extLst>
-            <a:ext uri="{FF2B5EF4-FFF2-40B4-BE49-F238E27FC236}">
-              <a16:creationId xmlns:a16="http://schemas.microsoft.com/office/drawing/2014/main" id="{92069629-DF0E-B701-4625-7FF713A7B97B}"/>
-            </a:ext>
-          </a:extLst>
-        </p:cNvPr>
-        <p:cNvGrpSpPr/>
-        <p:nvPr/>
-      </p:nvGrpSpPr>
-      <p:grpSpPr>
-        <a:xfrm>
-          <a:off x="0" y="0"/>
-          <a:ext cx="0" cy="0"/>
-          <a:chOff x="0" y="0"/>
-          <a:chExt cx="0" cy="0"/>
-        </a:xfrm>
-      </p:grpSpPr>
-      <p:sp>
-        <p:nvSpPr>
-          <p:cNvPr id="3" name="TextBox 3">
-            <a:extLst>
-              <a:ext uri="{FF2B5EF4-FFF2-40B4-BE49-F238E27FC236}">
-                <a16:creationId xmlns:a16="http://schemas.microsoft.com/office/drawing/2014/main" id="{9EC50B51-938D-EBCA-DCF6-5390281DA778}"/>
-              </a:ext>
-            </a:extLst>
-          </p:cNvPr>
-          <p:cNvSpPr txBox="1"/>
-          <p:nvPr/>
-        </p:nvSpPr>
-        <p:spPr>
-          <a:xfrm>
-            <a:off x="228600" y="756371"/>
-            <a:ext cx="4715042" cy="658835"/>
-          </a:xfrm>
-          <a:prstGeom prst="rect">
-            <a:avLst/>
-          </a:prstGeom>
-        </p:spPr>
-        <p:txBody>
-          <a:bodyPr wrap="square" lIns="0" tIns="0" rIns="0" bIns="0" rtlCol="0" anchor="t">
-            <a:spAutoFit/>
-          </a:bodyPr>
-          <a:lstStyle/>
-          <a:p>
-            <a:pPr algn="ctr">
-              <a:lnSpc>
-                <a:spcPts val="5599"/>
-              </a:lnSpc>
-            </a:pPr>
-            <a:r>
-              <a:rPr lang="en-US" sz="3999" b="1" dirty="0">
-                <a:solidFill>
-                  <a:srgbClr val="000000"/>
-                </a:solidFill>
-                <a:latin typeface="Times New Roman Bold"/>
-                <a:ea typeface="Times New Roman Bold"/>
-                <a:cs typeface="Times New Roman Bold"/>
-                <a:sym typeface="Times New Roman Bold"/>
-              </a:rPr>
-              <a:t>Methodology:</a:t>
-            </a:r>
-          </a:p>
-        </p:txBody>
-      </p:sp>
-      <p:grpSp>
-        <p:nvGrpSpPr>
-          <p:cNvPr id="23" name="Group 22">
-            <a:extLst>
-              <a:ext uri="{FF2B5EF4-FFF2-40B4-BE49-F238E27FC236}">
-                <a16:creationId xmlns:a16="http://schemas.microsoft.com/office/drawing/2014/main" id="{762DCFDA-8905-E8A0-31E0-1546084918C8}"/>
-              </a:ext>
-            </a:extLst>
-          </p:cNvPr>
-          <p:cNvGrpSpPr/>
-          <p:nvPr/>
-        </p:nvGrpSpPr>
-        <p:grpSpPr>
-          <a:xfrm>
-            <a:off x="6831674" y="4615647"/>
-            <a:ext cx="7313452" cy="523220"/>
-            <a:chOff x="5532377" y="1858833"/>
-            <a:chExt cx="4535474" cy="523220"/>
-          </a:xfrm>
-        </p:grpSpPr>
-        <p:sp>
-          <p:nvSpPr>
-            <p:cNvPr id="20" name="TextBox 19">
-              <a:extLst>
-                <a:ext uri="{FF2B5EF4-FFF2-40B4-BE49-F238E27FC236}">
-                  <a16:creationId xmlns:a16="http://schemas.microsoft.com/office/drawing/2014/main" id="{C3A5125A-3AA6-7A9C-2336-B738F977857E}"/>
-                </a:ext>
-              </a:extLst>
-            </p:cNvPr>
-            <p:cNvSpPr txBox="1"/>
-            <p:nvPr/>
-          </p:nvSpPr>
-          <p:spPr>
-            <a:xfrm>
-              <a:off x="5532377" y="1858833"/>
-              <a:ext cx="2433674" cy="523220"/>
-            </a:xfrm>
-            <a:prstGeom prst="rect">
-              <a:avLst/>
-            </a:prstGeom>
-            <a:noFill/>
-          </p:spPr>
-          <p:txBody>
-            <a:bodyPr wrap="square" rtlCol="0">
-              <a:spAutoFit/>
-            </a:bodyPr>
-            <a:lstStyle/>
-            <a:p>
-              <a:pPr marL="457200" indent="-457200">
-                <a:buFont typeface="Arial" panose="020B0604020202020204" pitchFamily="34" charset="0"/>
-                <a:buChar char="•"/>
-              </a:pPr>
-              <a:endParaRPr lang="en-GB" sz="2800" dirty="0"/>
-            </a:p>
-          </p:txBody>
-        </p:sp>
-        <p:sp>
-          <p:nvSpPr>
-            <p:cNvPr id="22" name="TextBox 21">
-              <a:extLst>
-                <a:ext uri="{FF2B5EF4-FFF2-40B4-BE49-F238E27FC236}">
-                  <a16:creationId xmlns:a16="http://schemas.microsoft.com/office/drawing/2014/main" id="{C0C19B77-7543-9C02-F050-26E2442E5930}"/>
-                </a:ext>
-              </a:extLst>
-            </p:cNvPr>
-            <p:cNvSpPr txBox="1"/>
-            <p:nvPr/>
-          </p:nvSpPr>
-          <p:spPr>
-            <a:xfrm>
-              <a:off x="7696200" y="1858833"/>
-              <a:ext cx="2371651" cy="523220"/>
-            </a:xfrm>
-            <a:prstGeom prst="rect">
-              <a:avLst/>
-            </a:prstGeom>
-            <a:noFill/>
-          </p:spPr>
-          <p:txBody>
-            <a:bodyPr wrap="square" rtlCol="0">
-              <a:spAutoFit/>
-            </a:bodyPr>
-            <a:lstStyle/>
-            <a:p>
-              <a:pPr marL="457200" indent="-457200">
-                <a:buFont typeface="Arial" panose="020B0604020202020204" pitchFamily="34" charset="0"/>
-                <a:buChar char="•"/>
-              </a:pPr>
-              <a:endParaRPr lang="en-GB" sz="2800" dirty="0"/>
-            </a:p>
-          </p:txBody>
-        </p:sp>
-      </p:grpSp>
-      <p:grpSp>
-        <p:nvGrpSpPr>
-          <p:cNvPr id="4" name="Group 3">
-            <a:extLst>
-              <a:ext uri="{FF2B5EF4-FFF2-40B4-BE49-F238E27FC236}">
-                <a16:creationId xmlns:a16="http://schemas.microsoft.com/office/drawing/2014/main" id="{2B8E0E5F-4D4E-8771-1A84-A3F40B86CD13}"/>
-              </a:ext>
-            </a:extLst>
-          </p:cNvPr>
-          <p:cNvGrpSpPr/>
-          <p:nvPr/>
-        </p:nvGrpSpPr>
-        <p:grpSpPr>
-          <a:xfrm>
-            <a:off x="1267953" y="2019300"/>
-            <a:ext cx="15752094" cy="1219200"/>
-            <a:chOff x="1173946" y="2857500"/>
-            <a:chExt cx="15752094" cy="1295400"/>
-          </a:xfrm>
-        </p:grpSpPr>
-        <p:sp>
-          <p:nvSpPr>
-            <p:cNvPr id="31" name="Arrow: Right 30">
-              <a:extLst>
-                <a:ext uri="{FF2B5EF4-FFF2-40B4-BE49-F238E27FC236}">
-                  <a16:creationId xmlns:a16="http://schemas.microsoft.com/office/drawing/2014/main" id="{24593304-64A9-5DC9-6E17-576EB97BFD6A}"/>
-                </a:ext>
-              </a:extLst>
-            </p:cNvPr>
-            <p:cNvSpPr/>
-            <p:nvPr/>
-          </p:nvSpPr>
-          <p:spPr>
-            <a:xfrm>
-              <a:off x="4292987" y="3181350"/>
-              <a:ext cx="721697" cy="647700"/>
-            </a:xfrm>
-            <a:prstGeom prst="rightArrow">
-              <a:avLst/>
-            </a:prstGeom>
-            <a:solidFill>
-              <a:schemeClr val="bg1"/>
-            </a:solidFill>
-          </p:spPr>
-          <p:style>
-            <a:lnRef idx="2">
-              <a:schemeClr val="accent1">
-                <a:shade val="15000"/>
-              </a:schemeClr>
-            </a:lnRef>
-            <a:fillRef idx="1">
-              <a:schemeClr val="accent1"/>
-            </a:fillRef>
-            <a:effectRef idx="0">
-              <a:schemeClr val="accent1"/>
-            </a:effectRef>
-            <a:fontRef idx="minor">
-              <a:schemeClr val="lt1"/>
-            </a:fontRef>
-          </p:style>
-          <p:txBody>
-            <a:bodyPr rtlCol="0" anchor="ctr"/>
-            <a:lstStyle/>
-            <a:p>
-              <a:pPr algn="ctr"/>
-              <a:endParaRPr lang="en-GB"/>
-            </a:p>
-          </p:txBody>
-        </p:sp>
-        <p:grpSp>
-          <p:nvGrpSpPr>
-            <p:cNvPr id="2" name="Group 1">
-              <a:extLst>
-                <a:ext uri="{FF2B5EF4-FFF2-40B4-BE49-F238E27FC236}">
-                  <a16:creationId xmlns:a16="http://schemas.microsoft.com/office/drawing/2014/main" id="{7B587713-D94E-D962-9060-C1DF7DA85C7F}"/>
-                </a:ext>
-              </a:extLst>
-            </p:cNvPr>
-            <p:cNvGrpSpPr/>
-            <p:nvPr/>
-          </p:nvGrpSpPr>
-          <p:grpSpPr>
-            <a:xfrm>
-              <a:off x="1173946" y="2857500"/>
-              <a:ext cx="15752094" cy="1295400"/>
-              <a:chOff x="1173946" y="2857500"/>
-              <a:chExt cx="15752094" cy="1295400"/>
-            </a:xfrm>
-          </p:grpSpPr>
-          <p:sp>
-            <p:nvSpPr>
-              <p:cNvPr id="24" name="Rectangle: Rounded Corners 23">
-                <a:extLst>
-                  <a:ext uri="{FF2B5EF4-FFF2-40B4-BE49-F238E27FC236}">
-                    <a16:creationId xmlns:a16="http://schemas.microsoft.com/office/drawing/2014/main" id="{25179C15-E452-BC44-9177-DADE58BC6727}"/>
-                  </a:ext>
-                </a:extLst>
-              </p:cNvPr>
-              <p:cNvSpPr/>
-              <p:nvPr/>
-            </p:nvSpPr>
-            <p:spPr>
-              <a:xfrm>
-                <a:off x="1173946" y="2857500"/>
-                <a:ext cx="2636054" cy="1295400"/>
-              </a:xfrm>
-              <a:prstGeom prst="roundRect">
-                <a:avLst/>
-              </a:prstGeom>
-              <a:solidFill>
-                <a:schemeClr val="tx2">
-                  <a:lumMod val="40000"/>
-                  <a:lumOff val="60000"/>
-                </a:schemeClr>
-              </a:solidFill>
-            </p:spPr>
-            <p:style>
-              <a:lnRef idx="2">
-                <a:schemeClr val="accent1">
-                  <a:shade val="15000"/>
-                </a:schemeClr>
-              </a:lnRef>
-              <a:fillRef idx="1">
-                <a:schemeClr val="accent1"/>
-              </a:fillRef>
-              <a:effectRef idx="0">
-                <a:schemeClr val="accent1"/>
-              </a:effectRef>
-              <a:fontRef idx="minor">
-                <a:schemeClr val="lt1"/>
-              </a:fontRef>
-            </p:style>
-            <p:txBody>
-              <a:bodyPr rtlCol="0" anchor="ctr"/>
-              <a:lstStyle/>
-              <a:p>
-                <a:pPr algn="ctr"/>
-                <a:r>
-                  <a:rPr lang="en-FI" sz="2400" b="1" dirty="0">
-                    <a:solidFill>
-                      <a:schemeClr val="tx1"/>
-                    </a:solidFill>
-                    <a:latin typeface="Times New Roman" panose="02020603050405020304" pitchFamily="18" charset="0"/>
-                    <a:cs typeface="Times New Roman" panose="02020603050405020304" pitchFamily="18" charset="0"/>
-                  </a:rPr>
-                  <a:t>Environment Setup</a:t>
-                </a:r>
-                <a:endParaRPr lang="en-GB" sz="2400" b="1" dirty="0">
-                  <a:solidFill>
-                    <a:schemeClr val="tx1"/>
-                  </a:solidFill>
-                  <a:latin typeface="Times New Roman" panose="02020603050405020304" pitchFamily="18" charset="0"/>
-                  <a:cs typeface="Times New Roman" panose="02020603050405020304" pitchFamily="18" charset="0"/>
-                </a:endParaRPr>
-              </a:p>
-            </p:txBody>
-          </p:sp>
-          <p:sp>
-            <p:nvSpPr>
-              <p:cNvPr id="26" name="Rectangle: Rounded Corners 25">
-                <a:extLst>
-                  <a:ext uri="{FF2B5EF4-FFF2-40B4-BE49-F238E27FC236}">
-                    <a16:creationId xmlns:a16="http://schemas.microsoft.com/office/drawing/2014/main" id="{2D4B761A-7E7D-D498-F0B4-DD8A9B8F4DCC}"/>
-                  </a:ext>
-                </a:extLst>
-              </p:cNvPr>
-              <p:cNvSpPr/>
-              <p:nvPr/>
-            </p:nvSpPr>
-            <p:spPr>
-              <a:xfrm>
-                <a:off x="5497673" y="2857500"/>
-                <a:ext cx="2636054" cy="1295400"/>
-              </a:xfrm>
-              <a:prstGeom prst="roundRect">
-                <a:avLst/>
-              </a:prstGeom>
-              <a:solidFill>
-                <a:srgbClr val="00B050"/>
-              </a:solidFill>
-            </p:spPr>
-            <p:style>
-              <a:lnRef idx="2">
-                <a:schemeClr val="accent1">
-                  <a:shade val="15000"/>
-                </a:schemeClr>
-              </a:lnRef>
-              <a:fillRef idx="1">
-                <a:schemeClr val="accent1"/>
-              </a:fillRef>
-              <a:effectRef idx="0">
-                <a:schemeClr val="accent1"/>
-              </a:effectRef>
-              <a:fontRef idx="minor">
-                <a:schemeClr val="lt1"/>
-              </a:fontRef>
-            </p:style>
-            <p:txBody>
-              <a:bodyPr rtlCol="0" anchor="ctr"/>
-              <a:lstStyle/>
-              <a:p>
-                <a:pPr algn="ctr"/>
-                <a:r>
-                  <a:rPr lang="en-FI" sz="2400" b="1" dirty="0">
-                    <a:solidFill>
-                      <a:schemeClr val="tx1"/>
-                    </a:solidFill>
-                    <a:latin typeface="Times New Roman" panose="02020603050405020304" pitchFamily="18" charset="0"/>
-                    <a:cs typeface="Times New Roman" panose="02020603050405020304" pitchFamily="18" charset="0"/>
-                  </a:rPr>
-                  <a:t>Safety Cost</a:t>
-                </a:r>
-                <a:endParaRPr lang="en-GB" sz="2400" b="1" dirty="0">
-                  <a:solidFill>
-                    <a:schemeClr val="tx1"/>
-                  </a:solidFill>
-                  <a:latin typeface="Times New Roman" panose="02020603050405020304" pitchFamily="18" charset="0"/>
-                  <a:cs typeface="Times New Roman" panose="02020603050405020304" pitchFamily="18" charset="0"/>
-                </a:endParaRPr>
-              </a:p>
-            </p:txBody>
-          </p:sp>
-          <p:sp>
-            <p:nvSpPr>
-              <p:cNvPr id="28" name="Rectangle: Rounded Corners 27">
-                <a:extLst>
-                  <a:ext uri="{FF2B5EF4-FFF2-40B4-BE49-F238E27FC236}">
-                    <a16:creationId xmlns:a16="http://schemas.microsoft.com/office/drawing/2014/main" id="{04BFE9B0-7B3E-8930-2BE7-E06454635A69}"/>
-                  </a:ext>
-                </a:extLst>
-              </p:cNvPr>
-              <p:cNvSpPr/>
-              <p:nvPr/>
-            </p:nvSpPr>
-            <p:spPr>
-              <a:xfrm>
-                <a:off x="14145125" y="2857500"/>
-                <a:ext cx="2780915" cy="1295400"/>
-              </a:xfrm>
-              <a:prstGeom prst="roundRect">
-                <a:avLst/>
-              </a:prstGeom>
-              <a:solidFill>
-                <a:schemeClr val="accent6">
-                  <a:lumMod val="75000"/>
-                </a:schemeClr>
-              </a:solidFill>
-            </p:spPr>
-            <p:style>
-              <a:lnRef idx="2">
-                <a:schemeClr val="accent1">
-                  <a:shade val="15000"/>
-                </a:schemeClr>
-              </a:lnRef>
-              <a:fillRef idx="1">
-                <a:schemeClr val="accent1"/>
-              </a:fillRef>
-              <a:effectRef idx="0">
-                <a:schemeClr val="accent1"/>
-              </a:effectRef>
-              <a:fontRef idx="minor">
-                <a:schemeClr val="lt1"/>
-              </a:fontRef>
-            </p:style>
-            <p:txBody>
-              <a:bodyPr rtlCol="0" anchor="ctr"/>
-              <a:lstStyle/>
-              <a:p>
-                <a:pPr algn="ctr"/>
-                <a:r>
-                  <a:rPr lang="en-FI" sz="2800" b="1" dirty="0">
-                    <a:solidFill>
-                      <a:schemeClr val="tx1"/>
-                    </a:solidFill>
-                    <a:latin typeface="Times New Roman" panose="02020603050405020304" pitchFamily="18" charset="0"/>
-                    <a:cs typeface="Times New Roman" panose="02020603050405020304" pitchFamily="18" charset="0"/>
-                  </a:rPr>
-                  <a:t>Evaluation</a:t>
-                </a:r>
-                <a:r>
-                  <a:rPr lang="en-FI" sz="2400" b="1" dirty="0">
-                    <a:solidFill>
-                      <a:schemeClr val="tx1"/>
-                    </a:solidFill>
-                  </a:rPr>
-                  <a:t> </a:t>
-                </a:r>
-                <a:endParaRPr lang="en-GB" sz="2400" b="1" dirty="0">
-                  <a:solidFill>
-                    <a:schemeClr val="tx1"/>
-                  </a:solidFill>
-                </a:endParaRPr>
-              </a:p>
-            </p:txBody>
-          </p:sp>
-          <p:sp>
-            <p:nvSpPr>
-              <p:cNvPr id="30" name="Rectangle: Rounded Corners 29">
-                <a:extLst>
-                  <a:ext uri="{FF2B5EF4-FFF2-40B4-BE49-F238E27FC236}">
-                    <a16:creationId xmlns:a16="http://schemas.microsoft.com/office/drawing/2014/main" id="{CA605747-07A5-F8C8-0E8C-425EBDDEC64D}"/>
-                  </a:ext>
-                </a:extLst>
-              </p:cNvPr>
-              <p:cNvSpPr/>
-              <p:nvPr/>
-            </p:nvSpPr>
-            <p:spPr>
-              <a:xfrm>
-                <a:off x="9821399" y="2857500"/>
-                <a:ext cx="2636054" cy="1295400"/>
-              </a:xfrm>
-              <a:prstGeom prst="roundRect">
-                <a:avLst/>
-              </a:prstGeom>
-              <a:solidFill>
-                <a:srgbClr val="0070C0"/>
-              </a:solidFill>
-            </p:spPr>
-            <p:style>
-              <a:lnRef idx="2">
-                <a:schemeClr val="accent1">
-                  <a:shade val="15000"/>
-                </a:schemeClr>
-              </a:lnRef>
-              <a:fillRef idx="1">
-                <a:schemeClr val="accent1"/>
-              </a:fillRef>
-              <a:effectRef idx="0">
-                <a:schemeClr val="accent1"/>
-              </a:effectRef>
-              <a:fontRef idx="minor">
-                <a:schemeClr val="lt1"/>
-              </a:fontRef>
-            </p:style>
-            <p:txBody>
-              <a:bodyPr rtlCol="0" anchor="ctr"/>
-              <a:lstStyle/>
-              <a:p>
-                <a:pPr algn="ctr"/>
-                <a:r>
-                  <a:rPr lang="en-FI" sz="2400" b="1" dirty="0">
-                    <a:solidFill>
-                      <a:schemeClr val="tx1"/>
-                    </a:solidFill>
-                    <a:latin typeface="Times New Roman" panose="02020603050405020304" pitchFamily="18" charset="0"/>
-                    <a:cs typeface="Times New Roman" panose="02020603050405020304" pitchFamily="18" charset="0"/>
-                  </a:rPr>
-                  <a:t>Algorithm Arms</a:t>
-                </a:r>
-                <a:endParaRPr lang="en-GB" sz="2400" b="1" dirty="0">
-                  <a:solidFill>
-                    <a:schemeClr val="tx1"/>
-                  </a:solidFill>
-                  <a:latin typeface="Times New Roman" panose="02020603050405020304" pitchFamily="18" charset="0"/>
-                  <a:cs typeface="Times New Roman" panose="02020603050405020304" pitchFamily="18" charset="0"/>
-                </a:endParaRPr>
-              </a:p>
-            </p:txBody>
-          </p:sp>
-          <p:sp>
-            <p:nvSpPr>
-              <p:cNvPr id="33" name="Arrow: Right 32">
-                <a:extLst>
-                  <a:ext uri="{FF2B5EF4-FFF2-40B4-BE49-F238E27FC236}">
-                    <a16:creationId xmlns:a16="http://schemas.microsoft.com/office/drawing/2014/main" id="{DE25D286-3777-D4D9-B467-97CEBC1BF3D1}"/>
-                  </a:ext>
-                </a:extLst>
-              </p:cNvPr>
-              <p:cNvSpPr/>
-              <p:nvPr/>
-            </p:nvSpPr>
-            <p:spPr>
-              <a:xfrm>
-                <a:off x="8610980" y="3181350"/>
-                <a:ext cx="688258" cy="647700"/>
-              </a:xfrm>
-              <a:prstGeom prst="rightArrow">
-                <a:avLst/>
-              </a:prstGeom>
-              <a:solidFill>
-                <a:schemeClr val="bg1"/>
-              </a:solidFill>
-            </p:spPr>
-            <p:style>
-              <a:lnRef idx="2">
-                <a:schemeClr val="accent1">
-                  <a:shade val="15000"/>
-                </a:schemeClr>
-              </a:lnRef>
-              <a:fillRef idx="1">
-                <a:schemeClr val="accent1"/>
-              </a:fillRef>
-              <a:effectRef idx="0">
-                <a:schemeClr val="accent1"/>
-              </a:effectRef>
-              <a:fontRef idx="minor">
-                <a:schemeClr val="lt1"/>
-              </a:fontRef>
-            </p:style>
-            <p:txBody>
-              <a:bodyPr rtlCol="0" anchor="ctr"/>
-              <a:lstStyle/>
-              <a:p>
-                <a:pPr algn="ctr"/>
-                <a:endParaRPr lang="en-GB"/>
-              </a:p>
-            </p:txBody>
-          </p:sp>
-          <p:sp>
-            <p:nvSpPr>
-              <p:cNvPr id="35" name="Arrow: Right 34">
-                <a:extLst>
-                  <a:ext uri="{FF2B5EF4-FFF2-40B4-BE49-F238E27FC236}">
-                    <a16:creationId xmlns:a16="http://schemas.microsoft.com/office/drawing/2014/main" id="{474D1B28-0E6C-E451-5649-5CA4E0807693}"/>
-                  </a:ext>
-                </a:extLst>
-              </p:cNvPr>
-              <p:cNvSpPr/>
-              <p:nvPr/>
-            </p:nvSpPr>
-            <p:spPr>
-              <a:xfrm>
-                <a:off x="12957160" y="3137137"/>
-                <a:ext cx="688258" cy="647700"/>
-              </a:xfrm>
-              <a:prstGeom prst="rightArrow">
-                <a:avLst/>
-              </a:prstGeom>
-              <a:solidFill>
-                <a:schemeClr val="bg1"/>
-              </a:solidFill>
-            </p:spPr>
-            <p:style>
-              <a:lnRef idx="2">
-                <a:schemeClr val="accent1">
-                  <a:shade val="15000"/>
-                </a:schemeClr>
-              </a:lnRef>
-              <a:fillRef idx="1">
-                <a:schemeClr val="accent1"/>
-              </a:fillRef>
-              <a:effectRef idx="0">
-                <a:schemeClr val="accent1"/>
-              </a:effectRef>
-              <a:fontRef idx="minor">
-                <a:schemeClr val="lt1"/>
-              </a:fontRef>
-            </p:style>
-            <p:txBody>
-              <a:bodyPr rtlCol="0" anchor="ctr"/>
-              <a:lstStyle/>
-              <a:p>
-                <a:pPr algn="ctr"/>
-                <a:endParaRPr lang="en-GB"/>
-              </a:p>
-            </p:txBody>
-          </p:sp>
-        </p:grpSp>
-      </p:grpSp>
-      <p:sp>
-        <p:nvSpPr>
-          <p:cNvPr id="8" name="Rectangle 7">
-            <a:extLst>
-              <a:ext uri="{FF2B5EF4-FFF2-40B4-BE49-F238E27FC236}">
-                <a16:creationId xmlns:a16="http://schemas.microsoft.com/office/drawing/2014/main" id="{00B2059B-8D05-34C7-DD04-08326341D3F6}"/>
-              </a:ext>
-            </a:extLst>
-          </p:cNvPr>
-          <p:cNvSpPr/>
-          <p:nvPr/>
-        </p:nvSpPr>
-        <p:spPr>
-          <a:xfrm>
-            <a:off x="14097000" y="1711747"/>
+            <a:off x="9709433" y="1751223"/>
             <a:ext cx="3048000" cy="1831553"/>
           </a:xfrm>
           <a:prstGeom prst="rect">
@@ -5450,7 +6037,7 @@
           <p:cNvPr id="6" name="TextBox 5">
             <a:extLst>
               <a:ext uri="{FF2B5EF4-FFF2-40B4-BE49-F238E27FC236}">
-                <a16:creationId xmlns:a16="http://schemas.microsoft.com/office/drawing/2014/main" id="{2C279A18-5ED4-9B27-606B-C533B2B511F6}"/>
+                <a16:creationId xmlns:a16="http://schemas.microsoft.com/office/drawing/2014/main" id="{5C1531D1-2654-1EDB-498B-E2C82E985FFD}"/>
               </a:ext>
             </a:extLst>
           </p:cNvPr>
@@ -5459,8 +6046,8 @@
         </p:nvSpPr>
         <p:spPr>
           <a:xfrm>
-            <a:off x="4747842" y="4147394"/>
-            <a:ext cx="8853426" cy="5509200"/>
+            <a:off x="4717287" y="4525641"/>
+            <a:ext cx="8853426" cy="3539430"/>
           </a:xfrm>
           <a:prstGeom prst="rect">
             <a:avLst/>
@@ -5482,7 +6069,7 @@
                 <a:latin typeface="Times New Roman" panose="02020603050405020304" pitchFamily="18" charset="0"/>
                 <a:cs typeface="Times New Roman" panose="02020603050405020304" pitchFamily="18" charset="0"/>
               </a:rPr>
-              <a:t>256 parallel robots</a:t>
+              <a:t>Proximal Policy Optimization (PPO)</a:t>
             </a:r>
           </a:p>
           <a:p>
@@ -5505,7 +6092,7 @@
                 <a:latin typeface="Times New Roman" panose="02020603050405020304" pitchFamily="18" charset="0"/>
                 <a:cs typeface="Times New Roman" panose="02020603050405020304" pitchFamily="18" charset="0"/>
               </a:rPr>
-              <a:t>1000 episodes per arm, total 45,000 episodes</a:t>
+              <a:t>PPO (baseline)</a:t>
             </a:r>
           </a:p>
           <a:p>
@@ -5525,47 +6112,24 @@
             </a:pPr>
             <a:r>
               <a:rPr lang="en-FI" sz="3200" dirty="0">
-                <a:latin typeface="Times New Roman"/>
-                <a:cs typeface="Times New Roman" panose="02020603050405020304" pitchFamily="18" charset="0"/>
-              </a:rPr>
-              <a:t>3 different seeds (101, 102, 103)</a:t>
-            </a:r>
-            <a:endParaRPr lang="en-FI" sz="3200" dirty="0">
-              <a:latin typeface="Times New Roman" panose="02020603050405020304" pitchFamily="18" charset="0"/>
-              <a:cs typeface="Times New Roman" panose="02020603050405020304" pitchFamily="18" charset="0"/>
-            </a:endParaRPr>
-          </a:p>
-          <a:p>
-            <a:endParaRPr lang="en-FI" sz="3200" dirty="0">
-              <a:latin typeface="Times New Roman" panose="02020603050405020304" pitchFamily="18" charset="0"/>
-              <a:cs typeface="Times New Roman" panose="02020603050405020304" pitchFamily="18" charset="0"/>
-            </a:endParaRPr>
-          </a:p>
-          <a:p>
-            <a:pPr marL="514350" indent="-514350">
-              <a:buFont typeface="Wingdings" panose="05000000000000000000" pitchFamily="2" charset="2"/>
-              <a:buChar char="§"/>
-            </a:pPr>
-            <a:r>
-              <a:rPr lang="en-GB" sz="3200" dirty="0">
                 <a:latin typeface="Times New Roman" panose="02020603050405020304" pitchFamily="18" charset="0"/>
                 <a:cs typeface="Times New Roman" panose="02020603050405020304" pitchFamily="18" charset="0"/>
               </a:rPr>
-              <a:t>Collision keep-out</a:t>
+              <a:t>Constraint Proximal Policy Optimization (</a:t>
+            </a:r>
+            <a:r>
+              <a:rPr lang="en-FI" sz="3200" dirty="0" err="1">
+                <a:latin typeface="Times New Roman" panose="02020603050405020304" pitchFamily="18" charset="0"/>
+                <a:cs typeface="Times New Roman" panose="02020603050405020304" pitchFamily="18" charset="0"/>
+              </a:rPr>
+              <a:t>cPPO</a:t>
             </a:r>
             <a:r>
               <a:rPr lang="en-FI" sz="3200" dirty="0">
                 <a:latin typeface="Times New Roman" panose="02020603050405020304" pitchFamily="18" charset="0"/>
                 <a:cs typeface="Times New Roman" panose="02020603050405020304" pitchFamily="18" charset="0"/>
               </a:rPr>
-              <a:t> -- </a:t>
-            </a:r>
-            <a:r>
-              <a:rPr lang="en-GB" sz="3200" dirty="0">
-                <a:latin typeface="Times New Roman" panose="02020603050405020304" pitchFamily="18" charset="0"/>
-                <a:cs typeface="Times New Roman" panose="02020603050405020304" pitchFamily="18" charset="0"/>
-              </a:rPr>
-              <a:t>5 cm above table</a:t>
+              <a:t>)</a:t>
             </a:r>
           </a:p>
           <a:p>
@@ -5584,70 +6148,23 @@
               <a:buChar char="§"/>
             </a:pPr>
             <a:r>
-              <a:rPr lang="en-GB" sz="3200" dirty="0">
-                <a:latin typeface="Times New Roman" panose="02020603050405020304" pitchFamily="18" charset="0"/>
-                <a:cs typeface="Times New Roman" panose="02020603050405020304" pitchFamily="18" charset="0"/>
-              </a:rPr>
-              <a:t>Joint-limit margin</a:t>
-            </a:r>
-            <a:r>
               <a:rPr lang="en-FI" sz="3200" dirty="0">
                 <a:latin typeface="Times New Roman" panose="02020603050405020304" pitchFamily="18" charset="0"/>
                 <a:cs typeface="Times New Roman" panose="02020603050405020304" pitchFamily="18" charset="0"/>
               </a:rPr>
-              <a:t> -- </a:t>
-            </a:r>
-            <a:r>
-              <a:rPr lang="en-GB" sz="3200" dirty="0">
-                <a:latin typeface="Times New Roman" panose="02020603050405020304" pitchFamily="18" charset="0"/>
-                <a:cs typeface="Times New Roman" panose="02020603050405020304" pitchFamily="18" charset="0"/>
-              </a:rPr>
-              <a:t>0.175 rad (10°)</a:t>
-            </a:r>
-          </a:p>
-          <a:p>
-            <a:pPr marL="514350" indent="-514350">
-              <a:buFont typeface="Wingdings" panose="05000000000000000000" pitchFamily="2" charset="2"/>
-              <a:buChar char="§"/>
-            </a:pPr>
-            <a:endParaRPr lang="en-FI" sz="3200" dirty="0">
+              <a:t>Budget Limit d = 25 &amp; 15 </a:t>
+            </a:r>
+            <a:endParaRPr lang="en-GB" sz="3200" dirty="0">
               <a:latin typeface="Times New Roman" panose="02020603050405020304" pitchFamily="18" charset="0"/>
               <a:cs typeface="Times New Roman" panose="02020603050405020304" pitchFamily="18" charset="0"/>
             </a:endParaRPr>
-          </a:p>
-          <a:p>
-            <a:pPr marL="514350" indent="-514350">
-              <a:buFont typeface="Wingdings" panose="05000000000000000000" pitchFamily="2" charset="2"/>
-              <a:buChar char="§"/>
-            </a:pPr>
-            <a:r>
-              <a:rPr lang="en-GB" sz="3200" dirty="0">
-                <a:latin typeface="Times New Roman" panose="02020603050405020304" pitchFamily="18" charset="0"/>
-                <a:cs typeface="Times New Roman" panose="02020603050405020304" pitchFamily="18" charset="0"/>
-              </a:rPr>
-              <a:t>Singularity floor  w = √det(JJᵀ)</a:t>
-            </a:r>
-            <a:r>
-              <a:rPr lang="en-FI" sz="3200" dirty="0">
-                <a:latin typeface="Times New Roman" panose="02020603050405020304" pitchFamily="18" charset="0"/>
-                <a:cs typeface="Times New Roman" panose="02020603050405020304" pitchFamily="18" charset="0"/>
-              </a:rPr>
-              <a:t> -- </a:t>
-            </a:r>
-            <a:r>
-              <a:rPr lang="en-GB" sz="3200" dirty="0">
-                <a:latin typeface="Times New Roman" panose="02020603050405020304" pitchFamily="18" charset="0"/>
-                <a:cs typeface="Times New Roman" panose="02020603050405020304" pitchFamily="18" charset="0"/>
-              </a:rPr>
-              <a:t>w &lt; 0.06</a:t>
-            </a:r>
           </a:p>
         </p:txBody>
       </p:sp>
     </p:spTree>
     <p:extLst>
       <p:ext uri="{BB962C8B-B14F-4D97-AF65-F5344CB8AC3E}">
-        <p14:creationId xmlns:p14="http://schemas.microsoft.com/office/powerpoint/2010/main" val="1488917347"/>
+        <p14:creationId xmlns:p14="http://schemas.microsoft.com/office/powerpoint/2010/main" val="483871233"/>
       </p:ext>
     </p:extLst>
   </p:cSld>
@@ -5656,12 +6173,12 @@
   </p:clrMapOvr>
   <mc:AlternateContent xmlns:mc="http://schemas.openxmlformats.org/markup-compatibility/2006">
     <mc:Choice xmlns:p159="http://schemas.microsoft.com/office/powerpoint/2015/09/main" Requires="p159">
-      <p:transition spd="med">
+      <p:transition spd="slow">
         <p159:morph option="byObject"/>
       </p:transition>
     </mc:Choice>
     <mc:Fallback>
-      <p:transition spd="med">
+      <p:transition spd="slow">
         <p:fade/>
       </p:transition>
     </mc:Fallback>
@@ -6321,138 +6838,159 @@
           </a:p>
         </p:txBody>
       </p:sp>
-      <p:sp>
-        <p:nvSpPr>
-          <p:cNvPr id="6" name="Rounded Rectangle 11">
+      <p:grpSp>
+        <p:nvGrpSpPr>
+          <p:cNvPr id="2" name="Group 1">
             <a:extLst>
               <a:ext uri="{FF2B5EF4-FFF2-40B4-BE49-F238E27FC236}">
-                <a16:creationId xmlns:a16="http://schemas.microsoft.com/office/drawing/2014/main" id="{1A65937B-8DC6-208A-6831-5880A1FCDB42}"/>
+                <a16:creationId xmlns:a16="http://schemas.microsoft.com/office/drawing/2014/main" id="{4A4F658D-3379-40D9-6CC4-602CDCCD6810}"/>
               </a:ext>
             </a:extLst>
           </p:cNvPr>
-          <p:cNvSpPr/>
+          <p:cNvGrpSpPr/>
           <p:nvPr/>
-        </p:nvSpPr>
-        <p:spPr>
+        </p:nvGrpSpPr>
+        <p:grpSpPr>
           <a:xfrm>
-            <a:off x="1219200" y="6400800"/>
-            <a:ext cx="8046720" cy="731520"/>
+            <a:off x="1219200" y="7155180"/>
+            <a:ext cx="15849600" cy="731520"/>
+            <a:chOff x="1219200" y="6400800"/>
+            <a:chExt cx="15849600" cy="731520"/>
           </a:xfrm>
-          <a:prstGeom prst="roundRect">
-            <a:avLst>
-              <a:gd name="adj" fmla="val 30000"/>
-            </a:avLst>
-          </a:prstGeom>
-          <a:solidFill>
-            <a:schemeClr val="bg1"/>
-          </a:solidFill>
-          <a:ln w="15875">
+        </p:grpSpPr>
+        <p:sp>
+          <p:nvSpPr>
+            <p:cNvPr id="6" name="Rounded Rectangle 11">
+              <a:extLst>
+                <a:ext uri="{FF2B5EF4-FFF2-40B4-BE49-F238E27FC236}">
+                  <a16:creationId xmlns:a16="http://schemas.microsoft.com/office/drawing/2014/main" id="{1A65937B-8DC6-208A-6831-5880A1FCDB42}"/>
+                </a:ext>
+              </a:extLst>
+            </p:cNvPr>
+            <p:cNvSpPr/>
+            <p:nvPr/>
+          </p:nvSpPr>
+          <p:spPr>
+            <a:xfrm>
+              <a:off x="1219200" y="6400800"/>
+              <a:ext cx="8046720" cy="731520"/>
+            </a:xfrm>
+            <a:prstGeom prst="roundRect">
+              <a:avLst>
+                <a:gd name="adj" fmla="val 30000"/>
+              </a:avLst>
+            </a:prstGeom>
             <a:solidFill>
-              <a:schemeClr val="tx1">
-                <a:lumMod val="95000"/>
-                <a:lumOff val="5000"/>
-              </a:schemeClr>
+              <a:schemeClr val="bg1"/>
             </a:solidFill>
-          </a:ln>
-          <a:effectLst/>
-        </p:spPr>
-        <p:style>
-          <a:lnRef idx="1">
-            <a:schemeClr val="accent1"/>
-          </a:lnRef>
-          <a:fillRef idx="3">
-            <a:schemeClr val="accent1"/>
-          </a:fillRef>
-          <a:effectRef idx="2">
-            <a:schemeClr val="accent1"/>
-          </a:effectRef>
-          <a:fontRef idx="minor">
-            <a:schemeClr val="lt1"/>
-          </a:fontRef>
-        </p:style>
-        <p:txBody>
-          <a:bodyPr wrap="square" lIns="128016" tIns="54864" rIns="128016" bIns="54864" rtlCol="0" anchor="ctr"/>
-          <a:lstStyle/>
-          <a:p>
-            <a:pPr algn="ctr"/>
-            <a:r>
-              <a:rPr sz="2400" b="1" dirty="0">
-                <a:solidFill>
-                  <a:schemeClr val="tx1"/>
-                </a:solidFill>
-                <a:latin typeface="Times New Roman"/>
-              </a:rPr>
-              <a:t>isolates the constraint effect — the claim of this thesis</a:t>
-            </a:r>
-          </a:p>
-        </p:txBody>
-      </p:sp>
-      <p:sp>
-        <p:nvSpPr>
-          <p:cNvPr id="10" name="Rounded Rectangle 12">
-            <a:extLst>
-              <a:ext uri="{FF2B5EF4-FFF2-40B4-BE49-F238E27FC236}">
-                <a16:creationId xmlns:a16="http://schemas.microsoft.com/office/drawing/2014/main" id="{BEFBFC72-221C-B656-EC79-9F20DCFB58D6}"/>
-              </a:ext>
-            </a:extLst>
-          </p:cNvPr>
-          <p:cNvSpPr/>
-          <p:nvPr/>
-        </p:nvSpPr>
-        <p:spPr>
-          <a:xfrm>
-            <a:off x="9845040" y="6400800"/>
-            <a:ext cx="7223760" cy="731520"/>
-          </a:xfrm>
-          <a:prstGeom prst="roundRect">
-            <a:avLst>
-              <a:gd name="adj" fmla="val 30000"/>
-            </a:avLst>
-          </a:prstGeom>
-          <a:solidFill>
-            <a:schemeClr val="bg1"/>
-          </a:solidFill>
-          <a:ln w="15875">
+            <a:ln w="15875">
+              <a:solidFill>
+                <a:schemeClr val="tx1">
+                  <a:lumMod val="95000"/>
+                  <a:lumOff val="5000"/>
+                </a:schemeClr>
+              </a:solidFill>
+            </a:ln>
+            <a:effectLst/>
+          </p:spPr>
+          <p:style>
+            <a:lnRef idx="1">
+              <a:schemeClr val="accent1"/>
+            </a:lnRef>
+            <a:fillRef idx="3">
+              <a:schemeClr val="accent1"/>
+            </a:fillRef>
+            <a:effectRef idx="2">
+              <a:schemeClr val="accent1"/>
+            </a:effectRef>
+            <a:fontRef idx="minor">
+              <a:schemeClr val="lt1"/>
+            </a:fontRef>
+          </p:style>
+          <p:txBody>
+            <a:bodyPr wrap="square" lIns="128016" tIns="54864" rIns="128016" bIns="54864" rtlCol="0" anchor="ctr"/>
+            <a:lstStyle/>
+            <a:p>
+              <a:pPr algn="ctr"/>
+              <a:r>
+                <a:rPr sz="2400" b="1" dirty="0">
+                  <a:solidFill>
+                    <a:schemeClr val="tx1"/>
+                  </a:solidFill>
+                  <a:latin typeface="Times New Roman"/>
+                </a:rPr>
+                <a:t>isolates the constraint effect — the claim of this thesis</a:t>
+              </a:r>
+            </a:p>
+          </p:txBody>
+        </p:sp>
+        <p:sp>
+          <p:nvSpPr>
+            <p:cNvPr id="10" name="Rounded Rectangle 12">
+              <a:extLst>
+                <a:ext uri="{FF2B5EF4-FFF2-40B4-BE49-F238E27FC236}">
+                  <a16:creationId xmlns:a16="http://schemas.microsoft.com/office/drawing/2014/main" id="{BEFBFC72-221C-B656-EC79-9F20DCFB58D6}"/>
+                </a:ext>
+              </a:extLst>
+            </p:cNvPr>
+            <p:cNvSpPr/>
+            <p:nvPr/>
+          </p:nvSpPr>
+          <p:spPr>
+            <a:xfrm>
+              <a:off x="9845040" y="6400800"/>
+              <a:ext cx="7223760" cy="731520"/>
+            </a:xfrm>
+            <a:prstGeom prst="roundRect">
+              <a:avLst>
+                <a:gd name="adj" fmla="val 30000"/>
+              </a:avLst>
+            </a:prstGeom>
             <a:solidFill>
-              <a:schemeClr val="tx1">
-                <a:lumMod val="95000"/>
-                <a:lumOff val="5000"/>
-              </a:schemeClr>
+              <a:schemeClr val="bg1"/>
             </a:solidFill>
-          </a:ln>
-          <a:effectLst/>
-        </p:spPr>
-        <p:style>
-          <a:lnRef idx="1">
-            <a:schemeClr val="accent1"/>
-          </a:lnRef>
-          <a:fillRef idx="3">
-            <a:schemeClr val="accent1"/>
-          </a:fillRef>
-          <a:effectRef idx="2">
-            <a:schemeClr val="accent1"/>
-          </a:effectRef>
-          <a:fontRef idx="minor">
-            <a:schemeClr val="lt1"/>
-          </a:fontRef>
-        </p:style>
-        <p:txBody>
-          <a:bodyPr wrap="square" lIns="128016" tIns="54864" rIns="128016" bIns="54864" rtlCol="0" anchor="ctr"/>
-          <a:lstStyle/>
-          <a:p>
-            <a:pPr algn="ctr"/>
-            <a:r>
-              <a:rPr sz="2400" b="1" dirty="0">
-                <a:solidFill>
-                  <a:schemeClr val="tx1"/>
-                </a:solidFill>
-                <a:latin typeface="Times New Roman"/>
-              </a:rPr>
-              <a:t>isolates budget sensitivity — does it scale?</a:t>
-            </a:r>
-          </a:p>
-        </p:txBody>
-      </p:sp>
+            <a:ln w="15875">
+              <a:solidFill>
+                <a:schemeClr val="tx1">
+                  <a:lumMod val="95000"/>
+                  <a:lumOff val="5000"/>
+                </a:schemeClr>
+              </a:solidFill>
+            </a:ln>
+            <a:effectLst/>
+          </p:spPr>
+          <p:style>
+            <a:lnRef idx="1">
+              <a:schemeClr val="accent1"/>
+            </a:lnRef>
+            <a:fillRef idx="3">
+              <a:schemeClr val="accent1"/>
+            </a:fillRef>
+            <a:effectRef idx="2">
+              <a:schemeClr val="accent1"/>
+            </a:effectRef>
+            <a:fontRef idx="minor">
+              <a:schemeClr val="lt1"/>
+            </a:fontRef>
+          </p:style>
+          <p:txBody>
+            <a:bodyPr wrap="square" lIns="128016" tIns="54864" rIns="128016" bIns="54864" rtlCol="0" anchor="ctr"/>
+            <a:lstStyle/>
+            <a:p>
+              <a:pPr algn="ctr"/>
+              <a:r>
+                <a:rPr sz="2400" b="1" dirty="0">
+                  <a:solidFill>
+                    <a:schemeClr val="tx1"/>
+                  </a:solidFill>
+                  <a:latin typeface="Times New Roman"/>
+                </a:rPr>
+                <a:t>isolates budget sensitivity — does it scale?</a:t>
+              </a:r>
+            </a:p>
+          </p:txBody>
+        </p:sp>
+      </p:grpSp>
       <p:sp>
         <p:nvSpPr>
           <p:cNvPr id="14" name="Rounded Rectangle 13">
@@ -6467,8 +7005,8 @@
         </p:nvSpPr>
         <p:spPr>
           <a:xfrm>
-            <a:off x="1219200" y="7627620"/>
-            <a:ext cx="15849600" cy="1478280"/>
+            <a:off x="4630874" y="8191500"/>
+            <a:ext cx="9270091" cy="1478280"/>
           </a:xfrm>
           <a:prstGeom prst="roundRect">
             <a:avLst>
@@ -6505,9 +7043,34 @@
           <a:p>
             <a:pPr algn="ctr">
               <a:lnSpc>
-                <a:spcPct val="200000"/>
+                <a:spcPct val="150000"/>
               </a:lnSpc>
             </a:pPr>
+            <a:r>
+              <a:rPr sz="2800" b="1" dirty="0">
+                <a:solidFill>
+                  <a:srgbClr val="1A1A1A"/>
+                </a:solidFill>
+                <a:latin typeface="Times New Roman"/>
+              </a:rPr>
+              <a:t>5 seeds per arm (1, 3, 4, 52, 54)  →  15 trained policies. </a:t>
+            </a:r>
+          </a:p>
+          <a:p>
+            <a:pPr algn="ctr">
+              <a:lnSpc>
+                <a:spcPct val="150000"/>
+              </a:lnSpc>
+            </a:pPr>
+            <a:r>
+              <a:rPr sz="2800" b="1" dirty="0">
+                <a:solidFill>
+                  <a:srgbClr val="1A1A1A"/>
+                </a:solidFill>
+                <a:latin typeface="Times New Roman"/>
+              </a:rPr>
+              <a:t>Every quantity is reported with its spread across seeds</a:t>
+            </a:r>
             <a:r>
               <a:rPr sz="2400" b="1" dirty="0">
                 <a:solidFill>
@@ -6515,23 +7078,7 @@
                 </a:solidFill>
                 <a:latin typeface="Times New Roman"/>
               </a:rPr>
-              <a:t>5 seeds per arm (1, 3, 4, 52, 54)  →  15 trained policies. Every quantity is reported with its spread across seeds.</a:t>
-            </a:r>
-          </a:p>
-          <a:p>
-            <a:pPr algn="ctr">
-              <a:lnSpc>
-                <a:spcPct val="200000"/>
-              </a:lnSpc>
-            </a:pPr>
-            <a:r>
-              <a:rPr sz="2000" b="0" dirty="0">
-                <a:solidFill>
-                  <a:srgbClr val="5A5A5A"/>
-                </a:solidFill>
-                <a:latin typeface="Times New Roman"/>
-              </a:rPr>
-              <a:t>This design answers all three gaps found in the literature: no control arm, no dispersion, one budget only.</a:t>
+              <a:t>.</a:t>
             </a:r>
           </a:p>
         </p:txBody>
@@ -6541,6 +7088,112 @@
   <p:clrMapOvr>
     <a:masterClrMapping/>
   </p:clrMapOvr>
+  <p:timing>
+    <p:tnLst>
+      <p:par>
+        <p:cTn id="1" dur="indefinite" restart="never" nodeType="tmRoot">
+          <p:childTnLst>
+            <p:seq concurrent="1" nextAc="seek">
+              <p:cTn id="2" dur="indefinite" nodeType="mainSeq">
+                <p:childTnLst>
+                  <p:par>
+                    <p:cTn id="3" fill="hold">
+                      <p:stCondLst>
+                        <p:cond delay="indefinite"/>
+                      </p:stCondLst>
+                      <p:childTnLst>
+                        <p:par>
+                          <p:cTn id="4" fill="hold">
+                            <p:stCondLst>
+                              <p:cond delay="0"/>
+                            </p:stCondLst>
+                            <p:childTnLst>
+                              <p:par>
+                                <p:cTn id="5" presetID="1" presetClass="entr" presetSubtype="0" fill="hold" grpId="0" nodeType="clickEffect">
+                                  <p:stCondLst>
+                                    <p:cond delay="0"/>
+                                  </p:stCondLst>
+                                  <p:childTnLst>
+                                    <p:set>
+                                      <p:cBhvr>
+                                        <p:cTn id="6" dur="1" fill="hold">
+                                          <p:stCondLst>
+                                            <p:cond delay="0"/>
+                                          </p:stCondLst>
+                                        </p:cTn>
+                                        <p:tgtEl>
+                                          <p:spTgt spid="22"/>
+                                        </p:tgtEl>
+                                        <p:attrNameLst>
+                                          <p:attrName>style.visibility</p:attrName>
+                                        </p:attrNameLst>
+                                      </p:cBhvr>
+                                      <p:to>
+                                        <p:strVal val="visible"/>
+                                      </p:to>
+                                    </p:set>
+                                  </p:childTnLst>
+                                </p:cTn>
+                              </p:par>
+                              <p:par>
+                                <p:cTn id="7" presetID="1" presetClass="entr" presetSubtype="0" fill="hold" grpId="0" nodeType="withEffect">
+                                  <p:stCondLst>
+                                    <p:cond delay="0"/>
+                                  </p:stCondLst>
+                                  <p:childTnLst>
+                                    <p:set>
+                                      <p:cBhvr>
+                                        <p:cTn id="8" dur="1" fill="hold">
+                                          <p:stCondLst>
+                                            <p:cond delay="0"/>
+                                          </p:stCondLst>
+                                        </p:cTn>
+                                        <p:tgtEl>
+                                          <p:spTgt spid="24"/>
+                                        </p:tgtEl>
+                                        <p:attrNameLst>
+                                          <p:attrName>style.visibility</p:attrName>
+                                        </p:attrNameLst>
+                                      </p:cBhvr>
+                                      <p:to>
+                                        <p:strVal val="visible"/>
+                                      </p:to>
+                                    </p:set>
+                                  </p:childTnLst>
+                                </p:cTn>
+                              </p:par>
+                            </p:childTnLst>
+                          </p:cTn>
+                        </p:par>
+                      </p:childTnLst>
+                    </p:cTn>
+                  </p:par>
+                </p:childTnLst>
+              </p:cTn>
+              <p:prevCondLst>
+                <p:cond evt="onPrev" delay="0">
+                  <p:tgtEl>
+                    <p:sldTgt/>
+                  </p:tgtEl>
+                </p:cond>
+              </p:prevCondLst>
+              <p:nextCondLst>
+                <p:cond evt="onNext" delay="0">
+                  <p:tgtEl>
+                    <p:sldTgt/>
+                  </p:tgtEl>
+                </p:cond>
+              </p:nextCondLst>
+            </p:seq>
+          </p:childTnLst>
+        </p:cTn>
+      </p:par>
+    </p:tnLst>
+    <p:bldLst>
+      <p:bldP spid="22" grpId="0"/>
+      <p:bldP spid="24" grpId="0"/>
+    </p:bldLst>
+  </p:timing>
 </p:sld>
 </file>
 
@@ -12281,14 +12934,14 @@
           <p:nvPr>
             <p:extLst>
               <p:ext uri="{D42A27DB-BD31-4B8C-83A1-F6EECF244321}">
-                <p14:modId xmlns:p14="http://schemas.microsoft.com/office/powerpoint/2010/main" val="2589419324"/>
+                <p14:modId xmlns:p14="http://schemas.microsoft.com/office/powerpoint/2010/main" val="1326124680"/>
               </p:ext>
             </p:extLst>
           </p:nvPr>
         </p:nvGraphicFramePr>
         <p:xfrm>
           <a:off x="1912772" y="2781300"/>
-          <a:ext cx="14462457" cy="4995225"/>
+          <a:ext cx="14462457" cy="4936013"/>
         </p:xfrm>
         <a:graphic>
           <a:graphicData uri="http://schemas.openxmlformats.org/drawingml/2006/table">
@@ -12736,14 +13389,14 @@
                       <a:r>
                         <a:rPr lang="en-US" sz="2800" dirty="0">
                           <a:solidFill>
-                            <a:srgbClr val="00B050"/>
+                            <a:schemeClr val="tx1"/>
                           </a:solidFill>
                           <a:latin typeface="Times New Roman"/>
                           <a:ea typeface="Times New Roman"/>
                           <a:cs typeface="Times New Roman"/>
                           <a:sym typeface="Times New Roman"/>
                         </a:rPr>
-                        <a:t> Control arm with λ pinned to zero — measures the implementation term directly</a:t>
+                        <a:t>measures the implementation term directly</a:t>
                       </a:r>
                     </a:p>
                   </a:txBody>
@@ -12971,7 +13624,7 @@
                       <a:r>
                         <a:rPr lang="en-FI" sz="2800" dirty="0">
                           <a:solidFill>
-                            <a:srgbClr val="00B050"/>
+                            <a:schemeClr val="tx1"/>
                           </a:solidFill>
                           <a:latin typeface="Times New Roman"/>
                           <a:ea typeface="Times New Roman"/>
@@ -12982,7 +13635,7 @@
                       </a:r>
                       <a:endParaRPr lang="en-US" sz="2800" dirty="0">
                         <a:solidFill>
-                          <a:srgbClr val="00B050"/>
+                          <a:schemeClr val="tx1"/>
                         </a:solidFill>
                         <a:latin typeface="Times New Roman"/>
                         <a:ea typeface="Times New Roman"/>
@@ -13247,7 +13900,7 @@
                       <a:r>
                         <a:rPr lang="en-FI" sz="2800" dirty="0">
                           <a:solidFill>
-                            <a:srgbClr val="00B050"/>
+                            <a:schemeClr val="tx1"/>
                           </a:solidFill>
                           <a:latin typeface="Times New Roman"/>
                           <a:ea typeface="Times New Roman"/>
@@ -13262,7 +13915,7 @@
                       <a:r>
                         <a:rPr lang="en-US" sz="2800" dirty="0">
                           <a:solidFill>
-                            <a:srgbClr val="00B050"/>
+                            <a:schemeClr val="tx1"/>
                           </a:solidFill>
                           <a:latin typeface="Times New Roman"/>
                           <a:ea typeface="Times New Roman"/>
@@ -13273,7 +13926,7 @@
                       </a:r>
                       <a:endParaRPr lang="en-GB" sz="2800" dirty="0">
                         <a:solidFill>
-                          <a:srgbClr val="00B050"/>
+                          <a:schemeClr val="tx1"/>
                         </a:solidFill>
                       </a:endParaRPr>
                     </a:p>
@@ -13402,7 +14055,7 @@
         <p:spPr>
           <a:xfrm>
             <a:off x="1353764" y="1945618"/>
-            <a:ext cx="9486848" cy="542889"/>
+            <a:ext cx="9486848" cy="494110"/>
           </a:xfrm>
           <a:prstGeom prst="rect">
             <a:avLst/>
@@ -13420,7 +14073,7 @@
               </a:lnSpc>
             </a:pPr>
             <a:r>
-              <a:rPr lang="en-US" sz="3000">
+              <a:rPr lang="en-US" sz="3000" dirty="0">
                 <a:solidFill>
                   <a:srgbClr val="000000"/>
                 </a:solidFill>
@@ -13429,7 +14082,31 @@
                 <a:cs typeface="Times New Roman"/>
                 <a:sym typeface="Times New Roman"/>
               </a:rPr>
-              <a:t>The main objectives of this thesis are,</a:t>
+              <a:t>The main objectives of this thesis are</a:t>
+            </a:r>
+            <a:r>
+              <a:rPr lang="en-FI" sz="3000" dirty="0">
+                <a:solidFill>
+                  <a:srgbClr val="000000"/>
+                </a:solidFill>
+                <a:latin typeface="Times New Roman"/>
+                <a:ea typeface="Times New Roman"/>
+                <a:cs typeface="Times New Roman"/>
+                <a:sym typeface="Times New Roman"/>
+              </a:rPr>
+              <a:t> to</a:t>
+            </a:r>
+            <a:r>
+              <a:rPr lang="en-US" sz="3000" dirty="0">
+                <a:solidFill>
+                  <a:srgbClr val="000000"/>
+                </a:solidFill>
+                <a:latin typeface="Times New Roman"/>
+                <a:ea typeface="Times New Roman"/>
+                <a:cs typeface="Times New Roman"/>
+                <a:sym typeface="Times New Roman"/>
+              </a:rPr>
+              <a:t>,</a:t>
             </a:r>
           </a:p>
         </p:txBody>
@@ -13443,7 +14120,7 @@
         <p:spPr>
           <a:xfrm>
             <a:off x="1015106" y="2473161"/>
-            <a:ext cx="13158093" cy="2206117"/>
+            <a:ext cx="13158093" cy="2629310"/>
           </a:xfrm>
           <a:prstGeom prst="rect">
             <a:avLst/>
@@ -13457,11 +14134,23 @@
           <a:p>
             <a:pPr marL="1104902" lvl="2" indent="-323851">
               <a:lnSpc>
-                <a:spcPts val="6000"/>
+                <a:spcPct val="200000"/>
               </a:lnSpc>
               <a:buFont typeface="Arial"/>
               <a:buChar char="•"/>
             </a:pPr>
+            <a:r>
+              <a:rPr lang="en-FI" sz="3000" dirty="0">
+                <a:solidFill>
+                  <a:srgbClr val="000000"/>
+                </a:solidFill>
+                <a:latin typeface="Times New Roman"/>
+                <a:ea typeface="Times New Roman"/>
+                <a:cs typeface="Times New Roman"/>
+                <a:sym typeface="Times New Roman"/>
+              </a:rPr>
+              <a:t>Implement</a:t>
+            </a:r>
             <a:r>
               <a:rPr lang="en-US" sz="3000" dirty="0">
                 <a:solidFill>
@@ -13472,13 +14161,13 @@
                 <a:cs typeface="Times New Roman"/>
                 <a:sym typeface="Times New Roman"/>
               </a:rPr>
-              <a:t>Implementing both the constrained and unconstrained agents</a:t>
+              <a:t> both the constrained and unconstrained agents</a:t>
             </a:r>
           </a:p>
           <a:p>
             <a:pPr marL="1104902" lvl="2" indent="-323851">
               <a:lnSpc>
-                <a:spcPts val="6000"/>
+                <a:spcPct val="200000"/>
               </a:lnSpc>
               <a:buFont typeface="Arial"/>
               <a:buChar char="•"/>
@@ -13523,7 +14212,7 @@
           <a:p>
             <a:pPr marL="1104902" lvl="2" indent="-323851">
               <a:lnSpc>
-                <a:spcPts val="6000"/>
+                <a:spcPct val="200000"/>
               </a:lnSpc>
               <a:buFont typeface="Arial"/>
               <a:buChar char="•"/>
@@ -13540,37 +14229,8 @@
               </a:rPr>
               <a:t>Use different seeds both for training and evaluation</a:t>
             </a:r>
-          </a:p>
-        </p:txBody>
-      </p:sp>
-      <p:sp>
-        <p:nvSpPr>
-          <p:cNvPr id="5" name="TextBox 5"/>
-          <p:cNvSpPr txBox="1"/>
-          <p:nvPr/>
-        </p:nvSpPr>
-        <p:spPr>
-          <a:xfrm>
-            <a:off x="3273251" y="5833155"/>
-            <a:ext cx="11741498" cy="494110"/>
-          </a:xfrm>
-          <a:prstGeom prst="rect">
-            <a:avLst/>
-          </a:prstGeom>
-        </p:spPr>
-        <p:txBody>
-          <a:bodyPr wrap="square" lIns="0" tIns="0" rIns="0" bIns="0" rtlCol="0" anchor="t">
-            <a:spAutoFit/>
-          </a:bodyPr>
-          <a:lstStyle/>
-          <a:p>
-            <a:pPr algn="ctr">
-              <a:lnSpc>
-                <a:spcPts val="4200"/>
-              </a:lnSpc>
-            </a:pPr>
-            <a:r>
-              <a:rPr lang="en-US" sz="3000" dirty="0">
+            <a:r>
+              <a:rPr lang="en-FI" sz="3000" dirty="0">
                 <a:solidFill>
                   <a:srgbClr val="000000"/>
                 </a:solidFill>
@@ -13579,32 +14239,17 @@
                 <a:cs typeface="Times New Roman"/>
                 <a:sym typeface="Times New Roman"/>
               </a:rPr>
-              <a:t>Does a stated budget change safety </a:t>
-            </a:r>
-            <a:r>
-              <a:rPr lang="en-US" sz="3000" dirty="0" err="1">
-                <a:solidFill>
-                  <a:srgbClr val="000000"/>
-                </a:solidFill>
-                <a:latin typeface="Times New Roman"/>
-                <a:ea typeface="Times New Roman"/>
-                <a:cs typeface="Times New Roman"/>
-                <a:sym typeface="Times New Roman"/>
-              </a:rPr>
-              <a:t>behaviour</a:t>
-            </a:r>
-            <a:r>
-              <a:rPr lang="en-US" sz="3000" dirty="0">
-                <a:solidFill>
-                  <a:srgbClr val="000000"/>
-                </a:solidFill>
-                <a:latin typeface="Times New Roman"/>
-                <a:ea typeface="Times New Roman"/>
-                <a:cs typeface="Times New Roman"/>
-                <a:sym typeface="Times New Roman"/>
-              </a:rPr>
-              <a:t> — and its predictability?</a:t>
-            </a:r>
+              <a:t> both</a:t>
+            </a:r>
+            <a:endParaRPr lang="en-US" sz="3000" dirty="0">
+              <a:solidFill>
+                <a:srgbClr val="000000"/>
+              </a:solidFill>
+              <a:latin typeface="Times New Roman"/>
+              <a:ea typeface="Times New Roman"/>
+              <a:cs typeface="Times New Roman"/>
+              <a:sym typeface="Times New Roman"/>
+            </a:endParaRPr>
           </a:p>
         </p:txBody>
       </p:sp>
@@ -13613,130 +14258,6 @@
   <p:clrMapOvr>
     <a:masterClrMapping/>
   </p:clrMapOvr>
-  <p:timing>
-    <p:tnLst>
-      <p:par>
-        <p:cTn id="1" dur="indefinite" restart="never" nodeType="tmRoot">
-          <p:childTnLst>
-            <p:seq concurrent="1" nextAc="seek">
-              <p:cTn id="2" dur="indefinite" nodeType="mainSeq">
-                <p:childTnLst>
-                  <p:par>
-                    <p:cTn id="3" fill="hold">
-                      <p:stCondLst>
-                        <p:cond delay="indefinite"/>
-                      </p:stCondLst>
-                      <p:childTnLst>
-                        <p:par>
-                          <p:cTn id="4" fill="hold">
-                            <p:stCondLst>
-                              <p:cond delay="0"/>
-                            </p:stCondLst>
-                            <p:childTnLst>
-                              <p:par>
-                                <p:cTn id="5" presetID="2" presetClass="entr" presetSubtype="4" fill="hold" grpId="0" nodeType="clickEffect">
-                                  <p:stCondLst>
-                                    <p:cond delay="0"/>
-                                  </p:stCondLst>
-                                  <p:childTnLst>
-                                    <p:set>
-                                      <p:cBhvr>
-                                        <p:cTn id="6" dur="1" fill="hold">
-                                          <p:stCondLst>
-                                            <p:cond delay="0"/>
-                                          </p:stCondLst>
-                                        </p:cTn>
-                                        <p:tgtEl>
-                                          <p:spTgt spid="5"/>
-                                        </p:tgtEl>
-                                        <p:attrNameLst>
-                                          <p:attrName>style.visibility</p:attrName>
-                                        </p:attrNameLst>
-                                      </p:cBhvr>
-                                      <p:to>
-                                        <p:strVal val="visible"/>
-                                      </p:to>
-                                    </p:set>
-                                    <p:anim calcmode="lin" valueType="num">
-                                      <p:cBhvr additive="base">
-                                        <p:cTn id="7" dur="500" fill="hold"/>
-                                        <p:tgtEl>
-                                          <p:spTgt spid="5"/>
-                                        </p:tgtEl>
-                                        <p:attrNameLst>
-                                          <p:attrName>ppt_x</p:attrName>
-                                        </p:attrNameLst>
-                                      </p:cBhvr>
-                                      <p:tavLst>
-                                        <p:tav tm="0">
-                                          <p:val>
-                                            <p:strVal val="#ppt_x"/>
-                                          </p:val>
-                                        </p:tav>
-                                        <p:tav tm="100000">
-                                          <p:val>
-                                            <p:strVal val="#ppt_x"/>
-                                          </p:val>
-                                        </p:tav>
-                                      </p:tavLst>
-                                    </p:anim>
-                                    <p:anim calcmode="lin" valueType="num">
-                                      <p:cBhvr additive="base">
-                                        <p:cTn id="8" dur="500" fill="hold"/>
-                                        <p:tgtEl>
-                                          <p:spTgt spid="5"/>
-                                        </p:tgtEl>
-                                        <p:attrNameLst>
-                                          <p:attrName>ppt_y</p:attrName>
-                                        </p:attrNameLst>
-                                      </p:cBhvr>
-                                      <p:tavLst>
-                                        <p:tav tm="0">
-                                          <p:val>
-                                            <p:strVal val="1+#ppt_h/2"/>
-                                          </p:val>
-                                        </p:tav>
-                                        <p:tav tm="100000">
-                                          <p:val>
-                                            <p:strVal val="#ppt_y"/>
-                                          </p:val>
-                                        </p:tav>
-                                      </p:tavLst>
-                                    </p:anim>
-                                  </p:childTnLst>
-                                </p:cTn>
-                              </p:par>
-                            </p:childTnLst>
-                          </p:cTn>
-                        </p:par>
-                      </p:childTnLst>
-                    </p:cTn>
-                  </p:par>
-                </p:childTnLst>
-              </p:cTn>
-              <p:prevCondLst>
-                <p:cond evt="onPrev" delay="0">
-                  <p:tgtEl>
-                    <p:sldTgt/>
-                  </p:tgtEl>
-                </p:cond>
-              </p:prevCondLst>
-              <p:nextCondLst>
-                <p:cond evt="onNext" delay="0">
-                  <p:tgtEl>
-                    <p:sldTgt/>
-                  </p:tgtEl>
-                </p:cond>
-              </p:nextCondLst>
-            </p:seq>
-          </p:childTnLst>
-        </p:cTn>
-      </p:par>
-    </p:tnLst>
-    <p:bldLst>
-      <p:bldP spid="5" grpId="0"/>
-    </p:bldLst>
-  </p:timing>
 </p:sld>
 </file>
 
@@ -14146,8 +14667,9 @@
                 <a:avLst/>
               </a:prstGeom>
               <a:solidFill>
-                <a:schemeClr val="accent6">
-                  <a:lumMod val="75000"/>
+                <a:schemeClr val="accent4">
+                  <a:lumMod val="40000"/>
+                  <a:lumOff val="60000"/>
                 </a:schemeClr>
               </a:solidFill>
             </p:spPr>
@@ -14770,8 +15292,9 @@
                 <a:avLst/>
               </a:prstGeom>
               <a:solidFill>
-                <a:schemeClr val="accent6">
-                  <a:lumMod val="75000"/>
+                <a:schemeClr val="accent4">
+                  <a:lumMod val="40000"/>
+                  <a:lumOff val="60000"/>
                 </a:schemeClr>
               </a:solidFill>
             </p:spPr>
@@ -15001,8 +15524,8 @@
         </p:nvSpPr>
         <p:spPr>
           <a:xfrm>
-            <a:off x="2585980" y="4242644"/>
-            <a:ext cx="6352047" cy="3970318"/>
+            <a:off x="3655651" y="4242644"/>
+            <a:ext cx="5114292" cy="3539430"/>
           </a:xfrm>
           <a:prstGeom prst="rect">
             <a:avLst/>
@@ -15020,21 +15543,21 @@
               <a:buChar char="•"/>
             </a:pPr>
             <a:r>
-              <a:rPr lang="en-FI" sz="3600" dirty="0">
+              <a:rPr lang="en-FI" sz="3200" dirty="0">
                 <a:latin typeface="Times New Roman" panose="02020603050405020304" pitchFamily="18" charset="0"/>
                 <a:cs typeface="Times New Roman" panose="02020603050405020304" pitchFamily="18" charset="0"/>
               </a:rPr>
               <a:t>  NVIDIA </a:t>
             </a:r>
             <a:r>
-              <a:rPr lang="en-FI" sz="3600" dirty="0" err="1">
+              <a:rPr lang="en-FI" sz="3200" dirty="0" err="1">
                 <a:latin typeface="Times New Roman" panose="02020603050405020304" pitchFamily="18" charset="0"/>
                 <a:cs typeface="Times New Roman" panose="02020603050405020304" pitchFamily="18" charset="0"/>
               </a:rPr>
               <a:t>IsaacSim</a:t>
             </a:r>
             <a:r>
-              <a:rPr lang="en-FI" sz="3600" dirty="0">
+              <a:rPr lang="en-FI" sz="3200" dirty="0">
                 <a:latin typeface="Times New Roman" panose="02020603050405020304" pitchFamily="18" charset="0"/>
                 <a:cs typeface="Times New Roman" panose="02020603050405020304" pitchFamily="18" charset="0"/>
               </a:rPr>
@@ -15046,7 +15569,7 @@
               <a:buFont typeface="Arial" panose="020B0604020202020204" pitchFamily="34" charset="0"/>
               <a:buChar char="•"/>
             </a:pPr>
-            <a:endParaRPr lang="en-FI" sz="3600" dirty="0">
+            <a:endParaRPr lang="en-FI" sz="3200" dirty="0">
               <a:latin typeface="Times New Roman" panose="02020603050405020304" pitchFamily="18" charset="0"/>
               <a:cs typeface="Times New Roman" panose="02020603050405020304" pitchFamily="18" charset="0"/>
             </a:endParaRPr>
@@ -15057,21 +15580,21 @@
               <a:buChar char="•"/>
             </a:pPr>
             <a:r>
-              <a:rPr lang="en-FI" sz="3600" dirty="0">
+              <a:rPr lang="en-FI" sz="3200" dirty="0">
                 <a:latin typeface="Times New Roman" panose="02020603050405020304" pitchFamily="18" charset="0"/>
                 <a:cs typeface="Times New Roman" panose="02020603050405020304" pitchFamily="18" charset="0"/>
               </a:rPr>
               <a:t>  </a:t>
             </a:r>
             <a:r>
-              <a:rPr lang="en-FI" sz="3600" dirty="0" err="1">
+              <a:rPr lang="en-FI" sz="3200" dirty="0" err="1">
                 <a:latin typeface="Times New Roman" panose="02020603050405020304" pitchFamily="18" charset="0"/>
                 <a:cs typeface="Times New Roman" panose="02020603050405020304" pitchFamily="18" charset="0"/>
               </a:rPr>
               <a:t>IsaacLab</a:t>
             </a:r>
             <a:r>
-              <a:rPr lang="en-FI" sz="3600" dirty="0">
+              <a:rPr lang="en-FI" sz="3200" dirty="0">
                 <a:latin typeface="Times New Roman" panose="02020603050405020304" pitchFamily="18" charset="0"/>
                 <a:cs typeface="Times New Roman" panose="02020603050405020304" pitchFamily="18" charset="0"/>
               </a:rPr>
@@ -15083,7 +15606,7 @@
               <a:buFont typeface="Arial" panose="020B0604020202020204" pitchFamily="34" charset="0"/>
               <a:buChar char="•"/>
             </a:pPr>
-            <a:endParaRPr lang="en-FI" sz="3600" dirty="0">
+            <a:endParaRPr lang="en-FI" sz="3200" dirty="0">
               <a:latin typeface="Times New Roman" panose="02020603050405020304" pitchFamily="18" charset="0"/>
               <a:cs typeface="Times New Roman" panose="02020603050405020304" pitchFamily="18" charset="0"/>
             </a:endParaRPr>
@@ -15094,21 +15617,21 @@
               <a:buChar char="•"/>
             </a:pPr>
             <a:r>
-              <a:rPr lang="en-FI" sz="3600" dirty="0">
+              <a:rPr lang="en-FI" sz="3200" dirty="0">
                 <a:latin typeface="Times New Roman" panose="02020603050405020304" pitchFamily="18" charset="0"/>
                 <a:cs typeface="Times New Roman" panose="02020603050405020304" pitchFamily="18" charset="0"/>
               </a:rPr>
               <a:t>  </a:t>
             </a:r>
             <a:r>
-              <a:rPr lang="en-FI" sz="3600" dirty="0" err="1">
+              <a:rPr lang="en-FI" sz="3200" dirty="0" err="1">
                 <a:latin typeface="Times New Roman" panose="02020603050405020304" pitchFamily="18" charset="0"/>
                 <a:cs typeface="Times New Roman" panose="02020603050405020304" pitchFamily="18" charset="0"/>
               </a:rPr>
               <a:t>rsl_rl</a:t>
             </a:r>
             <a:r>
-              <a:rPr lang="en-FI" sz="3600" dirty="0">
+              <a:rPr lang="en-FI" sz="3200" dirty="0">
                 <a:latin typeface="Times New Roman" panose="02020603050405020304" pitchFamily="18" charset="0"/>
                 <a:cs typeface="Times New Roman" panose="02020603050405020304" pitchFamily="18" charset="0"/>
               </a:rPr>
@@ -15120,7 +15643,7 @@
               <a:buFont typeface="Arial" panose="020B0604020202020204" pitchFamily="34" charset="0"/>
               <a:buChar char="•"/>
             </a:pPr>
-            <a:endParaRPr lang="en-FI" sz="3600" dirty="0">
+            <a:endParaRPr lang="en-FI" sz="3200" dirty="0">
               <a:latin typeface="Times New Roman" panose="02020603050405020304" pitchFamily="18" charset="0"/>
               <a:cs typeface="Times New Roman" panose="02020603050405020304" pitchFamily="18" charset="0"/>
             </a:endParaRPr>
@@ -15131,7 +15654,7 @@
               <a:buChar char="•"/>
             </a:pPr>
             <a:r>
-              <a:rPr lang="en-FI" sz="3600" dirty="0">
+              <a:rPr lang="en-FI" sz="3200" dirty="0">
                 <a:latin typeface="Times New Roman" panose="02020603050405020304" pitchFamily="18" charset="0"/>
                 <a:cs typeface="Times New Roman" panose="02020603050405020304" pitchFamily="18" charset="0"/>
               </a:rPr>
@@ -15155,7 +15678,7 @@
         <p:spPr>
           <a:xfrm>
             <a:off x="8743139" y="4242644"/>
-            <a:ext cx="6952884" cy="2862322"/>
+            <a:ext cx="6952884" cy="2554545"/>
           </a:xfrm>
           <a:prstGeom prst="rect">
             <a:avLst/>
@@ -15173,7 +15696,7 @@
               <a:buChar char="•"/>
             </a:pPr>
             <a:r>
-              <a:rPr lang="en-FI" sz="3600" dirty="0">
+              <a:rPr lang="en-FI" sz="3200" dirty="0">
                 <a:latin typeface="Times New Roman" panose="02020603050405020304" pitchFamily="18" charset="0"/>
                 <a:cs typeface="Times New Roman" panose="02020603050405020304" pitchFamily="18" charset="0"/>
               </a:rPr>
@@ -15185,7 +15708,7 @@
               <a:buFont typeface="Arial" panose="020B0604020202020204" pitchFamily="34" charset="0"/>
               <a:buChar char="•"/>
             </a:pPr>
-            <a:endParaRPr lang="en-FI" sz="3600" dirty="0">
+            <a:endParaRPr lang="en-FI" sz="3200" dirty="0">
               <a:latin typeface="Times New Roman" panose="02020603050405020304" pitchFamily="18" charset="0"/>
               <a:cs typeface="Times New Roman" panose="02020603050405020304" pitchFamily="18" charset="0"/>
             </a:endParaRPr>
@@ -15196,7 +15719,7 @@
               <a:buChar char="•"/>
             </a:pPr>
             <a:r>
-              <a:rPr lang="en-FI" sz="3600" dirty="0">
+              <a:rPr lang="en-FI" sz="3200" dirty="0">
                 <a:latin typeface="Times New Roman" panose="02020603050405020304" pitchFamily="18" charset="0"/>
                 <a:cs typeface="Times New Roman" panose="02020603050405020304" pitchFamily="18" charset="0"/>
               </a:rPr>
@@ -15208,7 +15731,7 @@
               <a:buFont typeface="Arial" panose="020B0604020202020204" pitchFamily="34" charset="0"/>
               <a:buChar char="•"/>
             </a:pPr>
-            <a:endParaRPr lang="en-FI" sz="3600" dirty="0">
+            <a:endParaRPr lang="en-FI" sz="3200" dirty="0">
               <a:latin typeface="Times New Roman" panose="02020603050405020304" pitchFamily="18" charset="0"/>
               <a:cs typeface="Times New Roman" panose="02020603050405020304" pitchFamily="18" charset="0"/>
             </a:endParaRPr>
@@ -15219,19 +15742,19 @@
               <a:buChar char="•"/>
             </a:pPr>
             <a:r>
-              <a:rPr lang="en-GB" sz="3600" dirty="0">
+              <a:rPr lang="en-GB" sz="3200" dirty="0">
                 <a:latin typeface="Times New Roman"/>
               </a:rPr>
               <a:t>UR5e + </a:t>
             </a:r>
             <a:r>
-              <a:rPr lang="en-GB" sz="3600" dirty="0" err="1">
+              <a:rPr lang="en-GB" sz="3200" dirty="0" err="1">
                 <a:latin typeface="Times New Roman"/>
               </a:rPr>
               <a:t>Robotiq</a:t>
             </a:r>
             <a:r>
-              <a:rPr lang="en-GB" sz="3600" dirty="0">
+              <a:rPr lang="en-GB" sz="3200" dirty="0">
                 <a:latin typeface="Times New Roman"/>
               </a:rPr>
               <a:t> 2F-85 gripper</a:t>
@@ -15296,13 +15819,13 @@
   <p:clrMapOvr>
     <a:masterClrMapping/>
   </p:clrMapOvr>
-  <mc:AlternateContent xmlns:mc="http://schemas.openxmlformats.org/markup-compatibility/2006">
-    <mc:Choice xmlns:p159="http://schemas.microsoft.com/office/powerpoint/2015/09/main" Requires="p159">
+  <mc:AlternateContent xmlns:mc="http://schemas.openxmlformats.org/markup-compatibility/2006" xmlns:p159="http://schemas.microsoft.com/office/powerpoint/2015/09/main">
+    <mc:Choice Requires="p159">
       <p:transition spd="med">
         <p159:morph option="byObject"/>
       </p:transition>
     </mc:Choice>
-    <mc:Fallback>
+    <mc:Fallback xmlns="">
       <p:transition spd="med">
         <p:fade/>
       </p:transition>
@@ -15319,7 +15842,7 @@
         <p:cNvPr id="1" name="">
           <a:extLst>
             <a:ext uri="{FF2B5EF4-FFF2-40B4-BE49-F238E27FC236}">
-              <a16:creationId xmlns:a16="http://schemas.microsoft.com/office/drawing/2014/main" id="{453DECE7-96E7-F847-6742-6C7D71EBE799}"/>
+              <a16:creationId xmlns:a16="http://schemas.microsoft.com/office/drawing/2014/main" id="{92069629-DF0E-B701-4625-7FF713A7B97B}"/>
             </a:ext>
           </a:extLst>
         </p:cNvPr>
@@ -15339,7 +15862,7 @@
           <p:cNvPr id="3" name="TextBox 3">
             <a:extLst>
               <a:ext uri="{FF2B5EF4-FFF2-40B4-BE49-F238E27FC236}">
-                <a16:creationId xmlns:a16="http://schemas.microsoft.com/office/drawing/2014/main" id="{C25103C8-BF22-41B6-86FF-517D2CB7E653}"/>
+                <a16:creationId xmlns:a16="http://schemas.microsoft.com/office/drawing/2014/main" id="{9EC50B51-938D-EBCA-DCF6-5390281DA778}"/>
               </a:ext>
             </a:extLst>
           </p:cNvPr>
@@ -15383,10 +15906,103 @@
       </p:sp>
       <p:grpSp>
         <p:nvGrpSpPr>
+          <p:cNvPr id="23" name="Group 22">
+            <a:extLst>
+              <a:ext uri="{FF2B5EF4-FFF2-40B4-BE49-F238E27FC236}">
+                <a16:creationId xmlns:a16="http://schemas.microsoft.com/office/drawing/2014/main" id="{762DCFDA-8905-E8A0-31E0-1546084918C8}"/>
+              </a:ext>
+            </a:extLst>
+          </p:cNvPr>
+          <p:cNvGrpSpPr/>
+          <p:nvPr/>
+        </p:nvGrpSpPr>
+        <p:grpSpPr>
+          <a:xfrm>
+            <a:off x="6831674" y="4615647"/>
+            <a:ext cx="7313452" cy="523220"/>
+            <a:chOff x="5532377" y="1858833"/>
+            <a:chExt cx="4535474" cy="523220"/>
+          </a:xfrm>
+        </p:grpSpPr>
+        <p:sp>
+          <p:nvSpPr>
+            <p:cNvPr id="20" name="TextBox 19">
+              <a:extLst>
+                <a:ext uri="{FF2B5EF4-FFF2-40B4-BE49-F238E27FC236}">
+                  <a16:creationId xmlns:a16="http://schemas.microsoft.com/office/drawing/2014/main" id="{C3A5125A-3AA6-7A9C-2336-B738F977857E}"/>
+                </a:ext>
+              </a:extLst>
+            </p:cNvPr>
+            <p:cNvSpPr txBox="1"/>
+            <p:nvPr/>
+          </p:nvSpPr>
+          <p:spPr>
+            <a:xfrm>
+              <a:off x="5532377" y="1858833"/>
+              <a:ext cx="2433674" cy="523220"/>
+            </a:xfrm>
+            <a:prstGeom prst="rect">
+              <a:avLst/>
+            </a:prstGeom>
+            <a:noFill/>
+          </p:spPr>
+          <p:txBody>
+            <a:bodyPr wrap="square" rtlCol="0">
+              <a:spAutoFit/>
+            </a:bodyPr>
+            <a:lstStyle/>
+            <a:p>
+              <a:pPr marL="457200" indent="-457200">
+                <a:buFont typeface="Arial" panose="020B0604020202020204" pitchFamily="34" charset="0"/>
+                <a:buChar char="•"/>
+              </a:pPr>
+              <a:endParaRPr lang="en-GB" sz="2800" dirty="0"/>
+            </a:p>
+          </p:txBody>
+        </p:sp>
+        <p:sp>
+          <p:nvSpPr>
+            <p:cNvPr id="22" name="TextBox 21">
+              <a:extLst>
+                <a:ext uri="{FF2B5EF4-FFF2-40B4-BE49-F238E27FC236}">
+                  <a16:creationId xmlns:a16="http://schemas.microsoft.com/office/drawing/2014/main" id="{C0C19B77-7543-9C02-F050-26E2442E5930}"/>
+                </a:ext>
+              </a:extLst>
+            </p:cNvPr>
+            <p:cNvSpPr txBox="1"/>
+            <p:nvPr/>
+          </p:nvSpPr>
+          <p:spPr>
+            <a:xfrm>
+              <a:off x="7696200" y="1858833"/>
+              <a:ext cx="2371651" cy="523220"/>
+            </a:xfrm>
+            <a:prstGeom prst="rect">
+              <a:avLst/>
+            </a:prstGeom>
+            <a:noFill/>
+          </p:spPr>
+          <p:txBody>
+            <a:bodyPr wrap="square" rtlCol="0">
+              <a:spAutoFit/>
+            </a:bodyPr>
+            <a:lstStyle/>
+            <a:p>
+              <a:pPr marL="457200" indent="-457200">
+                <a:buFont typeface="Arial" panose="020B0604020202020204" pitchFamily="34" charset="0"/>
+                <a:buChar char="•"/>
+              </a:pPr>
+              <a:endParaRPr lang="en-GB" sz="2800" dirty="0"/>
+            </a:p>
+          </p:txBody>
+        </p:sp>
+      </p:grpSp>
+      <p:grpSp>
+        <p:nvGrpSpPr>
           <p:cNvPr id="4" name="Group 3">
             <a:extLst>
               <a:ext uri="{FF2B5EF4-FFF2-40B4-BE49-F238E27FC236}">
-                <a16:creationId xmlns:a16="http://schemas.microsoft.com/office/drawing/2014/main" id="{3D0BBEB8-EEF4-16D4-42B5-A598A9F12E6B}"/>
+                <a16:creationId xmlns:a16="http://schemas.microsoft.com/office/drawing/2014/main" id="{2B8E0E5F-4D4E-8771-1A84-A3F40B86CD13}"/>
               </a:ext>
             </a:extLst>
           </p:cNvPr>
@@ -15406,7 +16022,7 @@
             <p:cNvPr id="31" name="Arrow: Right 30">
               <a:extLst>
                 <a:ext uri="{FF2B5EF4-FFF2-40B4-BE49-F238E27FC236}">
-                  <a16:creationId xmlns:a16="http://schemas.microsoft.com/office/drawing/2014/main" id="{6D76A05C-2C76-1089-120B-32C5E3167AD5}"/>
+                  <a16:creationId xmlns:a16="http://schemas.microsoft.com/office/drawing/2014/main" id="{24593304-64A9-5DC9-6E17-576EB97BFD6A}"/>
                 </a:ext>
               </a:extLst>
             </p:cNvPr>
@@ -15455,7 +16071,7 @@
             <p:cNvPr id="2" name="Group 1">
               <a:extLst>
                 <a:ext uri="{FF2B5EF4-FFF2-40B4-BE49-F238E27FC236}">
-                  <a16:creationId xmlns:a16="http://schemas.microsoft.com/office/drawing/2014/main" id="{71954D66-6D18-665A-6B0E-67A3F3762767}"/>
+                  <a16:creationId xmlns:a16="http://schemas.microsoft.com/office/drawing/2014/main" id="{7B587713-D94E-D962-9060-C1DF7DA85C7F}"/>
                 </a:ext>
               </a:extLst>
             </p:cNvPr>
@@ -15475,7 +16091,7 @@
               <p:cNvPr id="24" name="Rectangle: Rounded Corners 23">
                 <a:extLst>
                   <a:ext uri="{FF2B5EF4-FFF2-40B4-BE49-F238E27FC236}">
-                    <a16:creationId xmlns:a16="http://schemas.microsoft.com/office/drawing/2014/main" id="{DA429AC6-5E5E-2968-C18C-7EC1A05B9D5A}"/>
+                    <a16:creationId xmlns:a16="http://schemas.microsoft.com/office/drawing/2014/main" id="{25179C15-E452-BC44-9177-DADE58BC6727}"/>
                   </a:ext>
                 </a:extLst>
               </p:cNvPr>
@@ -15543,7 +16159,7 @@
               <p:cNvPr id="26" name="Rectangle: Rounded Corners 25">
                 <a:extLst>
                   <a:ext uri="{FF2B5EF4-FFF2-40B4-BE49-F238E27FC236}">
-                    <a16:creationId xmlns:a16="http://schemas.microsoft.com/office/drawing/2014/main" id="{7926AD9A-B080-19F7-9CF0-279FAA6CB4CE}"/>
+                    <a16:creationId xmlns:a16="http://schemas.microsoft.com/office/drawing/2014/main" id="{2D4B761A-7E7D-D498-F0B4-DD8A9B8F4DCC}"/>
                   </a:ext>
                 </a:extLst>
               </p:cNvPr>
@@ -15608,7 +16224,7 @@
               <p:cNvPr id="28" name="Rectangle: Rounded Corners 27">
                 <a:extLst>
                   <a:ext uri="{FF2B5EF4-FFF2-40B4-BE49-F238E27FC236}">
-                    <a16:creationId xmlns:a16="http://schemas.microsoft.com/office/drawing/2014/main" id="{3106749C-75BF-D639-B188-0DA5E70E9335}"/>
+                    <a16:creationId xmlns:a16="http://schemas.microsoft.com/office/drawing/2014/main" id="{04BFE9B0-7B3E-8930-2BE7-E06454635A69}"/>
                   </a:ext>
                 </a:extLst>
               </p:cNvPr>
@@ -15624,8 +16240,9 @@
                 <a:avLst/>
               </a:prstGeom>
               <a:solidFill>
-                <a:schemeClr val="accent6">
-                  <a:lumMod val="75000"/>
+                <a:schemeClr val="accent4">
+                  <a:lumMod val="40000"/>
+                  <a:lumOff val="60000"/>
                 </a:schemeClr>
               </a:solidFill>
             </p:spPr>
@@ -15681,7 +16298,7 @@
               <p:cNvPr id="30" name="Rectangle: Rounded Corners 29">
                 <a:extLst>
                   <a:ext uri="{FF2B5EF4-FFF2-40B4-BE49-F238E27FC236}">
-                    <a16:creationId xmlns:a16="http://schemas.microsoft.com/office/drawing/2014/main" id="{D38AC2E5-DCD1-88C0-1926-AFA955933DDB}"/>
+                    <a16:creationId xmlns:a16="http://schemas.microsoft.com/office/drawing/2014/main" id="{CA605747-07A5-F8C8-0E8C-425EBDDEC64D}"/>
                   </a:ext>
                 </a:extLst>
               </p:cNvPr>
@@ -15746,7 +16363,7 @@
               <p:cNvPr id="33" name="Arrow: Right 32">
                 <a:extLst>
                   <a:ext uri="{FF2B5EF4-FFF2-40B4-BE49-F238E27FC236}">
-                    <a16:creationId xmlns:a16="http://schemas.microsoft.com/office/drawing/2014/main" id="{2752135B-9498-22FC-971D-0DC11933675B}"/>
+                    <a16:creationId xmlns:a16="http://schemas.microsoft.com/office/drawing/2014/main" id="{DE25D286-3777-D4D9-B467-97CEBC1BF3D1}"/>
                   </a:ext>
                 </a:extLst>
               </p:cNvPr>
@@ -15795,7 +16412,7 @@
               <p:cNvPr id="35" name="Arrow: Right 34">
                 <a:extLst>
                   <a:ext uri="{FF2B5EF4-FFF2-40B4-BE49-F238E27FC236}">
-                    <a16:creationId xmlns:a16="http://schemas.microsoft.com/office/drawing/2014/main" id="{5F634524-A969-3CC2-4B18-864DE7037E3D}"/>
+                    <a16:creationId xmlns:a16="http://schemas.microsoft.com/office/drawing/2014/main" id="{474D1B28-0E6C-E451-5649-5CA4E0807693}"/>
                   </a:ext>
                 </a:extLst>
               </p:cNvPr>
@@ -15846,7 +16463,7 @@
           <p:cNvPr id="8" name="Rectangle 7">
             <a:extLst>
               <a:ext uri="{FF2B5EF4-FFF2-40B4-BE49-F238E27FC236}">
-                <a16:creationId xmlns:a16="http://schemas.microsoft.com/office/drawing/2014/main" id="{348E54A0-3C8D-4256-94D1-4C971C130021}"/>
+                <a16:creationId xmlns:a16="http://schemas.microsoft.com/office/drawing/2014/main" id="{00B2059B-8D05-34C7-DD04-08326341D3F6}"/>
               </a:ext>
             </a:extLst>
           </p:cNvPr>
@@ -15855,8 +16472,8 @@
         </p:nvSpPr>
         <p:spPr>
           <a:xfrm>
-            <a:off x="5395907" y="1711747"/>
-            <a:ext cx="3048000" cy="1905000"/>
+            <a:off x="14097000" y="1711747"/>
+            <a:ext cx="3048000" cy="1831553"/>
           </a:xfrm>
           <a:prstGeom prst="rect">
             <a:avLst/>
@@ -15893,821 +16510,273 @@
           </a:p>
         </p:txBody>
       </p:sp>
-      <p:grpSp>
-        <p:nvGrpSpPr>
-          <p:cNvPr id="61" name="Group 60">
+      <p:sp>
+        <p:nvSpPr>
+          <p:cNvPr id="6" name="TextBox 5">
             <a:extLst>
               <a:ext uri="{FF2B5EF4-FFF2-40B4-BE49-F238E27FC236}">
-                <a16:creationId xmlns:a16="http://schemas.microsoft.com/office/drawing/2014/main" id="{635FA145-3127-0A4D-D82E-A153D461705F}"/>
+                <a16:creationId xmlns:a16="http://schemas.microsoft.com/office/drawing/2014/main" id="{2C279A18-5ED4-9B27-606B-C533B2B511F6}"/>
               </a:ext>
             </a:extLst>
           </p:cNvPr>
-          <p:cNvGrpSpPr/>
+          <p:cNvSpPr txBox="1"/>
           <p:nvPr/>
-        </p:nvGrpSpPr>
-        <p:grpSpPr>
+        </p:nvSpPr>
+        <p:spPr>
           <a:xfrm>
-            <a:off x="1267953" y="4128154"/>
-            <a:ext cx="15752094" cy="5084200"/>
-            <a:chOff x="1171463" y="4333072"/>
-            <a:chExt cx="16354537" cy="5084200"/>
+            <a:off x="3274147" y="4076700"/>
+            <a:ext cx="6479453" cy="4031873"/>
           </a:xfrm>
-        </p:grpSpPr>
-        <p:sp>
-          <p:nvSpPr>
-            <p:cNvPr id="37" name="Rounded Rectangle 3">
-              <a:extLst>
-                <a:ext uri="{FF2B5EF4-FFF2-40B4-BE49-F238E27FC236}">
-                  <a16:creationId xmlns:a16="http://schemas.microsoft.com/office/drawing/2014/main" id="{2A586DE9-9E9D-026B-70A4-0FA2868C6D57}"/>
-                </a:ext>
-              </a:extLst>
-            </p:cNvPr>
-            <p:cNvSpPr/>
-            <p:nvPr/>
-          </p:nvSpPr>
-          <p:spPr>
-            <a:xfrm>
-              <a:off x="1171463" y="4333072"/>
-              <a:ext cx="4748661" cy="1191428"/>
-            </a:xfrm>
-            <a:prstGeom prst="roundRect">
-              <a:avLst>
-                <a:gd name="adj" fmla="val 10000"/>
-              </a:avLst>
-            </a:prstGeom>
-            <a:solidFill>
-              <a:schemeClr val="accent1">
-                <a:lumMod val="20000"/>
-                <a:lumOff val="80000"/>
-              </a:schemeClr>
-            </a:solidFill>
-            <a:ln w="15875">
-              <a:solidFill>
-                <a:schemeClr val="tx1"/>
-              </a:solidFill>
-            </a:ln>
-            <a:effectLst/>
-          </p:spPr>
-          <p:style>
-            <a:lnRef idx="1">
-              <a:schemeClr val="accent1"/>
-            </a:lnRef>
-            <a:fillRef idx="3">
-              <a:schemeClr val="accent1"/>
-            </a:fillRef>
-            <a:effectRef idx="2">
-              <a:schemeClr val="accent1"/>
-            </a:effectRef>
-            <a:fontRef idx="minor">
-              <a:schemeClr val="lt1"/>
-            </a:fontRef>
-          </p:style>
-          <p:txBody>
-            <a:bodyPr wrap="square" lIns="128016" tIns="54864" rIns="128016" bIns="54864" rtlCol="0" anchor="ctr"/>
-            <a:lstStyle/>
-            <a:p>
-              <a:pPr algn="ctr"/>
-              <a:r>
-                <a:rPr sz="2400" b="1" dirty="0">
-                  <a:solidFill>
-                    <a:schemeClr val="tx1"/>
-                  </a:solidFill>
-                  <a:latin typeface="Times New Roman"/>
-                </a:rPr>
-                <a:t>Manipulability floor</a:t>
-              </a:r>
-            </a:p>
-            <a:p>
-              <a:pPr algn="ctr"/>
-              <a:r>
-                <a:rPr sz="1900" b="0" dirty="0">
-                  <a:solidFill>
-                    <a:schemeClr val="tx1"/>
-                  </a:solidFill>
-                  <a:latin typeface="Times New Roman"/>
-                </a:rPr>
-                <a:t>w = √det(JJᵀ)  below 0.06</a:t>
-              </a:r>
-            </a:p>
-            <a:p>
-              <a:pPr algn="ctr"/>
-              <a:r>
-                <a:rPr sz="1600" b="0" dirty="0">
-                  <a:solidFill>
-                    <a:schemeClr val="tx1"/>
-                  </a:solidFill>
-                  <a:latin typeface="Times New Roman"/>
-                </a:rPr>
-                <a:t>near-singular: arm loses a direction</a:t>
-              </a:r>
-            </a:p>
-          </p:txBody>
-        </p:sp>
-        <p:grpSp>
-          <p:nvGrpSpPr>
-            <p:cNvPr id="60" name="Group 59">
-              <a:extLst>
-                <a:ext uri="{FF2B5EF4-FFF2-40B4-BE49-F238E27FC236}">
-                  <a16:creationId xmlns:a16="http://schemas.microsoft.com/office/drawing/2014/main" id="{E6DFDB16-1706-7CED-61CE-0CC6A9A70885}"/>
-                </a:ext>
-              </a:extLst>
-            </p:cNvPr>
-            <p:cNvGrpSpPr/>
-            <p:nvPr/>
-          </p:nvGrpSpPr>
-          <p:grpSpPr>
-            <a:xfrm>
-              <a:off x="1171463" y="4772026"/>
-              <a:ext cx="16354537" cy="4645246"/>
-              <a:chOff x="1171463" y="4772026"/>
-              <a:chExt cx="16680552" cy="4645246"/>
-            </a:xfrm>
-          </p:grpSpPr>
-          <p:sp>
-            <p:nvSpPr>
-              <p:cNvPr id="39" name="Rounded Rectangle 4">
-                <a:extLst>
-                  <a:ext uri="{FF2B5EF4-FFF2-40B4-BE49-F238E27FC236}">
-                    <a16:creationId xmlns:a16="http://schemas.microsoft.com/office/drawing/2014/main" id="{80209C48-5E03-2EB8-EA0A-B46A5027791B}"/>
-                  </a:ext>
-                </a:extLst>
-              </p:cNvPr>
-              <p:cNvSpPr/>
-              <p:nvPr/>
-            </p:nvSpPr>
-            <p:spPr>
-              <a:xfrm>
-                <a:off x="1173946" y="6279458"/>
-                <a:ext cx="4845854" cy="1191428"/>
-              </a:xfrm>
-              <a:prstGeom prst="roundRect">
-                <a:avLst>
-                  <a:gd name="adj" fmla="val 10000"/>
-                </a:avLst>
-              </a:prstGeom>
-              <a:solidFill>
-                <a:schemeClr val="accent1">
-                  <a:lumMod val="20000"/>
-                  <a:lumOff val="80000"/>
-                </a:schemeClr>
-              </a:solidFill>
-              <a:ln w="15875">
-                <a:solidFill>
-                  <a:schemeClr val="tx1"/>
-                </a:solidFill>
-              </a:ln>
-              <a:effectLst/>
-            </p:spPr>
-            <p:style>
-              <a:lnRef idx="1">
-                <a:schemeClr val="accent1"/>
-              </a:lnRef>
-              <a:fillRef idx="3">
-                <a:schemeClr val="accent1"/>
-              </a:fillRef>
-              <a:effectRef idx="2">
-                <a:schemeClr val="accent1"/>
-              </a:effectRef>
-              <a:fontRef idx="minor">
-                <a:schemeClr val="lt1"/>
-              </a:fontRef>
-            </p:style>
-            <p:txBody>
-              <a:bodyPr wrap="square" lIns="128016" tIns="54864" rIns="128016" bIns="54864" rtlCol="0" anchor="ctr"/>
-              <a:lstStyle/>
-              <a:p>
-                <a:pPr algn="ctr"/>
-                <a:r>
-                  <a:rPr sz="2400" b="1" dirty="0">
-                    <a:solidFill>
-                      <a:schemeClr val="tx1"/>
-                    </a:solidFill>
-                    <a:latin typeface="Times New Roman"/>
-                  </a:rPr>
-                  <a:t>Joint-limit margin</a:t>
-                </a:r>
-              </a:p>
-              <a:p>
-                <a:pPr algn="ctr"/>
-                <a:r>
-                  <a:rPr sz="1900" b="0" dirty="0">
-                    <a:solidFill>
-                      <a:schemeClr val="tx1"/>
-                    </a:solidFill>
-                    <a:latin typeface="Times New Roman"/>
-                  </a:rPr>
-                  <a:t>clearance under 0.175 rad</a:t>
-                </a:r>
-              </a:p>
-              <a:p>
-                <a:pPr algn="ctr"/>
-                <a:r>
-                  <a:rPr sz="1600" b="0" dirty="0">
-                    <a:solidFill>
-                      <a:schemeClr val="tx1"/>
-                    </a:solidFill>
-                    <a:latin typeface="Times New Roman"/>
-                  </a:rPr>
-                  <a:t>joint approaching its mechanical stop</a:t>
-                </a:r>
-              </a:p>
-            </p:txBody>
-          </p:sp>
-          <p:sp>
-            <p:nvSpPr>
-              <p:cNvPr id="41" name="Rounded Rectangle 5">
-                <a:extLst>
-                  <a:ext uri="{FF2B5EF4-FFF2-40B4-BE49-F238E27FC236}">
-                    <a16:creationId xmlns:a16="http://schemas.microsoft.com/office/drawing/2014/main" id="{93486293-BAAE-062A-2E58-25395736AC2E}"/>
-                  </a:ext>
-                </a:extLst>
-              </p:cNvPr>
-              <p:cNvSpPr/>
-              <p:nvPr/>
-            </p:nvSpPr>
-            <p:spPr>
-              <a:xfrm>
-                <a:off x="1171463" y="8225844"/>
-                <a:ext cx="4845854" cy="1191428"/>
-              </a:xfrm>
-              <a:prstGeom prst="roundRect">
-                <a:avLst>
-                  <a:gd name="adj" fmla="val 10000"/>
-                </a:avLst>
-              </a:prstGeom>
-              <a:solidFill>
-                <a:schemeClr val="accent1">
-                  <a:lumMod val="20000"/>
-                  <a:lumOff val="80000"/>
-                </a:schemeClr>
-              </a:solidFill>
-              <a:ln w="15875">
-                <a:solidFill>
-                  <a:schemeClr val="tx1">
-                    <a:lumMod val="95000"/>
-                    <a:lumOff val="5000"/>
-                  </a:schemeClr>
-                </a:solidFill>
-              </a:ln>
-              <a:effectLst/>
-            </p:spPr>
-            <p:style>
-              <a:lnRef idx="1">
-                <a:schemeClr val="accent1"/>
-              </a:lnRef>
-              <a:fillRef idx="3">
-                <a:schemeClr val="accent1"/>
-              </a:fillRef>
-              <a:effectRef idx="2">
-                <a:schemeClr val="accent1"/>
-              </a:effectRef>
-              <a:fontRef idx="minor">
-                <a:schemeClr val="lt1"/>
-              </a:fontRef>
-            </p:style>
-            <p:txBody>
-              <a:bodyPr wrap="square" lIns="128016" tIns="54864" rIns="128016" bIns="54864" rtlCol="0" anchor="ctr"/>
-              <a:lstStyle/>
-              <a:p>
-                <a:pPr algn="ctr"/>
-                <a:r>
-                  <a:rPr sz="2400" b="1" dirty="0">
-                    <a:solidFill>
-                      <a:schemeClr val="tx1"/>
-                    </a:solidFill>
-                    <a:latin typeface="Times New Roman"/>
-                  </a:rPr>
-                  <a:t>Collision keep-out</a:t>
-                </a:r>
-              </a:p>
-              <a:p>
-                <a:pPr algn="ctr"/>
-                <a:r>
-                  <a:rPr sz="1900" b="0" dirty="0">
-                    <a:solidFill>
-                      <a:schemeClr val="tx1"/>
-                    </a:solidFill>
-                    <a:latin typeface="Times New Roman"/>
-                  </a:rPr>
-                  <a:t>link below 0.05 m</a:t>
-                </a:r>
-              </a:p>
-              <a:p>
-                <a:pPr algn="ctr"/>
-                <a:r>
-                  <a:rPr sz="1600" b="0" dirty="0">
-                    <a:solidFill>
-                      <a:schemeClr val="tx1"/>
-                    </a:solidFill>
-                    <a:latin typeface="Times New Roman"/>
-                  </a:rPr>
-                  <a:t>monitored, inactive in every run</a:t>
-                </a:r>
-              </a:p>
-            </p:txBody>
-          </p:sp>
-          <p:cxnSp>
-            <p:nvCxnSpPr>
-              <p:cNvPr id="46" name="Connector 9">
-                <a:extLst>
-                  <a:ext uri="{FF2B5EF4-FFF2-40B4-BE49-F238E27FC236}">
-                    <a16:creationId xmlns:a16="http://schemas.microsoft.com/office/drawing/2014/main" id="{314C70F3-22A7-BFED-9FB8-E4BFBD4C7842}"/>
-                  </a:ext>
-                </a:extLst>
-              </p:cNvPr>
-              <p:cNvCxnSpPr/>
-              <p:nvPr/>
-            </p:nvCxnSpPr>
-            <p:spPr>
-              <a:xfrm>
-                <a:off x="6032500" y="4772026"/>
-                <a:ext cx="1143000" cy="2057400"/>
-              </a:xfrm>
-              <a:prstGeom prst="bentConnector3">
-                <a:avLst/>
-              </a:prstGeom>
-              <a:ln w="22225">
-                <a:solidFill>
-                  <a:schemeClr val="tx1"/>
-                </a:solidFill>
-                <a:tailEnd type="triangle" w="med" len="med"/>
-              </a:ln>
-            </p:spPr>
-            <p:style>
-              <a:lnRef idx="2">
-                <a:schemeClr val="accent1"/>
-              </a:lnRef>
-              <a:fillRef idx="0">
-                <a:schemeClr val="accent1"/>
-              </a:fillRef>
-              <a:effectRef idx="1">
-                <a:schemeClr val="accent1"/>
-              </a:effectRef>
-              <a:fontRef idx="minor">
-                <a:schemeClr val="tx1"/>
-              </a:fontRef>
-            </p:style>
-          </p:cxnSp>
-          <p:cxnSp>
-            <p:nvCxnSpPr>
-              <p:cNvPr id="47" name="Connector 10">
-                <a:extLst>
-                  <a:ext uri="{FF2B5EF4-FFF2-40B4-BE49-F238E27FC236}">
-                    <a16:creationId xmlns:a16="http://schemas.microsoft.com/office/drawing/2014/main" id="{A4A8301D-E921-A6F7-CE4E-71B13F7F8936}"/>
-                  </a:ext>
-                </a:extLst>
-              </p:cNvPr>
-              <p:cNvCxnSpPr/>
-              <p:nvPr/>
-            </p:nvCxnSpPr>
-            <p:spPr>
-              <a:xfrm flipV="1">
-                <a:off x="6032500" y="6829426"/>
-                <a:ext cx="1143000" cy="0"/>
-              </a:xfrm>
-              <a:prstGeom prst="bentConnector3">
-                <a:avLst/>
-              </a:prstGeom>
-              <a:ln w="22225">
-                <a:solidFill>
-                  <a:schemeClr val="tx1"/>
-                </a:solidFill>
-                <a:tailEnd type="triangle" w="med" len="med"/>
-              </a:ln>
-            </p:spPr>
-            <p:style>
-              <a:lnRef idx="2">
-                <a:schemeClr val="accent1"/>
-              </a:lnRef>
-              <a:fillRef idx="0">
-                <a:schemeClr val="accent1"/>
-              </a:fillRef>
-              <a:effectRef idx="1">
-                <a:schemeClr val="accent1"/>
-              </a:effectRef>
-              <a:fontRef idx="minor">
-                <a:schemeClr val="tx1"/>
-              </a:fontRef>
-            </p:style>
-          </p:cxnSp>
-          <p:cxnSp>
-            <p:nvCxnSpPr>
-              <p:cNvPr id="48" name="Connector 11">
-                <a:extLst>
-                  <a:ext uri="{FF2B5EF4-FFF2-40B4-BE49-F238E27FC236}">
-                    <a16:creationId xmlns:a16="http://schemas.microsoft.com/office/drawing/2014/main" id="{B5104F4D-7293-4F05-2524-2BCFE4E231AE}"/>
-                  </a:ext>
-                </a:extLst>
-              </p:cNvPr>
-              <p:cNvCxnSpPr/>
-              <p:nvPr/>
-            </p:nvCxnSpPr>
-            <p:spPr>
-              <a:xfrm flipV="1">
-                <a:off x="6032500" y="6829426"/>
-                <a:ext cx="1143000" cy="2057400"/>
-              </a:xfrm>
-              <a:prstGeom prst="bentConnector3">
-                <a:avLst/>
-              </a:prstGeom>
-              <a:ln w="22225">
-                <a:solidFill>
-                  <a:schemeClr val="tx1"/>
-                </a:solidFill>
-                <a:tailEnd type="triangle" w="med" len="med"/>
-              </a:ln>
-            </p:spPr>
-            <p:style>
-              <a:lnRef idx="2">
-                <a:schemeClr val="accent1"/>
-              </a:lnRef>
-              <a:fillRef idx="0">
-                <a:schemeClr val="accent1"/>
-              </a:fillRef>
-              <a:effectRef idx="1">
-                <a:schemeClr val="accent1"/>
-              </a:effectRef>
-              <a:fontRef idx="minor">
-                <a:schemeClr val="tx1"/>
-              </a:fontRef>
-            </p:style>
-          </p:cxnSp>
-          <p:sp>
-            <p:nvSpPr>
-              <p:cNvPr id="49" name="Rounded Rectangle 6">
-                <a:extLst>
-                  <a:ext uri="{FF2B5EF4-FFF2-40B4-BE49-F238E27FC236}">
-                    <a16:creationId xmlns:a16="http://schemas.microsoft.com/office/drawing/2014/main" id="{58B4A15D-1408-BC02-A3F4-DB283DA3AA33}"/>
-                  </a:ext>
-                </a:extLst>
-              </p:cNvPr>
-              <p:cNvSpPr/>
-              <p:nvPr/>
-            </p:nvSpPr>
-            <p:spPr>
-              <a:xfrm>
-                <a:off x="7190683" y="6029326"/>
-                <a:ext cx="3200400" cy="1600200"/>
-              </a:xfrm>
-              <a:prstGeom prst="roundRect">
-                <a:avLst>
-                  <a:gd name="adj" fmla="val 10000"/>
-                </a:avLst>
-              </a:prstGeom>
-              <a:solidFill>
-                <a:schemeClr val="accent5">
-                  <a:lumMod val="20000"/>
-                  <a:lumOff val="80000"/>
-                </a:schemeClr>
-              </a:solidFill>
-              <a:ln w="15875">
-                <a:solidFill>
-                  <a:schemeClr val="tx1">
-                    <a:lumMod val="95000"/>
-                    <a:lumOff val="5000"/>
-                  </a:schemeClr>
-                </a:solidFill>
-              </a:ln>
-              <a:effectLst/>
-            </p:spPr>
-            <p:style>
-              <a:lnRef idx="1">
-                <a:schemeClr val="accent1"/>
-              </a:lnRef>
-              <a:fillRef idx="3">
-                <a:schemeClr val="accent1"/>
-              </a:fillRef>
-              <a:effectRef idx="2">
-                <a:schemeClr val="accent1"/>
-              </a:effectRef>
-              <a:fontRef idx="minor">
-                <a:schemeClr val="lt1"/>
-              </a:fontRef>
-            </p:style>
-            <p:txBody>
-              <a:bodyPr wrap="square" lIns="128016" tIns="54864" rIns="128016" bIns="54864" rtlCol="0" anchor="ctr"/>
-              <a:lstStyle/>
-              <a:p>
-                <a:pPr algn="ctr"/>
-                <a:r>
-                  <a:rPr sz="2800" b="1" dirty="0">
-                    <a:solidFill>
-                      <a:schemeClr val="tx1"/>
-                    </a:solidFill>
-                    <a:latin typeface="Times New Roman"/>
-                  </a:rPr>
-                  <a:t>Aggregate cost</a:t>
-                </a:r>
-              </a:p>
-              <a:p>
-                <a:pPr algn="ctr"/>
-                <a:r>
-                  <a:rPr sz="2000" b="0" dirty="0">
-                    <a:solidFill>
-                      <a:schemeClr val="tx1"/>
-                    </a:solidFill>
-                    <a:latin typeface="Times New Roman"/>
-                  </a:rPr>
-                  <a:t>c = sum of the three</a:t>
-                </a:r>
-              </a:p>
-              <a:p>
-                <a:pPr algn="ctr"/>
-                <a:r>
-                  <a:rPr b="0" dirty="0">
-                    <a:solidFill>
-                      <a:schemeClr val="tx1"/>
-                    </a:solidFill>
-                    <a:latin typeface="Times New Roman"/>
-                  </a:rPr>
-                  <a:t>one λ governs all</a:t>
-                </a:r>
-              </a:p>
-            </p:txBody>
-          </p:sp>
-          <p:sp>
-            <p:nvSpPr>
-              <p:cNvPr id="50" name="Rounded Rectangle 7">
-                <a:extLst>
-                  <a:ext uri="{FF2B5EF4-FFF2-40B4-BE49-F238E27FC236}">
-                    <a16:creationId xmlns:a16="http://schemas.microsoft.com/office/drawing/2014/main" id="{A2DD266C-AA7F-9414-3616-BFE1A8445320}"/>
-                  </a:ext>
-                </a:extLst>
-              </p:cNvPr>
-              <p:cNvSpPr/>
-              <p:nvPr/>
-            </p:nvSpPr>
-            <p:spPr>
-              <a:xfrm>
-                <a:off x="11396923" y="6029326"/>
-                <a:ext cx="3017520" cy="1600200"/>
-              </a:xfrm>
-              <a:prstGeom prst="roundRect">
-                <a:avLst>
-                  <a:gd name="adj" fmla="val 10000"/>
-                </a:avLst>
-              </a:prstGeom>
-              <a:solidFill>
-                <a:schemeClr val="accent5">
-                  <a:lumMod val="20000"/>
-                  <a:lumOff val="80000"/>
-                </a:schemeClr>
-              </a:solidFill>
-              <a:ln w="15875">
-                <a:solidFill>
-                  <a:schemeClr val="tx1">
-                    <a:lumMod val="95000"/>
-                    <a:lumOff val="5000"/>
-                  </a:schemeClr>
-                </a:solidFill>
-              </a:ln>
-              <a:effectLst/>
-            </p:spPr>
-            <p:style>
-              <a:lnRef idx="1">
-                <a:schemeClr val="accent1"/>
-              </a:lnRef>
-              <a:fillRef idx="3">
-                <a:schemeClr val="accent1"/>
-              </a:fillRef>
-              <a:effectRef idx="2">
-                <a:schemeClr val="accent1"/>
-              </a:effectRef>
-              <a:fontRef idx="minor">
-                <a:schemeClr val="lt1"/>
-              </a:fontRef>
-            </p:style>
-            <p:txBody>
-              <a:bodyPr wrap="square" lIns="128016" tIns="54864" rIns="128016" bIns="54864" rtlCol="0" anchor="ctr"/>
-              <a:lstStyle/>
-              <a:p>
-                <a:pPr algn="ctr"/>
-                <a:r>
-                  <a:rPr sz="2800" b="1" dirty="0">
-                    <a:solidFill>
-                      <a:schemeClr val="tx1"/>
-                    </a:solidFill>
-                    <a:latin typeface="Times New Roman"/>
-                  </a:rPr>
-                  <a:t>Episodic cost</a:t>
-                </a:r>
-              </a:p>
-              <a:p>
-                <a:pPr algn="ctr"/>
-                <a:r>
-                  <a:rPr sz="2000" b="0" dirty="0">
-                    <a:solidFill>
-                      <a:schemeClr val="tx1"/>
-                    </a:solidFill>
-                    <a:latin typeface="Times New Roman"/>
-                  </a:rPr>
-                  <a:t>undiscounted sum</a:t>
-                </a:r>
-              </a:p>
-              <a:p>
-                <a:pPr algn="ctr"/>
-                <a:r>
-                  <a:rPr b="0" dirty="0">
-                    <a:solidFill>
-                      <a:schemeClr val="tx1"/>
-                    </a:solidFill>
-                    <a:latin typeface="Times New Roman"/>
-                  </a:rPr>
-                  <a:t>over 250 steps</a:t>
-                </a:r>
-              </a:p>
-            </p:txBody>
-          </p:sp>
-          <p:sp>
-            <p:nvSpPr>
-              <p:cNvPr id="51" name="Rounded Rectangle 8">
-                <a:extLst>
-                  <a:ext uri="{FF2B5EF4-FFF2-40B4-BE49-F238E27FC236}">
-                    <a16:creationId xmlns:a16="http://schemas.microsoft.com/office/drawing/2014/main" id="{6E2C77B0-5827-8546-8EE7-99E1125FC651}"/>
-                  </a:ext>
-                </a:extLst>
-              </p:cNvPr>
-              <p:cNvSpPr/>
-              <p:nvPr/>
-            </p:nvSpPr>
-            <p:spPr>
-              <a:xfrm>
-                <a:off x="15420282" y="6029326"/>
-                <a:ext cx="2431733" cy="1600200"/>
-              </a:xfrm>
-              <a:prstGeom prst="roundRect">
-                <a:avLst>
-                  <a:gd name="adj" fmla="val 10000"/>
-                </a:avLst>
-              </a:prstGeom>
-              <a:solidFill>
-                <a:schemeClr val="accent5">
-                  <a:lumMod val="20000"/>
-                  <a:lumOff val="80000"/>
-                </a:schemeClr>
-              </a:solidFill>
-              <a:ln w="15875">
-                <a:solidFill>
-                  <a:schemeClr val="tx1">
-                    <a:lumMod val="95000"/>
-                    <a:lumOff val="5000"/>
-                  </a:schemeClr>
-                </a:solidFill>
-              </a:ln>
-              <a:effectLst/>
-            </p:spPr>
-            <p:style>
-              <a:lnRef idx="1">
-                <a:schemeClr val="accent1"/>
-              </a:lnRef>
-              <a:fillRef idx="3">
-                <a:schemeClr val="accent1"/>
-              </a:fillRef>
-              <a:effectRef idx="2">
-                <a:schemeClr val="accent1"/>
-              </a:effectRef>
-              <a:fontRef idx="minor">
-                <a:schemeClr val="lt1"/>
-              </a:fontRef>
-            </p:style>
-            <p:txBody>
-              <a:bodyPr wrap="square" lIns="128016" tIns="54864" rIns="128016" bIns="54864" rtlCol="0" anchor="ctr"/>
-              <a:lstStyle/>
-              <a:p>
-                <a:pPr algn="ctr"/>
-                <a:r>
-                  <a:rPr sz="2800" b="1" dirty="0">
-                    <a:solidFill>
-                      <a:schemeClr val="tx1"/>
-                    </a:solidFill>
-                    <a:latin typeface="Times New Roman"/>
-                  </a:rPr>
-                  <a:t>Budget</a:t>
-                </a:r>
-              </a:p>
-              <a:p>
-                <a:pPr algn="ctr"/>
-                <a:r>
-                  <a:rPr sz="2400" b="1" dirty="0">
-                    <a:solidFill>
-                      <a:schemeClr val="tx1"/>
-                    </a:solidFill>
-                    <a:latin typeface="Times New Roman"/>
-                  </a:rPr>
-                  <a:t>d = 25</a:t>
-                </a:r>
-              </a:p>
-              <a:p>
-                <a:pPr algn="ctr"/>
-                <a:r>
-                  <a:rPr sz="2400" b="1" dirty="0">
-                    <a:solidFill>
-                      <a:schemeClr val="tx1"/>
-                    </a:solidFill>
-                    <a:latin typeface="Times New Roman"/>
-                  </a:rPr>
-                  <a:t>or d = 15</a:t>
-                </a:r>
-              </a:p>
-            </p:txBody>
-          </p:sp>
-          <p:cxnSp>
-            <p:nvCxnSpPr>
-              <p:cNvPr id="52" name="Connector 12">
-                <a:extLst>
-                  <a:ext uri="{FF2B5EF4-FFF2-40B4-BE49-F238E27FC236}">
-                    <a16:creationId xmlns:a16="http://schemas.microsoft.com/office/drawing/2014/main" id="{6040B8B3-0235-1B43-B53A-3AA0F8A85578}"/>
-                  </a:ext>
-                </a:extLst>
-              </p:cNvPr>
-              <p:cNvCxnSpPr>
-                <a:stCxn id="49" idx="3"/>
-                <a:endCxn id="50" idx="1"/>
-              </p:cNvCxnSpPr>
-              <p:nvPr/>
-            </p:nvCxnSpPr>
-            <p:spPr>
-              <a:xfrm>
-                <a:off x="10391083" y="6829426"/>
-                <a:ext cx="1005840" cy="0"/>
-              </a:xfrm>
-              <a:prstGeom prst="line">
-                <a:avLst/>
-              </a:prstGeom>
-              <a:ln w="22225">
-                <a:solidFill>
-                  <a:schemeClr val="tx1"/>
-                </a:solidFill>
-                <a:tailEnd type="triangle" w="med" len="med"/>
-              </a:ln>
-            </p:spPr>
-            <p:style>
-              <a:lnRef idx="2">
-                <a:schemeClr val="accent1"/>
-              </a:lnRef>
-              <a:fillRef idx="0">
-                <a:schemeClr val="accent1"/>
-              </a:fillRef>
-              <a:effectRef idx="1">
-                <a:schemeClr val="accent1"/>
-              </a:effectRef>
-              <a:fontRef idx="minor">
-                <a:schemeClr val="tx1"/>
-              </a:fontRef>
-            </p:style>
-          </p:cxnSp>
-          <p:cxnSp>
-            <p:nvCxnSpPr>
-              <p:cNvPr id="53" name="Connector 13">
-                <a:extLst>
-                  <a:ext uri="{FF2B5EF4-FFF2-40B4-BE49-F238E27FC236}">
-                    <a16:creationId xmlns:a16="http://schemas.microsoft.com/office/drawing/2014/main" id="{385EFE4E-390A-769E-D18C-417A24137E3A}"/>
-                  </a:ext>
-                </a:extLst>
-              </p:cNvPr>
-              <p:cNvCxnSpPr>
-                <a:cxnSpLocks/>
-                <a:stCxn id="50" idx="3"/>
-                <a:endCxn id="51" idx="1"/>
-              </p:cNvCxnSpPr>
-              <p:nvPr/>
-            </p:nvCxnSpPr>
-            <p:spPr>
-              <a:xfrm>
-                <a:off x="14414443" y="6829426"/>
-                <a:ext cx="1005839" cy="0"/>
-              </a:xfrm>
-              <a:prstGeom prst="line">
-                <a:avLst/>
-              </a:prstGeom>
-              <a:ln w="22225">
-                <a:solidFill>
-                  <a:schemeClr val="tx1"/>
-                </a:solidFill>
-                <a:tailEnd type="triangle" w="med" len="med"/>
-              </a:ln>
-            </p:spPr>
-            <p:style>
-              <a:lnRef idx="2">
-                <a:schemeClr val="accent1"/>
-              </a:lnRef>
-              <a:fillRef idx="0">
-                <a:schemeClr val="accent1"/>
-              </a:fillRef>
-              <a:effectRef idx="1">
-                <a:schemeClr val="accent1"/>
-              </a:effectRef>
-              <a:fontRef idx="minor">
-                <a:schemeClr val="tx1"/>
-              </a:fontRef>
-            </p:style>
-          </p:cxnSp>
-        </p:grpSp>
-      </p:grpSp>
+          <a:prstGeom prst="rect">
+            <a:avLst/>
+          </a:prstGeom>
+          <a:noFill/>
+        </p:spPr>
+        <p:txBody>
+          <a:bodyPr wrap="square" rtlCol="0">
+            <a:spAutoFit/>
+          </a:bodyPr>
+          <a:lstStyle/>
+          <a:p>
+            <a:pPr marL="514350" indent="-514350">
+              <a:buFont typeface="Wingdings" panose="05000000000000000000" pitchFamily="2" charset="2"/>
+              <a:buChar char="§"/>
+            </a:pPr>
+            <a:r>
+              <a:rPr lang="en-FI" sz="3200" b="1" dirty="0">
+                <a:latin typeface="Times New Roman" panose="02020603050405020304" pitchFamily="18" charset="0"/>
+                <a:cs typeface="Times New Roman" panose="02020603050405020304" pitchFamily="18" charset="0"/>
+              </a:rPr>
+              <a:t>256 </a:t>
+            </a:r>
+            <a:r>
+              <a:rPr lang="en-FI" sz="3200" dirty="0">
+                <a:latin typeface="Times New Roman" panose="02020603050405020304" pitchFamily="18" charset="0"/>
+                <a:cs typeface="Times New Roman" panose="02020603050405020304" pitchFamily="18" charset="0"/>
+              </a:rPr>
+              <a:t>parallel robots</a:t>
+            </a:r>
+          </a:p>
+          <a:p>
+            <a:pPr marL="514350" indent="-514350">
+              <a:buFont typeface="Wingdings" panose="05000000000000000000" pitchFamily="2" charset="2"/>
+              <a:buChar char="§"/>
+            </a:pPr>
+            <a:endParaRPr lang="en-FI" sz="3200" dirty="0">
+              <a:latin typeface="Times New Roman" panose="02020603050405020304" pitchFamily="18" charset="0"/>
+              <a:cs typeface="Times New Roman" panose="02020603050405020304" pitchFamily="18" charset="0"/>
+            </a:endParaRPr>
+          </a:p>
+          <a:p>
+            <a:pPr marL="514350" indent="-514350">
+              <a:lnSpc>
+                <a:spcPct val="200000"/>
+              </a:lnSpc>
+              <a:buFont typeface="Wingdings" panose="05000000000000000000" pitchFamily="2" charset="2"/>
+              <a:buChar char="§"/>
+            </a:pPr>
+            <a:r>
+              <a:rPr lang="en-FI" sz="3200" dirty="0">
+                <a:latin typeface="Times New Roman" panose="02020603050405020304" pitchFamily="18" charset="0"/>
+                <a:cs typeface="Times New Roman" panose="02020603050405020304" pitchFamily="18" charset="0"/>
+              </a:rPr>
+              <a:t>1000 episodes per arm, </a:t>
+            </a:r>
+          </a:p>
+          <a:p>
+            <a:pPr lvl="1">
+              <a:lnSpc>
+                <a:spcPct val="200000"/>
+              </a:lnSpc>
+            </a:pPr>
+            <a:r>
+              <a:rPr lang="en-FI" sz="3200" dirty="0">
+                <a:latin typeface="Times New Roman" panose="02020603050405020304" pitchFamily="18" charset="0"/>
+                <a:cs typeface="Times New Roman" panose="02020603050405020304" pitchFamily="18" charset="0"/>
+              </a:rPr>
+              <a:t> total </a:t>
+            </a:r>
+            <a:r>
+              <a:rPr lang="en-FI" sz="3200" b="1" dirty="0">
+                <a:latin typeface="Times New Roman" panose="02020603050405020304" pitchFamily="18" charset="0"/>
+                <a:cs typeface="Times New Roman" panose="02020603050405020304" pitchFamily="18" charset="0"/>
+              </a:rPr>
+              <a:t>45,000 episodes</a:t>
+            </a:r>
+          </a:p>
+          <a:p>
+            <a:pPr marL="514350" indent="-514350">
+              <a:buFont typeface="Wingdings" panose="05000000000000000000" pitchFamily="2" charset="2"/>
+              <a:buChar char="§"/>
+            </a:pPr>
+            <a:endParaRPr lang="en-FI" sz="3200" dirty="0">
+              <a:latin typeface="Times New Roman" panose="02020603050405020304" pitchFamily="18" charset="0"/>
+              <a:cs typeface="Times New Roman" panose="02020603050405020304" pitchFamily="18" charset="0"/>
+            </a:endParaRPr>
+          </a:p>
+          <a:p>
+            <a:pPr marL="514350" indent="-514350">
+              <a:buFont typeface="Wingdings" panose="05000000000000000000" pitchFamily="2" charset="2"/>
+              <a:buChar char="§"/>
+            </a:pPr>
+            <a:r>
+              <a:rPr lang="en-FI" sz="3200" b="1" dirty="0">
+                <a:latin typeface="Times New Roman"/>
+                <a:cs typeface="Times New Roman" panose="02020603050405020304" pitchFamily="18" charset="0"/>
+              </a:rPr>
+              <a:t>3</a:t>
+            </a:r>
+            <a:r>
+              <a:rPr lang="en-FI" sz="3200" dirty="0">
+                <a:latin typeface="Times New Roman"/>
+                <a:cs typeface="Times New Roman" panose="02020603050405020304" pitchFamily="18" charset="0"/>
+              </a:rPr>
+              <a:t> different seeds (101, 102, 103)</a:t>
+            </a:r>
+            <a:endParaRPr lang="en-FI" sz="3200" dirty="0">
+              <a:latin typeface="Times New Roman" panose="02020603050405020304" pitchFamily="18" charset="0"/>
+              <a:cs typeface="Times New Roman" panose="02020603050405020304" pitchFamily="18" charset="0"/>
+            </a:endParaRPr>
+          </a:p>
+        </p:txBody>
+      </p:sp>
+      <p:sp>
+        <p:nvSpPr>
+          <p:cNvPr id="5" name="TextBox 4">
+            <a:extLst>
+              <a:ext uri="{FF2B5EF4-FFF2-40B4-BE49-F238E27FC236}">
+                <a16:creationId xmlns:a16="http://schemas.microsoft.com/office/drawing/2014/main" id="{3DBBBCB0-F945-4E2A-BB10-7DB62250E3EE}"/>
+              </a:ext>
+            </a:extLst>
+          </p:cNvPr>
+          <p:cNvSpPr txBox="1"/>
+          <p:nvPr/>
+        </p:nvSpPr>
+        <p:spPr>
+          <a:xfrm>
+            <a:off x="9393245" y="4085478"/>
+            <a:ext cx="6989755" cy="3450945"/>
+          </a:xfrm>
+          <a:prstGeom prst="rect">
+            <a:avLst/>
+          </a:prstGeom>
+          <a:noFill/>
+        </p:spPr>
+        <p:txBody>
+          <a:bodyPr wrap="square" rtlCol="0">
+            <a:spAutoFit/>
+          </a:bodyPr>
+          <a:lstStyle/>
+          <a:p>
+            <a:pPr marL="514350" indent="-514350">
+              <a:buFont typeface="Wingdings" panose="05000000000000000000" pitchFamily="2" charset="2"/>
+              <a:buChar char="§"/>
+            </a:pPr>
+            <a:r>
+              <a:rPr lang="en-GB" sz="3200" dirty="0">
+                <a:latin typeface="Times New Roman" panose="02020603050405020304" pitchFamily="18" charset="0"/>
+                <a:cs typeface="Times New Roman" panose="02020603050405020304" pitchFamily="18" charset="0"/>
+              </a:rPr>
+              <a:t>Collision keep-out</a:t>
+            </a:r>
+            <a:r>
+              <a:rPr lang="en-FI" sz="3200" dirty="0">
+                <a:latin typeface="Times New Roman" panose="02020603050405020304" pitchFamily="18" charset="0"/>
+                <a:cs typeface="Times New Roman" panose="02020603050405020304" pitchFamily="18" charset="0"/>
+              </a:rPr>
+              <a:t> -- </a:t>
+            </a:r>
+            <a:r>
+              <a:rPr lang="en-GB" sz="3200" dirty="0">
+                <a:latin typeface="Times New Roman" panose="02020603050405020304" pitchFamily="18" charset="0"/>
+                <a:cs typeface="Times New Roman" panose="02020603050405020304" pitchFamily="18" charset="0"/>
+              </a:rPr>
+              <a:t>5 cm above table</a:t>
+            </a:r>
+          </a:p>
+          <a:p>
+            <a:pPr marL="514350" indent="-514350">
+              <a:buFont typeface="Wingdings" panose="05000000000000000000" pitchFamily="2" charset="2"/>
+              <a:buChar char="§"/>
+            </a:pPr>
+            <a:endParaRPr lang="en-FI" sz="3200" dirty="0">
+              <a:latin typeface="Times New Roman" panose="02020603050405020304" pitchFamily="18" charset="0"/>
+              <a:cs typeface="Times New Roman" panose="02020603050405020304" pitchFamily="18" charset="0"/>
+            </a:endParaRPr>
+          </a:p>
+          <a:p>
+            <a:pPr marL="514350" indent="-514350">
+              <a:buFont typeface="Wingdings" panose="05000000000000000000" pitchFamily="2" charset="2"/>
+              <a:buChar char="§"/>
+            </a:pPr>
+            <a:r>
+              <a:rPr lang="en-GB" sz="3200" dirty="0">
+                <a:latin typeface="Times New Roman" panose="02020603050405020304" pitchFamily="18" charset="0"/>
+                <a:cs typeface="Times New Roman" panose="02020603050405020304" pitchFamily="18" charset="0"/>
+              </a:rPr>
+              <a:t>Joint-limit margin</a:t>
+            </a:r>
+            <a:r>
+              <a:rPr lang="en-FI" sz="3200" dirty="0">
+                <a:latin typeface="Times New Roman" panose="02020603050405020304" pitchFamily="18" charset="0"/>
+                <a:cs typeface="Times New Roman" panose="02020603050405020304" pitchFamily="18" charset="0"/>
+              </a:rPr>
+              <a:t> -- </a:t>
+            </a:r>
+            <a:r>
+              <a:rPr lang="en-GB" sz="3200" dirty="0">
+                <a:latin typeface="Times New Roman" panose="02020603050405020304" pitchFamily="18" charset="0"/>
+                <a:cs typeface="Times New Roman" panose="02020603050405020304" pitchFamily="18" charset="0"/>
+              </a:rPr>
+              <a:t>0.175 rad (10°)</a:t>
+            </a:r>
+          </a:p>
+          <a:p>
+            <a:pPr marL="514350" indent="-514350">
+              <a:buFont typeface="Wingdings" panose="05000000000000000000" pitchFamily="2" charset="2"/>
+              <a:buChar char="§"/>
+            </a:pPr>
+            <a:endParaRPr lang="en-FI" sz="3200" dirty="0">
+              <a:latin typeface="Times New Roman" panose="02020603050405020304" pitchFamily="18" charset="0"/>
+              <a:cs typeface="Times New Roman" panose="02020603050405020304" pitchFamily="18" charset="0"/>
+            </a:endParaRPr>
+          </a:p>
+          <a:p>
+            <a:pPr marL="514350" indent="-514350">
+              <a:lnSpc>
+                <a:spcPct val="150000"/>
+              </a:lnSpc>
+              <a:buFont typeface="Wingdings" panose="05000000000000000000" pitchFamily="2" charset="2"/>
+              <a:buChar char="§"/>
+            </a:pPr>
+            <a:r>
+              <a:rPr lang="en-GB" sz="3200" dirty="0">
+                <a:latin typeface="Times New Roman" panose="02020603050405020304" pitchFamily="18" charset="0"/>
+                <a:cs typeface="Times New Roman" panose="02020603050405020304" pitchFamily="18" charset="0"/>
+              </a:rPr>
+              <a:t>Singularity floor  w = √det(JJᵀ)</a:t>
+            </a:r>
+            <a:r>
+              <a:rPr lang="en-FI" sz="3200" dirty="0">
+                <a:latin typeface="Times New Roman" panose="02020603050405020304" pitchFamily="18" charset="0"/>
+                <a:cs typeface="Times New Roman" panose="02020603050405020304" pitchFamily="18" charset="0"/>
+              </a:rPr>
+              <a:t> --       </a:t>
+            </a:r>
+            <a:r>
+              <a:rPr lang="en-GB" sz="3200" dirty="0">
+                <a:latin typeface="Times New Roman" panose="02020603050405020304" pitchFamily="18" charset="0"/>
+                <a:cs typeface="Times New Roman" panose="02020603050405020304" pitchFamily="18" charset="0"/>
+              </a:rPr>
+              <a:t>w &lt; 0.06</a:t>
+            </a:r>
+          </a:p>
+        </p:txBody>
+      </p:sp>
     </p:spTree>
     <p:extLst>
       <p:ext uri="{BB962C8B-B14F-4D97-AF65-F5344CB8AC3E}">
-        <p14:creationId xmlns:p14="http://schemas.microsoft.com/office/powerpoint/2010/main" val="826378533"/>
+        <p14:creationId xmlns:p14="http://schemas.microsoft.com/office/powerpoint/2010/main" val="1488917347"/>
       </p:ext>
     </p:extLst>
   </p:cSld>
@@ -16716,12 +16785,12 @@
   </p:clrMapOvr>
   <mc:AlternateContent xmlns:mc="http://schemas.openxmlformats.org/markup-compatibility/2006">
     <mc:Choice xmlns:p159="http://schemas.microsoft.com/office/powerpoint/2015/09/main" Requires="p159">
-      <p:transition spd="med">
+      <p:transition xmlns:p14="http://schemas.microsoft.com/office/powerpoint/2010/main" spd="slow" p14:dur="1250">
         <p159:morph option="byObject"/>
       </p:transition>
     </mc:Choice>
     <mc:Fallback>
-      <p:transition spd="med">
+      <p:transition spd="slow">
         <p:fade/>
       </p:transition>
     </mc:Fallback>

--- a/Thesis_Documentation/Presentaion_slides/main_slide.pptx
+++ b/Thesis_Documentation/Presentaion_slides/main_slide.pptx
@@ -5,7 +5,7 @@
     <p:sldMasterId id="2147483648" r:id="rId1"/>
   </p:sldMasterIdLst>
   <p:notesMasterIdLst>
-    <p:notesMasterId r:id="rId21"/>
+    <p:notesMasterId r:id="rId22"/>
   </p:notesMasterIdLst>
   <p:sldIdLst>
     <p:sldId id="270" r:id="rId2"/>
@@ -25,16 +25,17 @@
     <p:sldId id="265" r:id="rId16"/>
     <p:sldId id="266" r:id="rId17"/>
     <p:sldId id="267" r:id="rId18"/>
-    <p:sldId id="268" r:id="rId19"/>
-    <p:sldId id="269" r:id="rId20"/>
+    <p:sldId id="269" r:id="rId19"/>
+    <p:sldId id="282" r:id="rId20"/>
+    <p:sldId id="283" r:id="rId21"/>
   </p:sldIdLst>
   <p:sldSz cx="18288000" cy="10287000"/>
   <p:notesSz cx="6858000" cy="9144000"/>
   <p:embeddedFontLst>
     <p:embeddedFont>
       <p:font typeface="Times New Roman Bold" panose="02020803070505020304" pitchFamily="18" charset="0"/>
-      <p:regular r:id="rId22"/>
-      <p:bold r:id="rId23"/>
+      <p:regular r:id="rId23"/>
+      <p:bold r:id="rId24"/>
     </p:embeddedFont>
   </p:embeddedFontLst>
   <p:defaultTextStyle>
@@ -678,10 +679,6 @@
           <a:bodyPr/>
           <a:lstStyle/>
           <a:p>
-            <a:fld id="{81CC1B71-5788-48EB-BCC5-A4EEB9E69422}" type="datetime1">
-              <a:rPr lang="en-US" smtClean="0"/>
-              <a:t>8/7/2026</a:t>
-            </a:fld>
             <a:endParaRPr lang="en-US"/>
           </a:p>
         </p:txBody>
@@ -842,10 +839,6 @@
           <a:bodyPr/>
           <a:lstStyle/>
           <a:p>
-            <a:fld id="{675AA47A-A65F-423E-96EC-786539C00F1E}" type="datetime1">
-              <a:rPr lang="en-US" smtClean="0"/>
-              <a:t>8/7/2026</a:t>
-            </a:fld>
             <a:endParaRPr lang="en-US"/>
           </a:p>
         </p:txBody>
@@ -1016,10 +1009,6 @@
           <a:bodyPr/>
           <a:lstStyle/>
           <a:p>
-            <a:fld id="{5E62AB71-EA7A-4ACE-BA5A-215301402B5A}" type="datetime1">
-              <a:rPr lang="en-US" smtClean="0"/>
-              <a:t>8/7/2026</a:t>
-            </a:fld>
             <a:endParaRPr lang="en-US"/>
           </a:p>
         </p:txBody>
@@ -1180,10 +1169,6 @@
           <a:bodyPr/>
           <a:lstStyle/>
           <a:p>
-            <a:fld id="{8D8C82BB-4737-4715-AB82-00EF233F749E}" type="datetime1">
-              <a:rPr lang="en-US" smtClean="0"/>
-              <a:t>8/7/2026</a:t>
-            </a:fld>
             <a:endParaRPr lang="en-US"/>
           </a:p>
         </p:txBody>
@@ -1421,10 +1406,6 @@
           <a:bodyPr/>
           <a:lstStyle/>
           <a:p>
-            <a:fld id="{1AAEAE89-510D-44DE-8FFC-A9BACA73B0BE}" type="datetime1">
-              <a:rPr lang="en-US" smtClean="0"/>
-              <a:t>8/7/2026</a:t>
-            </a:fld>
             <a:endParaRPr lang="en-US"/>
           </a:p>
         </p:txBody>
@@ -1702,10 +1683,6 @@
           <a:bodyPr/>
           <a:lstStyle/>
           <a:p>
-            <a:fld id="{80889779-A1AF-40D0-B702-EAAE24EDAE51}" type="datetime1">
-              <a:rPr lang="en-US" smtClean="0"/>
-              <a:t>8/7/2026</a:t>
-            </a:fld>
             <a:endParaRPr lang="en-US"/>
           </a:p>
         </p:txBody>
@@ -2117,10 +2094,6 @@
           <a:bodyPr/>
           <a:lstStyle/>
           <a:p>
-            <a:fld id="{C6F955D0-3A04-4D83-B84B-CC1126B4E0C8}" type="datetime1">
-              <a:rPr lang="en-US" smtClean="0"/>
-              <a:t>8/7/2026</a:t>
-            </a:fld>
             <a:endParaRPr lang="en-US"/>
           </a:p>
         </p:txBody>
@@ -2230,10 +2203,6 @@
           <a:bodyPr/>
           <a:lstStyle/>
           <a:p>
-            <a:fld id="{D96CCD82-3202-4C83-A2A0-104A2BD69AF5}" type="datetime1">
-              <a:rPr lang="en-US" smtClean="0"/>
-              <a:t>8/7/2026</a:t>
-            </a:fld>
             <a:endParaRPr lang="en-US"/>
           </a:p>
         </p:txBody>
@@ -2526,10 +2495,6 @@
           <a:bodyPr/>
           <a:lstStyle/>
           <a:p>
-            <a:fld id="{4DAB15B0-4424-44B5-8D73-AB7F7BEC1066}" type="datetime1">
-              <a:rPr lang="en-US" smtClean="0"/>
-              <a:t>8/7/2026</a:t>
-            </a:fld>
             <a:endParaRPr lang="en-US"/>
           </a:p>
         </p:txBody>
@@ -2774,10 +2739,6 @@
           <a:bodyPr/>
           <a:lstStyle/>
           <a:p>
-            <a:fld id="{176FA05C-0771-4E52-8A0A-F9B7F25B382F}" type="datetime1">
-              <a:rPr lang="en-US" smtClean="0"/>
-              <a:t>8/7/2026</a:t>
-            </a:fld>
             <a:endParaRPr lang="en-US"/>
           </a:p>
         </p:txBody>
@@ -2981,10 +2942,6 @@
             </a:lvl1pPr>
           </a:lstStyle>
           <a:p>
-            <a:fld id="{9E341256-5426-4061-837A-3B6336B9BC80}" type="datetime1">
-              <a:rPr lang="en-US" smtClean="0"/>
-              <a:t>8/7/2026</a:t>
-            </a:fld>
             <a:endParaRPr lang="en-US"/>
           </a:p>
         </p:txBody>
@@ -4535,9 +4492,9 @@
         <p:grpSpPr>
           <a:xfrm>
             <a:off x="1267953" y="4128154"/>
-            <a:ext cx="15752094" cy="5084200"/>
+            <a:ext cx="15877046" cy="5084200"/>
             <a:chOff x="1171463" y="4333072"/>
-            <a:chExt cx="16354537" cy="5084200"/>
+            <a:chExt cx="16484268" cy="5084200"/>
           </a:xfrm>
         </p:grpSpPr>
         <p:sp>
@@ -4595,7 +4552,7 @@
             <a:p>
               <a:pPr algn="ctr"/>
               <a:r>
-                <a:rPr sz="2400" b="1" dirty="0">
+                <a:rPr sz="3200" b="1" dirty="0">
                   <a:solidFill>
                     <a:schemeClr val="tx1"/>
                   </a:solidFill>
@@ -4607,25 +4564,13 @@
             <a:p>
               <a:pPr algn="ctr"/>
               <a:r>
-                <a:rPr sz="1900" b="0" dirty="0">
+                <a:rPr sz="2400" b="0" dirty="0">
                   <a:solidFill>
                     <a:schemeClr val="tx1"/>
                   </a:solidFill>
                   <a:latin typeface="Times New Roman"/>
                 </a:rPr>
                 <a:t>w = √det(JJᵀ)  below 0.06</a:t>
-              </a:r>
-            </a:p>
-            <a:p>
-              <a:pPr algn="ctr"/>
-              <a:r>
-                <a:rPr sz="1600" b="0" dirty="0">
-                  <a:solidFill>
-                    <a:schemeClr val="tx1"/>
-                  </a:solidFill>
-                  <a:latin typeface="Times New Roman"/>
-                </a:rPr>
-                <a:t>near-singular: arm loses a direction</a:t>
               </a:r>
             </a:p>
           </p:txBody>
@@ -4645,9 +4590,9 @@
           <p:grpSpPr>
             <a:xfrm>
               <a:off x="1171463" y="4772026"/>
-              <a:ext cx="16354537" cy="4645246"/>
+              <a:ext cx="16484268" cy="4645246"/>
               <a:chOff x="1171463" y="4772026"/>
-              <a:chExt cx="16680552" cy="4645246"/>
+              <a:chExt cx="16812869" cy="4645246"/>
             </a:xfrm>
           </p:grpSpPr>
           <p:sp>
@@ -4705,7 +4650,7 @@
               <a:p>
                 <a:pPr algn="ctr"/>
                 <a:r>
-                  <a:rPr sz="2400" b="1" dirty="0">
+                  <a:rPr sz="3200" b="1" dirty="0">
                     <a:solidFill>
                       <a:schemeClr val="tx1"/>
                     </a:solidFill>
@@ -4717,25 +4662,13 @@
               <a:p>
                 <a:pPr algn="ctr"/>
                 <a:r>
-                  <a:rPr sz="1900" b="0" dirty="0">
+                  <a:rPr sz="2400" b="0" dirty="0">
                     <a:solidFill>
                       <a:schemeClr val="tx1"/>
                     </a:solidFill>
                     <a:latin typeface="Times New Roman"/>
                   </a:rPr>
                   <a:t>clearance under 0.175 rad</a:t>
-                </a:r>
-              </a:p>
-              <a:p>
-                <a:pPr algn="ctr"/>
-                <a:r>
-                  <a:rPr sz="1600" b="0" dirty="0">
-                    <a:solidFill>
-                      <a:schemeClr val="tx1"/>
-                    </a:solidFill>
-                    <a:latin typeface="Times New Roman"/>
-                  </a:rPr>
-                  <a:t>joint approaching its mechanical stop</a:t>
                 </a:r>
               </a:p>
             </p:txBody>
@@ -4810,25 +4743,13 @@
               <a:p>
                 <a:pPr algn="ctr"/>
                 <a:r>
-                  <a:rPr sz="1900" b="0" dirty="0">
+                  <a:rPr sz="2400" b="0" dirty="0">
                     <a:solidFill>
                       <a:schemeClr val="tx1"/>
                     </a:solidFill>
                     <a:latin typeface="Times New Roman"/>
                   </a:rPr>
                   <a:t>link below 0.05 m</a:t>
-                </a:r>
-              </a:p>
-              <a:p>
-                <a:pPr algn="ctr"/>
-                <a:r>
-                  <a:rPr sz="1600" b="0" dirty="0">
-                    <a:solidFill>
-                      <a:schemeClr val="tx1"/>
-                    </a:solidFill>
-                    <a:latin typeface="Times New Roman"/>
-                  </a:rPr>
-                  <a:t>monitored, inactive in every run</a:t>
                 </a:r>
               </a:p>
             </p:txBody>
@@ -5159,8 +5080,8 @@
             </p:nvSpPr>
             <p:spPr>
               <a:xfrm>
-                <a:off x="15420282" y="6029326"/>
-                <a:ext cx="2431733" cy="1600200"/>
+                <a:off x="15420281" y="6029326"/>
+                <a:ext cx="2564051" cy="1600200"/>
               </a:xfrm>
               <a:prstGeom prst="roundRect">
                 <a:avLst>
@@ -5215,7 +5136,7 @@
               <a:p>
                 <a:pPr algn="ctr"/>
                 <a:r>
-                  <a:rPr sz="2400" b="1" dirty="0">
+                  <a:rPr sz="2400" dirty="0">
                     <a:solidFill>
                       <a:schemeClr val="tx1"/>
                     </a:solidFill>
@@ -5227,7 +5148,7 @@
               <a:p>
                 <a:pPr algn="ctr"/>
                 <a:r>
-                  <a:rPr sz="2400" b="1" dirty="0">
+                  <a:rPr sz="2400" dirty="0">
                     <a:solidFill>
                       <a:schemeClr val="tx1"/>
                     </a:solidFill>
@@ -5302,7 +5223,7 @@
             <p:spPr>
               <a:xfrm>
                 <a:off x="14414443" y="6829426"/>
-                <a:ext cx="1005839" cy="0"/>
+                <a:ext cx="1005838" cy="0"/>
               </a:xfrm>
               <a:prstGeom prst="line">
                 <a:avLst/>
@@ -5331,6 +5252,48 @@
           </p:cxnSp>
         </p:grpSp>
       </p:grpSp>
+      <p:sp>
+        <p:nvSpPr>
+          <p:cNvPr id="9" name="TextBox 8">
+            <a:extLst>
+              <a:ext uri="{FF2B5EF4-FFF2-40B4-BE49-F238E27FC236}">
+                <a16:creationId xmlns:a16="http://schemas.microsoft.com/office/drawing/2014/main" id="{A0D01EB7-DFEA-3E18-4B7B-8217863F0E95}"/>
+              </a:ext>
+            </a:extLst>
+          </p:cNvPr>
+          <p:cNvSpPr txBox="1"/>
+          <p:nvPr/>
+        </p:nvSpPr>
+        <p:spPr>
+          <a:xfrm>
+            <a:off x="17373600" y="9563100"/>
+            <a:ext cx="441146" cy="400110"/>
+          </a:xfrm>
+          <a:prstGeom prst="rect">
+            <a:avLst/>
+          </a:prstGeom>
+          <a:noFill/>
+        </p:spPr>
+        <p:txBody>
+          <a:bodyPr wrap="none" rtlCol="0">
+            <a:spAutoFit/>
+          </a:bodyPr>
+          <a:lstStyle/>
+          <a:p>
+            <a:r>
+              <a:rPr lang="en-FI" sz="2000" dirty="0">
+                <a:latin typeface="Times New Roman" panose="02020603050405020304" pitchFamily="18" charset="0"/>
+                <a:cs typeface="Times New Roman" panose="02020603050405020304" pitchFamily="18" charset="0"/>
+              </a:rPr>
+              <a:t>10</a:t>
+            </a:r>
+            <a:endParaRPr lang="en-GB" sz="2000" dirty="0">
+              <a:latin typeface="Times New Roman" panose="02020603050405020304" pitchFamily="18" charset="0"/>
+              <a:cs typeface="Times New Roman" panose="02020603050405020304" pitchFamily="18" charset="0"/>
+            </a:endParaRPr>
+          </a:p>
+        </p:txBody>
+      </p:sp>
     </p:spTree>
     <p:extLst>
       <p:ext uri="{BB962C8B-B14F-4D97-AF65-F5344CB8AC3E}">
@@ -6161,6 +6124,48 @@
           </a:p>
         </p:txBody>
       </p:sp>
+      <p:sp>
+        <p:nvSpPr>
+          <p:cNvPr id="7" name="TextBox 6">
+            <a:extLst>
+              <a:ext uri="{FF2B5EF4-FFF2-40B4-BE49-F238E27FC236}">
+                <a16:creationId xmlns:a16="http://schemas.microsoft.com/office/drawing/2014/main" id="{BB0DC1A2-690B-025D-9FF0-CC00829B7D7F}"/>
+              </a:ext>
+            </a:extLst>
+          </p:cNvPr>
+          <p:cNvSpPr txBox="1"/>
+          <p:nvPr/>
+        </p:nvSpPr>
+        <p:spPr>
+          <a:xfrm>
+            <a:off x="17373600" y="9563100"/>
+            <a:ext cx="431657" cy="400110"/>
+          </a:xfrm>
+          <a:prstGeom prst="rect">
+            <a:avLst/>
+          </a:prstGeom>
+          <a:noFill/>
+        </p:spPr>
+        <p:txBody>
+          <a:bodyPr wrap="none" rtlCol="0">
+            <a:spAutoFit/>
+          </a:bodyPr>
+          <a:lstStyle/>
+          <a:p>
+            <a:r>
+              <a:rPr lang="en-FI" sz="2000" dirty="0">
+                <a:latin typeface="Times New Roman" panose="02020603050405020304" pitchFamily="18" charset="0"/>
+                <a:cs typeface="Times New Roman" panose="02020603050405020304" pitchFamily="18" charset="0"/>
+              </a:rPr>
+              <a:t>11</a:t>
+            </a:r>
+            <a:endParaRPr lang="en-GB" sz="2000" dirty="0">
+              <a:latin typeface="Times New Roman" panose="02020603050405020304" pitchFamily="18" charset="0"/>
+              <a:cs typeface="Times New Roman" panose="02020603050405020304" pitchFamily="18" charset="0"/>
+            </a:endParaRPr>
+          </a:p>
+        </p:txBody>
+      </p:sp>
     </p:spTree>
     <p:extLst>
       <p:ext uri="{BB962C8B-B14F-4D97-AF65-F5344CB8AC3E}">
@@ -7083,6 +7088,48 @@
           </a:p>
         </p:txBody>
       </p:sp>
+      <p:sp>
+        <p:nvSpPr>
+          <p:cNvPr id="5" name="TextBox 4">
+            <a:extLst>
+              <a:ext uri="{FF2B5EF4-FFF2-40B4-BE49-F238E27FC236}">
+                <a16:creationId xmlns:a16="http://schemas.microsoft.com/office/drawing/2014/main" id="{D7494AB2-EF0B-6EBE-6985-8620F6AAAC09}"/>
+              </a:ext>
+            </a:extLst>
+          </p:cNvPr>
+          <p:cNvSpPr txBox="1"/>
+          <p:nvPr/>
+        </p:nvSpPr>
+        <p:spPr>
+          <a:xfrm>
+            <a:off x="17373600" y="9563100"/>
+            <a:ext cx="441146" cy="400110"/>
+          </a:xfrm>
+          <a:prstGeom prst="rect">
+            <a:avLst/>
+          </a:prstGeom>
+          <a:noFill/>
+        </p:spPr>
+        <p:txBody>
+          <a:bodyPr wrap="none" rtlCol="0">
+            <a:spAutoFit/>
+          </a:bodyPr>
+          <a:lstStyle/>
+          <a:p>
+            <a:r>
+              <a:rPr lang="en-FI" sz="2000" dirty="0">
+                <a:latin typeface="Times New Roman" panose="02020603050405020304" pitchFamily="18" charset="0"/>
+                <a:cs typeface="Times New Roman" panose="02020603050405020304" pitchFamily="18" charset="0"/>
+              </a:rPr>
+              <a:t>12</a:t>
+            </a:r>
+            <a:endParaRPr lang="en-GB" sz="2000" dirty="0">
+              <a:latin typeface="Times New Roman" panose="02020603050405020304" pitchFamily="18" charset="0"/>
+              <a:cs typeface="Times New Roman" panose="02020603050405020304" pitchFamily="18" charset="0"/>
+            </a:endParaRPr>
+          </a:p>
+        </p:txBody>
+      </p:sp>
     </p:spTree>
   </p:cSld>
   <p:clrMapOvr>
@@ -7168,6 +7215,78 @@
                       </p:childTnLst>
                     </p:cTn>
                   </p:par>
+                  <p:par>
+                    <p:cTn id="9" fill="hold">
+                      <p:stCondLst>
+                        <p:cond delay="indefinite"/>
+                      </p:stCondLst>
+                      <p:childTnLst>
+                        <p:par>
+                          <p:cTn id="10" fill="hold">
+                            <p:stCondLst>
+                              <p:cond delay="0"/>
+                            </p:stCondLst>
+                            <p:childTnLst>
+                              <p:par>
+                                <p:cTn id="11" presetID="1" presetClass="entr" presetSubtype="0" fill="hold" nodeType="clickEffect">
+                                  <p:stCondLst>
+                                    <p:cond delay="0"/>
+                                  </p:stCondLst>
+                                  <p:childTnLst>
+                                    <p:set>
+                                      <p:cBhvr>
+                                        <p:cTn id="12" dur="1" fill="hold">
+                                          <p:stCondLst>
+                                            <p:cond delay="0"/>
+                                          </p:stCondLst>
+                                        </p:cTn>
+                                        <p:tgtEl>
+                                          <p:spTgt spid="2"/>
+                                        </p:tgtEl>
+                                        <p:attrNameLst>
+                                          <p:attrName>style.visibility</p:attrName>
+                                        </p:attrNameLst>
+                                      </p:cBhvr>
+                                      <p:to>
+                                        <p:strVal val="visible"/>
+                                      </p:to>
+                                    </p:set>
+                                  </p:childTnLst>
+                                </p:cTn>
+                              </p:par>
+                              <p:par>
+                                <p:cTn id="13" presetID="1" presetClass="entr" presetSubtype="0" fill="hold" grpId="0" nodeType="withEffect">
+                                  <p:stCondLst>
+                                    <p:cond delay="0"/>
+                                  </p:stCondLst>
+                                  <p:childTnLst>
+                                    <p:set>
+                                      <p:cBhvr>
+                                        <p:cTn id="14" dur="1" fill="hold">
+                                          <p:stCondLst>
+                                            <p:cond delay="0"/>
+                                          </p:stCondLst>
+                                        </p:cTn>
+                                        <p:tgtEl>
+                                          <p:spTgt spid="14"/>
+                                        </p:tgtEl>
+                                        <p:attrNameLst>
+                                          <p:attrName>style.visibility</p:attrName>
+                                        </p:attrNameLst>
+                                      </p:cBhvr>
+                                      <p:to>
+                                        <p:strVal val="visible"/>
+                                      </p:to>
+                                    </p:set>
+                                  </p:childTnLst>
+                                </p:cTn>
+                              </p:par>
+                            </p:childTnLst>
+                          </p:cTn>
+                        </p:par>
+                      </p:childTnLst>
+                    </p:cTn>
+                  </p:par>
                 </p:childTnLst>
               </p:cTn>
               <p:prevCondLst>
@@ -7192,6 +7311,7 @@
     <p:bldLst>
       <p:bldP spid="22" grpId="0"/>
       <p:bldP spid="24" grpId="0"/>
+      <p:bldP spid="14" grpId="0" animBg="1"/>
     </p:bldLst>
   </p:timing>
 </p:sld>
@@ -9441,6 +9561,48 @@
           </p:txBody>
         </p:sp>
       </p:grpSp>
+      <p:sp>
+        <p:nvSpPr>
+          <p:cNvPr id="55" name="TextBox 54">
+            <a:extLst>
+              <a:ext uri="{FF2B5EF4-FFF2-40B4-BE49-F238E27FC236}">
+                <a16:creationId xmlns:a16="http://schemas.microsoft.com/office/drawing/2014/main" id="{841C56CF-CC8D-43F6-33C7-EBFE1A252436}"/>
+              </a:ext>
+            </a:extLst>
+          </p:cNvPr>
+          <p:cNvSpPr txBox="1"/>
+          <p:nvPr/>
+        </p:nvSpPr>
+        <p:spPr>
+          <a:xfrm>
+            <a:off x="17373600" y="9563100"/>
+            <a:ext cx="441146" cy="400110"/>
+          </a:xfrm>
+          <a:prstGeom prst="rect">
+            <a:avLst/>
+          </a:prstGeom>
+          <a:noFill/>
+        </p:spPr>
+        <p:txBody>
+          <a:bodyPr wrap="none" rtlCol="0">
+            <a:spAutoFit/>
+          </a:bodyPr>
+          <a:lstStyle/>
+          <a:p>
+            <a:r>
+              <a:rPr lang="en-FI" sz="2000" dirty="0">
+                <a:latin typeface="Times New Roman" panose="02020603050405020304" pitchFamily="18" charset="0"/>
+                <a:cs typeface="Times New Roman" panose="02020603050405020304" pitchFamily="18" charset="0"/>
+              </a:rPr>
+              <a:t>13</a:t>
+            </a:r>
+            <a:endParaRPr lang="en-GB" sz="2000" dirty="0">
+              <a:latin typeface="Times New Roman" panose="02020603050405020304" pitchFamily="18" charset="0"/>
+              <a:cs typeface="Times New Roman" panose="02020603050405020304" pitchFamily="18" charset="0"/>
+            </a:endParaRPr>
+          </a:p>
+        </p:txBody>
+      </p:sp>
     </p:spTree>
   </p:cSld>
   <p:clrMapOvr>
@@ -9556,7 +9718,7 @@
         </p:nvSpPr>
         <p:spPr>
           <a:xfrm>
-            <a:off x="1028700" y="3140293"/>
+            <a:off x="604297" y="2830730"/>
             <a:ext cx="17079405" cy="13613709"/>
           </a:xfrm>
           <a:custGeom>
@@ -9651,6 +9813,48 @@
               </a:rPr>
               <a:t>Constraining the policy did not cost task performance at either budget.</a:t>
             </a:r>
+          </a:p>
+        </p:txBody>
+      </p:sp>
+      <p:sp>
+        <p:nvSpPr>
+          <p:cNvPr id="7" name="TextBox 6">
+            <a:extLst>
+              <a:ext uri="{FF2B5EF4-FFF2-40B4-BE49-F238E27FC236}">
+                <a16:creationId xmlns:a16="http://schemas.microsoft.com/office/drawing/2014/main" id="{CFCDE766-3ABA-3AB4-DCE2-2FBD7E308EC9}"/>
+              </a:ext>
+            </a:extLst>
+          </p:cNvPr>
+          <p:cNvSpPr txBox="1"/>
+          <p:nvPr/>
+        </p:nvSpPr>
+        <p:spPr>
+          <a:xfrm>
+            <a:off x="17373600" y="9563100"/>
+            <a:ext cx="441146" cy="400110"/>
+          </a:xfrm>
+          <a:prstGeom prst="rect">
+            <a:avLst/>
+          </a:prstGeom>
+          <a:noFill/>
+        </p:spPr>
+        <p:txBody>
+          <a:bodyPr wrap="none" rtlCol="0">
+            <a:spAutoFit/>
+          </a:bodyPr>
+          <a:lstStyle/>
+          <a:p>
+            <a:r>
+              <a:rPr lang="en-FI" sz="2000" dirty="0">
+                <a:latin typeface="Times New Roman" panose="02020603050405020304" pitchFamily="18" charset="0"/>
+                <a:cs typeface="Times New Roman" panose="02020603050405020304" pitchFamily="18" charset="0"/>
+              </a:rPr>
+              <a:t>14</a:t>
+            </a:r>
+            <a:endParaRPr lang="en-GB" sz="2000" dirty="0">
+              <a:latin typeface="Times New Roman" panose="02020603050405020304" pitchFamily="18" charset="0"/>
+              <a:cs typeface="Times New Roman" panose="02020603050405020304" pitchFamily="18" charset="0"/>
+            </a:endParaRPr>
           </a:p>
         </p:txBody>
       </p:sp>
@@ -9819,6 +10023,48 @@
               <a:ea typeface="Times New Roman Bold"/>
               <a:cs typeface="Times New Roman Bold"/>
               <a:sym typeface="Times New Roman Bold"/>
+            </a:endParaRPr>
+          </a:p>
+        </p:txBody>
+      </p:sp>
+      <p:sp>
+        <p:nvSpPr>
+          <p:cNvPr id="6" name="TextBox 5">
+            <a:extLst>
+              <a:ext uri="{FF2B5EF4-FFF2-40B4-BE49-F238E27FC236}">
+                <a16:creationId xmlns:a16="http://schemas.microsoft.com/office/drawing/2014/main" id="{B0C0A5F0-504E-B75A-61F9-48723F9A667F}"/>
+              </a:ext>
+            </a:extLst>
+          </p:cNvPr>
+          <p:cNvSpPr txBox="1"/>
+          <p:nvPr/>
+        </p:nvSpPr>
+        <p:spPr>
+          <a:xfrm>
+            <a:off x="17373600" y="9563100"/>
+            <a:ext cx="441146" cy="400110"/>
+          </a:xfrm>
+          <a:prstGeom prst="rect">
+            <a:avLst/>
+          </a:prstGeom>
+          <a:noFill/>
+        </p:spPr>
+        <p:txBody>
+          <a:bodyPr wrap="none" rtlCol="0">
+            <a:spAutoFit/>
+          </a:bodyPr>
+          <a:lstStyle/>
+          <a:p>
+            <a:r>
+              <a:rPr lang="en-FI" sz="2000" dirty="0">
+                <a:latin typeface="Times New Roman" panose="02020603050405020304" pitchFamily="18" charset="0"/>
+                <a:cs typeface="Times New Roman" panose="02020603050405020304" pitchFamily="18" charset="0"/>
+              </a:rPr>
+              <a:t>15</a:t>
+            </a:r>
+            <a:endParaRPr lang="en-GB" sz="2000" dirty="0">
+              <a:latin typeface="Times New Roman" panose="02020603050405020304" pitchFamily="18" charset="0"/>
+              <a:cs typeface="Times New Roman" panose="02020603050405020304" pitchFamily="18" charset="0"/>
             </a:endParaRPr>
           </a:p>
         </p:txBody>
@@ -10244,6 +10490,48 @@
           </p:txBody>
         </p:sp>
       </p:grpSp>
+      <p:sp>
+        <p:nvSpPr>
+          <p:cNvPr id="10" name="TextBox 9">
+            <a:extLst>
+              <a:ext uri="{FF2B5EF4-FFF2-40B4-BE49-F238E27FC236}">
+                <a16:creationId xmlns:a16="http://schemas.microsoft.com/office/drawing/2014/main" id="{BAABE1F7-AC7F-C3F1-EC5E-EE963C3BF803}"/>
+              </a:ext>
+            </a:extLst>
+          </p:cNvPr>
+          <p:cNvSpPr txBox="1"/>
+          <p:nvPr/>
+        </p:nvSpPr>
+        <p:spPr>
+          <a:xfrm>
+            <a:off x="17373600" y="9563100"/>
+            <a:ext cx="441146" cy="400110"/>
+          </a:xfrm>
+          <a:prstGeom prst="rect">
+            <a:avLst/>
+          </a:prstGeom>
+          <a:noFill/>
+        </p:spPr>
+        <p:txBody>
+          <a:bodyPr wrap="none" rtlCol="0">
+            <a:spAutoFit/>
+          </a:bodyPr>
+          <a:lstStyle/>
+          <a:p>
+            <a:r>
+              <a:rPr lang="en-FI" sz="2000" dirty="0">
+                <a:latin typeface="Times New Roman" panose="02020603050405020304" pitchFamily="18" charset="0"/>
+                <a:cs typeface="Times New Roman" panose="02020603050405020304" pitchFamily="18" charset="0"/>
+              </a:rPr>
+              <a:t>16</a:t>
+            </a:r>
+            <a:endParaRPr lang="en-GB" sz="2000" dirty="0">
+              <a:latin typeface="Times New Roman" panose="02020603050405020304" pitchFamily="18" charset="0"/>
+              <a:cs typeface="Times New Roman" panose="02020603050405020304" pitchFamily="18" charset="0"/>
+            </a:endParaRPr>
+          </a:p>
+        </p:txBody>
+      </p:sp>
     </p:spTree>
   </p:cSld>
   <p:clrMapOvr>
@@ -10768,220 +11056,44 @@
           </a:p>
         </p:txBody>
       </p:sp>
-    </p:spTree>
-  </p:cSld>
-  <p:clrMapOvr>
-    <a:masterClrMapping/>
-  </p:clrMapOvr>
-</p:sld>
-</file>
-
-<file path=ppt/slides/slide18.xml><?xml version="1.0" encoding="utf-8"?>
-<p:sld xmlns:a="http://schemas.openxmlformats.org/drawingml/2006/main" xmlns:r="http://schemas.openxmlformats.org/officeDocument/2006/relationships" xmlns:p="http://schemas.openxmlformats.org/presentationml/2006/main">
-  <p:cSld>
-    <p:spTree>
-      <p:nvGrpSpPr>
-        <p:cNvPr id="1" name=""/>
-        <p:cNvGrpSpPr/>
-        <p:nvPr/>
-      </p:nvGrpSpPr>
-      <p:grpSpPr>
-        <a:xfrm>
-          <a:off x="0" y="0"/>
-          <a:ext cx="0" cy="0"/>
-          <a:chOff x="0" y="0"/>
-          <a:chExt cx="0" cy="0"/>
-        </a:xfrm>
-      </p:grpSpPr>
       <p:sp>
         <p:nvSpPr>
-          <p:cNvPr id="2" name="TextBox 2"/>
+          <p:cNvPr id="5" name="TextBox 4">
+            <a:extLst>
+              <a:ext uri="{FF2B5EF4-FFF2-40B4-BE49-F238E27FC236}">
+                <a16:creationId xmlns:a16="http://schemas.microsoft.com/office/drawing/2014/main" id="{22354D64-D4CA-FABD-2676-0A226362DF58}"/>
+              </a:ext>
+            </a:extLst>
+          </p:cNvPr>
           <p:cNvSpPr txBox="1"/>
           <p:nvPr/>
         </p:nvSpPr>
         <p:spPr>
           <a:xfrm>
-            <a:off x="914400" y="674665"/>
-            <a:ext cx="4191000" cy="658835"/>
+            <a:off x="17373600" y="9563100"/>
+            <a:ext cx="441146" cy="400110"/>
           </a:xfrm>
           <a:prstGeom prst="rect">
             <a:avLst/>
           </a:prstGeom>
+          <a:noFill/>
         </p:spPr>
         <p:txBody>
-          <a:bodyPr wrap="square" lIns="0" tIns="0" rIns="0" bIns="0" rtlCol="0" anchor="t">
+          <a:bodyPr wrap="none" rtlCol="0">
             <a:spAutoFit/>
           </a:bodyPr>
           <a:lstStyle/>
           <a:p>
-            <a:pPr algn="ctr">
-              <a:lnSpc>
-                <a:spcPts val="5599"/>
-              </a:lnSpc>
-            </a:pPr>
-            <a:r>
-              <a:rPr lang="en-US" sz="3999" b="1" dirty="0">
-                <a:solidFill>
-                  <a:srgbClr val="000000"/>
-                </a:solidFill>
-                <a:latin typeface="Times New Roman Bold"/>
-                <a:ea typeface="Times New Roman Bold"/>
-                <a:cs typeface="Times New Roman Bold"/>
-                <a:sym typeface="Times New Roman Bold"/>
+            <a:r>
+              <a:rPr lang="en-FI" sz="2000" dirty="0">
+                <a:latin typeface="Times New Roman" panose="02020603050405020304" pitchFamily="18" charset="0"/>
+                <a:cs typeface="Times New Roman" panose="02020603050405020304" pitchFamily="18" charset="0"/>
               </a:rPr>
-              <a:t>Key Resources:</a:t>
-            </a:r>
-          </a:p>
-        </p:txBody>
-      </p:sp>
-      <p:sp>
-        <p:nvSpPr>
-          <p:cNvPr id="3" name="TextBox 3"/>
-          <p:cNvSpPr txBox="1"/>
-          <p:nvPr/>
-        </p:nvSpPr>
-        <p:spPr>
-          <a:xfrm>
-            <a:off x="1028700" y="1620002"/>
-            <a:ext cx="16230600" cy="7858553"/>
-          </a:xfrm>
-          <a:prstGeom prst="rect">
-            <a:avLst/>
-          </a:prstGeom>
-        </p:spPr>
-        <p:txBody>
-          <a:bodyPr lIns="0" tIns="0" rIns="0" bIns="0" rtlCol="0" anchor="t">
-            <a:spAutoFit/>
-          </a:bodyPr>
-          <a:lstStyle/>
-          <a:p>
-            <a:pPr algn="l">
-              <a:lnSpc>
-                <a:spcPts val="5249"/>
-              </a:lnSpc>
-            </a:pPr>
-            <a:r>
-              <a:rPr lang="en-US" sz="2999">
-                <a:solidFill>
-                  <a:srgbClr val="000000"/>
-                </a:solidFill>
-                <a:latin typeface="Times New Roman"/>
-                <a:ea typeface="Times New Roman"/>
-                <a:cs typeface="Times New Roman"/>
-                <a:sym typeface="Times New Roman"/>
-              </a:rPr>
-              <a:t>[10] Ferreira, H. C. &amp; Barbosa, R. S. (2025). Deep RL for Adaptive Robotic Grasping in Simulated Dynamic Environments. Future Internet, 17(10).</a:t>
-            </a:r>
-          </a:p>
-          <a:p>
-            <a:pPr algn="l">
-              <a:lnSpc>
-                <a:spcPts val="5249"/>
-              </a:lnSpc>
-            </a:pPr>
-            <a:r>
-              <a:rPr lang="en-US" sz="2999">
-                <a:solidFill>
-                  <a:srgbClr val="000000"/>
-                </a:solidFill>
-                <a:latin typeface="Times New Roman"/>
-                <a:ea typeface="Times New Roman"/>
-                <a:cs typeface="Times New Roman"/>
-                <a:sym typeface="Times New Roman"/>
-              </a:rPr>
-              <a:t>[11] Shahid, A. A. et al. (2022). Continuous Control Actions Learning and Adaptation for Robotic Manipulation through RL. Autonomous Robots, 46.</a:t>
-            </a:r>
-          </a:p>
-          <a:p>
-            <a:pPr algn="l">
-              <a:lnSpc>
-                <a:spcPts val="5249"/>
-              </a:lnSpc>
-            </a:pPr>
-            <a:r>
-              <a:rPr lang="en-US" sz="2999">
-                <a:solidFill>
-                  <a:srgbClr val="000000"/>
-                </a:solidFill>
-                <a:latin typeface="Times New Roman"/>
-                <a:ea typeface="Times New Roman"/>
-                <a:cs typeface="Times New Roman"/>
-                <a:sym typeface="Times New Roman"/>
-              </a:rPr>
-              <a:t>[12] Mittal, M. et al. (2023). Orbit: A Unified Simulation Framework for Interactive Robot Learning Environments. IEEE RA-L, 8(6).</a:t>
-            </a:r>
-          </a:p>
-          <a:p>
-            <a:pPr algn="l">
-              <a:lnSpc>
-                <a:spcPts val="5249"/>
-              </a:lnSpc>
-            </a:pPr>
-            <a:r>
-              <a:rPr lang="en-US" sz="2999">
-                <a:solidFill>
-                  <a:srgbClr val="000000"/>
-                </a:solidFill>
-                <a:latin typeface="Times New Roman"/>
-                <a:ea typeface="Times New Roman"/>
-                <a:cs typeface="Times New Roman"/>
-                <a:sym typeface="Times New Roman"/>
-              </a:rPr>
-              <a:t>[13] Rudin, N. et al. (2022). Learning to Walk in Minutes Using Massively Parallel Deep RL. Proc. CoRL, PMLR </a:t>
-            </a:r>
-          </a:p>
-          <a:p>
-            <a:pPr algn="l">
-              <a:lnSpc>
-                <a:spcPts val="5249"/>
-              </a:lnSpc>
-            </a:pPr>
-            <a:r>
-              <a:rPr lang="en-US" sz="2999">
-                <a:solidFill>
-                  <a:srgbClr val="000000"/>
-                </a:solidFill>
-                <a:latin typeface="Times New Roman"/>
-                <a:ea typeface="Times New Roman"/>
-                <a:cs typeface="Times New Roman"/>
-                <a:sym typeface="Times New Roman"/>
-              </a:rPr>
-              <a:t>[14] Universal Robots A/S (2023). UR5e Technical Specifications. Product datasheet.</a:t>
-            </a:r>
-          </a:p>
-          <a:p>
-            <a:pPr algn="l">
-              <a:lnSpc>
-                <a:spcPts val="5249"/>
-              </a:lnSpc>
-            </a:pPr>
-            <a:r>
-              <a:rPr lang="en-US" sz="2999">
-                <a:solidFill>
-                  <a:srgbClr val="000000"/>
-                </a:solidFill>
-                <a:latin typeface="Times New Roman"/>
-                <a:ea typeface="Times New Roman"/>
-                <a:cs typeface="Times New Roman"/>
-                <a:sym typeface="Times New Roman"/>
-              </a:rPr>
-              <a:t>[15] Khan, M. M. (2025). Enhancing Manipulator Control Through IBVS Techniques Using ROS2. BSc thesis, KUET.</a:t>
-            </a:r>
-          </a:p>
-          <a:p>
-            <a:pPr algn="l">
-              <a:lnSpc>
-                <a:spcPts val="5249"/>
-              </a:lnSpc>
-            </a:pPr>
-            <a:endParaRPr lang="en-US" sz="2999">
-              <a:solidFill>
-                <a:srgbClr val="000000"/>
-              </a:solidFill>
-              <a:latin typeface="Times New Roman"/>
-              <a:ea typeface="Times New Roman"/>
-              <a:cs typeface="Times New Roman"/>
-              <a:sym typeface="Times New Roman"/>
+              <a:t>17</a:t>
+            </a:r>
+            <a:endParaRPr lang="en-GB" sz="2000" dirty="0">
+              <a:latin typeface="Times New Roman" panose="02020603050405020304" pitchFamily="18" charset="0"/>
+              <a:cs typeface="Times New Roman" panose="02020603050405020304" pitchFamily="18" charset="0"/>
             </a:endParaRPr>
           </a:p>
         </p:txBody>
@@ -10994,7 +11106,7 @@
 </p:sld>
 </file>
 
-<file path=ppt/slides/slide19.xml><?xml version="1.0" encoding="utf-8"?>
+<file path=ppt/slides/slide18.xml><?xml version="1.0" encoding="utf-8"?>
 <p:sld xmlns:a="http://schemas.openxmlformats.org/drawingml/2006/main" xmlns:r="http://schemas.openxmlformats.org/officeDocument/2006/relationships" xmlns:p="http://schemas.openxmlformats.org/presentationml/2006/main">
   <p:cSld>
     <p:spTree>
@@ -11052,7 +11164,242 @@
           </a:p>
         </p:txBody>
       </p:sp>
+      <p:sp>
+        <p:nvSpPr>
+          <p:cNvPr id="4" name="TextBox 3">
+            <a:extLst>
+              <a:ext uri="{FF2B5EF4-FFF2-40B4-BE49-F238E27FC236}">
+                <a16:creationId xmlns:a16="http://schemas.microsoft.com/office/drawing/2014/main" id="{7534CCCF-1655-2EFA-238A-4CD6E4AD939D}"/>
+              </a:ext>
+            </a:extLst>
+          </p:cNvPr>
+          <p:cNvSpPr txBox="1"/>
+          <p:nvPr/>
+        </p:nvSpPr>
+        <p:spPr>
+          <a:xfrm>
+            <a:off x="17373600" y="9563100"/>
+            <a:ext cx="441146" cy="400110"/>
+          </a:xfrm>
+          <a:prstGeom prst="rect">
+            <a:avLst/>
+          </a:prstGeom>
+          <a:noFill/>
+        </p:spPr>
+        <p:txBody>
+          <a:bodyPr wrap="none" rtlCol="0">
+            <a:spAutoFit/>
+          </a:bodyPr>
+          <a:lstStyle/>
+          <a:p>
+            <a:r>
+              <a:rPr lang="en-FI" sz="2000" dirty="0">
+                <a:latin typeface="Times New Roman" panose="02020603050405020304" pitchFamily="18" charset="0"/>
+                <a:cs typeface="Times New Roman" panose="02020603050405020304" pitchFamily="18" charset="0"/>
+              </a:rPr>
+              <a:t>18</a:t>
+            </a:r>
+            <a:endParaRPr lang="en-GB" sz="2000" dirty="0">
+              <a:latin typeface="Times New Roman" panose="02020603050405020304" pitchFamily="18" charset="0"/>
+              <a:cs typeface="Times New Roman" panose="02020603050405020304" pitchFamily="18" charset="0"/>
+            </a:endParaRPr>
+          </a:p>
+        </p:txBody>
+      </p:sp>
     </p:spTree>
+  </p:cSld>
+  <p:clrMapOvr>
+    <a:masterClrMapping/>
+  </p:clrMapOvr>
+</p:sld>
+</file>
+
+<file path=ppt/slides/slide19.xml><?xml version="1.0" encoding="utf-8"?>
+<p:sld xmlns:a="http://schemas.openxmlformats.org/drawingml/2006/main" xmlns:r="http://schemas.openxmlformats.org/officeDocument/2006/relationships" xmlns:p="http://schemas.openxmlformats.org/presentationml/2006/main">
+  <p:cSld>
+    <p:spTree>
+      <p:nvGrpSpPr>
+        <p:cNvPr id="1" name=""/>
+        <p:cNvGrpSpPr/>
+        <p:nvPr/>
+      </p:nvGrpSpPr>
+      <p:grpSpPr>
+        <a:xfrm>
+          <a:off x="0" y="0"/>
+          <a:ext cx="0" cy="0"/>
+          <a:chOff x="0" y="0"/>
+          <a:chExt cx="0" cy="0"/>
+        </a:xfrm>
+      </p:grpSpPr>
+      <p:sp>
+        <p:nvSpPr>
+          <p:cNvPr id="2" name="TextBox 1">
+            <a:extLst>
+              <a:ext uri="{FF2B5EF4-FFF2-40B4-BE49-F238E27FC236}">
+                <a16:creationId xmlns:a16="http://schemas.microsoft.com/office/drawing/2014/main" id="{51228D51-6423-4DBC-A0EF-FFF911ADDD23}"/>
+              </a:ext>
+            </a:extLst>
+          </p:cNvPr>
+          <p:cNvSpPr txBox="1"/>
+          <p:nvPr/>
+        </p:nvSpPr>
+        <p:spPr>
+          <a:xfrm>
+            <a:off x="1143000" y="952500"/>
+            <a:ext cx="3352800" cy="707886"/>
+          </a:xfrm>
+          <a:prstGeom prst="rect">
+            <a:avLst/>
+          </a:prstGeom>
+          <a:noFill/>
+        </p:spPr>
+        <p:txBody>
+          <a:bodyPr wrap="square" rtlCol="0">
+            <a:spAutoFit/>
+          </a:bodyPr>
+          <a:lstStyle/>
+          <a:p>
+            <a:r>
+              <a:rPr lang="en-FI" sz="4000" b="1" dirty="0">
+                <a:latin typeface="Times New Roman" panose="02020603050405020304" pitchFamily="18" charset="0"/>
+                <a:cs typeface="Times New Roman" panose="02020603050405020304" pitchFamily="18" charset="0"/>
+              </a:rPr>
+              <a:t>Appendix:</a:t>
+            </a:r>
+            <a:endParaRPr lang="en-GB" sz="4000" b="1" dirty="0">
+              <a:latin typeface="Times New Roman" panose="02020603050405020304" pitchFamily="18" charset="0"/>
+              <a:cs typeface="Times New Roman" panose="02020603050405020304" pitchFamily="18" charset="0"/>
+            </a:endParaRPr>
+          </a:p>
+        </p:txBody>
+      </p:sp>
+      <p:pic>
+        <p:nvPicPr>
+          <p:cNvPr id="4" name="Picture 3">
+            <a:extLst>
+              <a:ext uri="{FF2B5EF4-FFF2-40B4-BE49-F238E27FC236}">
+                <a16:creationId xmlns:a16="http://schemas.microsoft.com/office/drawing/2014/main" id="{99B6273C-0EE3-5898-98DC-B7872AF4B368}"/>
+              </a:ext>
+            </a:extLst>
+          </p:cNvPr>
+          <p:cNvPicPr>
+            <a:picLocks noChangeAspect="1"/>
+          </p:cNvPicPr>
+          <p:nvPr/>
+        </p:nvPicPr>
+        <p:blipFill>
+          <a:blip r:embed="rId2" cstate="print">
+            <a:extLst>
+              <a:ext uri="{28A0092B-C50C-407E-A947-70E740481C1C}">
+                <a14:useLocalDpi xmlns:a14="http://schemas.microsoft.com/office/drawing/2010/main" val="0"/>
+              </a:ext>
+            </a:extLst>
+          </a:blip>
+          <a:stretch>
+            <a:fillRect/>
+          </a:stretch>
+        </p:blipFill>
+        <p:spPr>
+          <a:xfrm>
+            <a:off x="3170437" y="2006243"/>
+            <a:ext cx="11947125" cy="6274513"/>
+          </a:xfrm>
+          <a:prstGeom prst="rect">
+            <a:avLst/>
+          </a:prstGeom>
+        </p:spPr>
+      </p:pic>
+      <p:sp>
+        <p:nvSpPr>
+          <p:cNvPr id="5" name="TextBox 4">
+            <a:extLst>
+              <a:ext uri="{FF2B5EF4-FFF2-40B4-BE49-F238E27FC236}">
+                <a16:creationId xmlns:a16="http://schemas.microsoft.com/office/drawing/2014/main" id="{847B79B0-C6F0-353D-362D-63A47FCD9AF9}"/>
+              </a:ext>
+            </a:extLst>
+          </p:cNvPr>
+          <p:cNvSpPr txBox="1"/>
+          <p:nvPr/>
+        </p:nvSpPr>
+        <p:spPr>
+          <a:xfrm>
+            <a:off x="4290318" y="8608178"/>
+            <a:ext cx="9707362" cy="523220"/>
+          </a:xfrm>
+          <a:prstGeom prst="rect">
+            <a:avLst/>
+          </a:prstGeom>
+          <a:noFill/>
+        </p:spPr>
+        <p:txBody>
+          <a:bodyPr wrap="square" rtlCol="0">
+            <a:spAutoFit/>
+          </a:bodyPr>
+          <a:lstStyle/>
+          <a:p>
+            <a:pPr algn="ctr"/>
+            <a:r>
+              <a:rPr lang="en-FI" sz="2800" dirty="0">
+                <a:latin typeface="Times New Roman" panose="02020603050405020304" pitchFamily="18" charset="0"/>
+                <a:cs typeface="Times New Roman" panose="02020603050405020304" pitchFamily="18" charset="0"/>
+              </a:rPr>
+              <a:t>Fig: Effect of tightening the cost limit on the performances </a:t>
+            </a:r>
+            <a:endParaRPr lang="en-GB" sz="2800" dirty="0">
+              <a:latin typeface="Times New Roman" panose="02020603050405020304" pitchFamily="18" charset="0"/>
+              <a:cs typeface="Times New Roman" panose="02020603050405020304" pitchFamily="18" charset="0"/>
+            </a:endParaRPr>
+          </a:p>
+        </p:txBody>
+      </p:sp>
+      <p:sp>
+        <p:nvSpPr>
+          <p:cNvPr id="7" name="TextBox 6">
+            <a:extLst>
+              <a:ext uri="{FF2B5EF4-FFF2-40B4-BE49-F238E27FC236}">
+                <a16:creationId xmlns:a16="http://schemas.microsoft.com/office/drawing/2014/main" id="{ECC5F47A-433C-B6B8-10E9-CB93AF35185B}"/>
+              </a:ext>
+            </a:extLst>
+          </p:cNvPr>
+          <p:cNvSpPr txBox="1"/>
+          <p:nvPr/>
+        </p:nvSpPr>
+        <p:spPr>
+          <a:xfrm>
+            <a:off x="17373600" y="9563100"/>
+            <a:ext cx="441146" cy="400110"/>
+          </a:xfrm>
+          <a:prstGeom prst="rect">
+            <a:avLst/>
+          </a:prstGeom>
+          <a:noFill/>
+        </p:spPr>
+        <p:txBody>
+          <a:bodyPr wrap="none" rtlCol="0">
+            <a:spAutoFit/>
+          </a:bodyPr>
+          <a:lstStyle/>
+          <a:p>
+            <a:r>
+              <a:rPr lang="en-FI" sz="2000" dirty="0">
+                <a:latin typeface="Times New Roman" panose="02020603050405020304" pitchFamily="18" charset="0"/>
+                <a:cs typeface="Times New Roman" panose="02020603050405020304" pitchFamily="18" charset="0"/>
+              </a:rPr>
+              <a:t>19</a:t>
+            </a:r>
+            <a:endParaRPr lang="en-GB" sz="2000" dirty="0">
+              <a:latin typeface="Times New Roman" panose="02020603050405020304" pitchFamily="18" charset="0"/>
+              <a:cs typeface="Times New Roman" panose="02020603050405020304" pitchFamily="18" charset="0"/>
+            </a:endParaRPr>
+          </a:p>
+        </p:txBody>
+      </p:sp>
+    </p:spTree>
+    <p:extLst>
+      <p:ext uri="{BB962C8B-B14F-4D97-AF65-F5344CB8AC3E}">
+        <p14:creationId xmlns:p14="http://schemas.microsoft.com/office/powerpoint/2010/main" val="420121842"/>
+      </p:ext>
+    </p:extLst>
   </p:cSld>
   <p:clrMapOvr>
     <a:masterClrMapping/>
@@ -11470,7 +11817,384 @@
           </a:p>
         </p:txBody>
       </p:sp>
+      <p:sp>
+        <p:nvSpPr>
+          <p:cNvPr id="7" name="TextBox 6">
+            <a:extLst>
+              <a:ext uri="{FF2B5EF4-FFF2-40B4-BE49-F238E27FC236}">
+                <a16:creationId xmlns:a16="http://schemas.microsoft.com/office/drawing/2014/main" id="{B7D62569-A6A5-CF3B-D16D-392F9CA7EFAE}"/>
+              </a:ext>
+            </a:extLst>
+          </p:cNvPr>
+          <p:cNvSpPr txBox="1"/>
+          <p:nvPr/>
+        </p:nvSpPr>
+        <p:spPr>
+          <a:xfrm>
+            <a:off x="9308041" y="7734300"/>
+            <a:ext cx="7413145" cy="830997"/>
+          </a:xfrm>
+          <a:prstGeom prst="rect">
+            <a:avLst/>
+          </a:prstGeom>
+          <a:noFill/>
+        </p:spPr>
+        <p:txBody>
+          <a:bodyPr wrap="square" rtlCol="0">
+            <a:spAutoFit/>
+          </a:bodyPr>
+          <a:lstStyle/>
+          <a:p>
+            <a:pPr algn="ctr"/>
+            <a:r>
+              <a:rPr lang="en-FI" sz="2400" dirty="0">
+                <a:latin typeface="Times New Roman" panose="02020603050405020304" pitchFamily="18" charset="0"/>
+                <a:cs typeface="Times New Roman" panose="02020603050405020304" pitchFamily="18" charset="0"/>
+              </a:rPr>
+              <a:t>Fig 1: A human operator working side by side with a UR5 manipulator</a:t>
+            </a:r>
+            <a:endParaRPr lang="en-GB" sz="2400" dirty="0">
+              <a:latin typeface="Times New Roman" panose="02020603050405020304" pitchFamily="18" charset="0"/>
+              <a:cs typeface="Times New Roman" panose="02020603050405020304" pitchFamily="18" charset="0"/>
+            </a:endParaRPr>
+          </a:p>
+        </p:txBody>
+      </p:sp>
+      <p:sp>
+        <p:nvSpPr>
+          <p:cNvPr id="9" name="TextBox 8">
+            <a:extLst>
+              <a:ext uri="{FF2B5EF4-FFF2-40B4-BE49-F238E27FC236}">
+                <a16:creationId xmlns:a16="http://schemas.microsoft.com/office/drawing/2014/main" id="{77415113-1877-846A-8A08-5AA255E2F76B}"/>
+              </a:ext>
+            </a:extLst>
+          </p:cNvPr>
+          <p:cNvSpPr txBox="1"/>
+          <p:nvPr/>
+        </p:nvSpPr>
+        <p:spPr>
+          <a:xfrm>
+            <a:off x="17373600" y="9563100"/>
+            <a:ext cx="312906" cy="400110"/>
+          </a:xfrm>
+          <a:prstGeom prst="rect">
+            <a:avLst/>
+          </a:prstGeom>
+          <a:noFill/>
+        </p:spPr>
+        <p:txBody>
+          <a:bodyPr wrap="none" rtlCol="0">
+            <a:spAutoFit/>
+          </a:bodyPr>
+          <a:lstStyle/>
+          <a:p>
+            <a:r>
+              <a:rPr lang="en-FI" sz="2000" dirty="0">
+                <a:latin typeface="Times New Roman" panose="02020603050405020304" pitchFamily="18" charset="0"/>
+                <a:cs typeface="Times New Roman" panose="02020603050405020304" pitchFamily="18" charset="0"/>
+              </a:rPr>
+              <a:t>2</a:t>
+            </a:r>
+            <a:endParaRPr lang="en-GB" sz="2000" dirty="0">
+              <a:latin typeface="Times New Roman" panose="02020603050405020304" pitchFamily="18" charset="0"/>
+              <a:cs typeface="Times New Roman" panose="02020603050405020304" pitchFamily="18" charset="0"/>
+            </a:endParaRPr>
+          </a:p>
+        </p:txBody>
+      </p:sp>
     </p:spTree>
+  </p:cSld>
+  <p:clrMapOvr>
+    <a:masterClrMapping/>
+  </p:clrMapOvr>
+</p:sld>
+</file>
+
+<file path=ppt/slides/slide20.xml><?xml version="1.0" encoding="utf-8"?>
+<p:sld xmlns:a="http://schemas.openxmlformats.org/drawingml/2006/main" xmlns:r="http://schemas.openxmlformats.org/officeDocument/2006/relationships" xmlns:p="http://schemas.openxmlformats.org/presentationml/2006/main">
+  <p:cSld>
+    <p:spTree>
+      <p:nvGrpSpPr>
+        <p:cNvPr id="1" name="">
+          <a:extLst>
+            <a:ext uri="{FF2B5EF4-FFF2-40B4-BE49-F238E27FC236}">
+              <a16:creationId xmlns:a16="http://schemas.microsoft.com/office/drawing/2014/main" id="{9159F5AE-BC32-0CEA-5AC1-28399645BCC6}"/>
+            </a:ext>
+          </a:extLst>
+        </p:cNvPr>
+        <p:cNvGrpSpPr/>
+        <p:nvPr/>
+      </p:nvGrpSpPr>
+      <p:grpSpPr>
+        <a:xfrm>
+          <a:off x="0" y="0"/>
+          <a:ext cx="0" cy="0"/>
+          <a:chOff x="0" y="0"/>
+          <a:chExt cx="0" cy="0"/>
+        </a:xfrm>
+      </p:grpSpPr>
+      <p:sp>
+        <p:nvSpPr>
+          <p:cNvPr id="2" name="TextBox 1">
+            <a:extLst>
+              <a:ext uri="{FF2B5EF4-FFF2-40B4-BE49-F238E27FC236}">
+                <a16:creationId xmlns:a16="http://schemas.microsoft.com/office/drawing/2014/main" id="{5B78488C-6E9A-7650-C11E-59ADDC46C63E}"/>
+              </a:ext>
+            </a:extLst>
+          </p:cNvPr>
+          <p:cNvSpPr txBox="1"/>
+          <p:nvPr/>
+        </p:nvSpPr>
+        <p:spPr>
+          <a:xfrm>
+            <a:off x="1143000" y="952500"/>
+            <a:ext cx="3352800" cy="707886"/>
+          </a:xfrm>
+          <a:prstGeom prst="rect">
+            <a:avLst/>
+          </a:prstGeom>
+          <a:noFill/>
+        </p:spPr>
+        <p:txBody>
+          <a:bodyPr wrap="square" rtlCol="0">
+            <a:spAutoFit/>
+          </a:bodyPr>
+          <a:lstStyle/>
+          <a:p>
+            <a:r>
+              <a:rPr lang="en-FI" sz="4000" b="1" dirty="0">
+                <a:latin typeface="Times New Roman" panose="02020603050405020304" pitchFamily="18" charset="0"/>
+                <a:cs typeface="Times New Roman" panose="02020603050405020304" pitchFamily="18" charset="0"/>
+              </a:rPr>
+              <a:t>Appendix:</a:t>
+            </a:r>
+            <a:endParaRPr lang="en-GB" sz="4000" b="1" dirty="0">
+              <a:latin typeface="Times New Roman" panose="02020603050405020304" pitchFamily="18" charset="0"/>
+              <a:cs typeface="Times New Roman" panose="02020603050405020304" pitchFamily="18" charset="0"/>
+            </a:endParaRPr>
+          </a:p>
+        </p:txBody>
+      </p:sp>
+      <p:sp>
+        <p:nvSpPr>
+          <p:cNvPr id="5" name="TextBox 4">
+            <a:extLst>
+              <a:ext uri="{FF2B5EF4-FFF2-40B4-BE49-F238E27FC236}">
+                <a16:creationId xmlns:a16="http://schemas.microsoft.com/office/drawing/2014/main" id="{4D68A900-0AA5-C078-5643-4BF5A24B9F5B}"/>
+              </a:ext>
+            </a:extLst>
+          </p:cNvPr>
+          <p:cNvSpPr txBox="1"/>
+          <p:nvPr/>
+        </p:nvSpPr>
+        <p:spPr>
+          <a:xfrm>
+            <a:off x="304800" y="7650770"/>
+            <a:ext cx="9707362" cy="523220"/>
+          </a:xfrm>
+          <a:prstGeom prst="rect">
+            <a:avLst/>
+          </a:prstGeom>
+          <a:noFill/>
+        </p:spPr>
+        <p:txBody>
+          <a:bodyPr wrap="square" rtlCol="0">
+            <a:spAutoFit/>
+          </a:bodyPr>
+          <a:lstStyle/>
+          <a:p>
+            <a:pPr algn="ctr"/>
+            <a:r>
+              <a:rPr lang="en-FI" sz="2800" dirty="0">
+                <a:latin typeface="Times New Roman" panose="02020603050405020304" pitchFamily="18" charset="0"/>
+                <a:cs typeface="Times New Roman" panose="02020603050405020304" pitchFamily="18" charset="0"/>
+              </a:rPr>
+              <a:t>Fig 2: Effect of </a:t>
+            </a:r>
+            <a:r>
+              <a:rPr lang="en-FI" sz="2800" dirty="0" err="1">
+                <a:latin typeface="Times New Roman" panose="02020603050405020304" pitchFamily="18" charset="0"/>
+                <a:cs typeface="Times New Roman" panose="02020603050405020304" pitchFamily="18" charset="0"/>
+              </a:rPr>
+              <a:t>Lagragian</a:t>
+            </a:r>
+            <a:r>
+              <a:rPr lang="en-FI" sz="2800" dirty="0">
+                <a:latin typeface="Times New Roman" panose="02020603050405020304" pitchFamily="18" charset="0"/>
+                <a:cs typeface="Times New Roman" panose="02020603050405020304" pitchFamily="18" charset="0"/>
+              </a:rPr>
+              <a:t> multiplier in action  </a:t>
+            </a:r>
+            <a:endParaRPr lang="en-GB" sz="2800" dirty="0">
+              <a:latin typeface="Times New Roman" panose="02020603050405020304" pitchFamily="18" charset="0"/>
+              <a:cs typeface="Times New Roman" panose="02020603050405020304" pitchFamily="18" charset="0"/>
+            </a:endParaRPr>
+          </a:p>
+        </p:txBody>
+      </p:sp>
+      <p:pic>
+        <p:nvPicPr>
+          <p:cNvPr id="6" name="Picture 5">
+            <a:extLst>
+              <a:ext uri="{FF2B5EF4-FFF2-40B4-BE49-F238E27FC236}">
+                <a16:creationId xmlns:a16="http://schemas.microsoft.com/office/drawing/2014/main" id="{53FFF248-8B23-32FC-7BAA-F281142ABD26}"/>
+              </a:ext>
+            </a:extLst>
+          </p:cNvPr>
+          <p:cNvPicPr>
+            <a:picLocks noChangeAspect="1"/>
+          </p:cNvPicPr>
+          <p:nvPr/>
+        </p:nvPicPr>
+        <p:blipFill>
+          <a:blip r:embed="rId2" cstate="print">
+            <a:extLst>
+              <a:ext uri="{28A0092B-C50C-407E-A947-70E740481C1C}">
+                <a14:useLocalDpi xmlns:a14="http://schemas.microsoft.com/office/drawing/2010/main" val="0"/>
+              </a:ext>
+            </a:extLst>
+          </a:blip>
+          <a:stretch>
+            <a:fillRect/>
+          </a:stretch>
+        </p:blipFill>
+        <p:spPr>
+          <a:xfrm>
+            <a:off x="1255266" y="2628900"/>
+            <a:ext cx="7504528" cy="4576576"/>
+          </a:xfrm>
+          <a:prstGeom prst="rect">
+            <a:avLst/>
+          </a:prstGeom>
+        </p:spPr>
+      </p:pic>
+      <p:pic>
+        <p:nvPicPr>
+          <p:cNvPr id="8" name="Picture 7">
+            <a:extLst>
+              <a:ext uri="{FF2B5EF4-FFF2-40B4-BE49-F238E27FC236}">
+                <a16:creationId xmlns:a16="http://schemas.microsoft.com/office/drawing/2014/main" id="{93DB6C50-8C07-CAA6-523D-A37862A61364}"/>
+              </a:ext>
+            </a:extLst>
+          </p:cNvPr>
+          <p:cNvPicPr>
+            <a:picLocks noChangeAspect="1"/>
+          </p:cNvPicPr>
+          <p:nvPr/>
+        </p:nvPicPr>
+        <p:blipFill>
+          <a:blip r:embed="rId3" cstate="print">
+            <a:extLst>
+              <a:ext uri="{28A0092B-C50C-407E-A947-70E740481C1C}">
+                <a14:useLocalDpi xmlns:a14="http://schemas.microsoft.com/office/drawing/2010/main" val="0"/>
+              </a:ext>
+            </a:extLst>
+          </a:blip>
+          <a:stretch>
+            <a:fillRect/>
+          </a:stretch>
+        </p:blipFill>
+        <p:spPr>
+          <a:xfrm>
+            <a:off x="9525750" y="2635045"/>
+            <a:ext cx="7724030" cy="4576576"/>
+          </a:xfrm>
+          <a:prstGeom prst="rect">
+            <a:avLst/>
+          </a:prstGeom>
+        </p:spPr>
+      </p:pic>
+      <p:sp>
+        <p:nvSpPr>
+          <p:cNvPr id="10" name="TextBox 9">
+            <a:extLst>
+              <a:ext uri="{FF2B5EF4-FFF2-40B4-BE49-F238E27FC236}">
+                <a16:creationId xmlns:a16="http://schemas.microsoft.com/office/drawing/2014/main" id="{CA631E03-7DEB-E2A1-18B7-17CCBF4E19AF}"/>
+              </a:ext>
+            </a:extLst>
+          </p:cNvPr>
+          <p:cNvSpPr txBox="1"/>
+          <p:nvPr/>
+        </p:nvSpPr>
+        <p:spPr>
+          <a:xfrm>
+            <a:off x="10012162" y="7650770"/>
+            <a:ext cx="7724030" cy="523220"/>
+          </a:xfrm>
+          <a:prstGeom prst="rect">
+            <a:avLst/>
+          </a:prstGeom>
+          <a:noFill/>
+        </p:spPr>
+        <p:txBody>
+          <a:bodyPr wrap="square" rtlCol="0">
+            <a:spAutoFit/>
+          </a:bodyPr>
+          <a:lstStyle/>
+          <a:p>
+            <a:pPr algn="ctr"/>
+            <a:r>
+              <a:rPr lang="en-FI" sz="2800" dirty="0">
+                <a:latin typeface="Times New Roman" panose="02020603050405020304" pitchFamily="18" charset="0"/>
+                <a:cs typeface="Times New Roman" panose="02020603050405020304" pitchFamily="18" charset="0"/>
+              </a:rPr>
+              <a:t>Fig 3: Safety cost varies with the seeds   </a:t>
+            </a:r>
+            <a:endParaRPr lang="en-GB" sz="2800" dirty="0">
+              <a:latin typeface="Times New Roman" panose="02020603050405020304" pitchFamily="18" charset="0"/>
+              <a:cs typeface="Times New Roman" panose="02020603050405020304" pitchFamily="18" charset="0"/>
+            </a:endParaRPr>
+          </a:p>
+        </p:txBody>
+      </p:sp>
+      <p:sp>
+        <p:nvSpPr>
+          <p:cNvPr id="12" name="TextBox 11">
+            <a:extLst>
+              <a:ext uri="{FF2B5EF4-FFF2-40B4-BE49-F238E27FC236}">
+                <a16:creationId xmlns:a16="http://schemas.microsoft.com/office/drawing/2014/main" id="{C1EC5D41-9F77-8490-F3E2-548E5AFFE643}"/>
+              </a:ext>
+            </a:extLst>
+          </p:cNvPr>
+          <p:cNvSpPr txBox="1"/>
+          <p:nvPr/>
+        </p:nvSpPr>
+        <p:spPr>
+          <a:xfrm>
+            <a:off x="17373600" y="9563100"/>
+            <a:ext cx="441146" cy="400110"/>
+          </a:xfrm>
+          <a:prstGeom prst="rect">
+            <a:avLst/>
+          </a:prstGeom>
+          <a:noFill/>
+        </p:spPr>
+        <p:txBody>
+          <a:bodyPr wrap="none" rtlCol="0">
+            <a:spAutoFit/>
+          </a:bodyPr>
+          <a:lstStyle/>
+          <a:p>
+            <a:r>
+              <a:rPr lang="en-FI" sz="2000" dirty="0">
+                <a:latin typeface="Times New Roman" panose="02020603050405020304" pitchFamily="18" charset="0"/>
+                <a:cs typeface="Times New Roman" panose="02020603050405020304" pitchFamily="18" charset="0"/>
+              </a:rPr>
+              <a:t>20</a:t>
+            </a:r>
+            <a:endParaRPr lang="en-GB" sz="2000" dirty="0">
+              <a:latin typeface="Times New Roman" panose="02020603050405020304" pitchFamily="18" charset="0"/>
+              <a:cs typeface="Times New Roman" panose="02020603050405020304" pitchFamily="18" charset="0"/>
+            </a:endParaRPr>
+          </a:p>
+        </p:txBody>
+      </p:sp>
+    </p:spTree>
+    <p:extLst>
+      <p:ext uri="{BB962C8B-B14F-4D97-AF65-F5344CB8AC3E}">
+        <p14:creationId xmlns:p14="http://schemas.microsoft.com/office/powerpoint/2010/main" val="2266638747"/>
+      </p:ext>
+    </p:extLst>
   </p:cSld>
   <p:clrMapOvr>
     <a:masterClrMapping/>
@@ -11785,6 +12509,48 @@
               </a:rPr>
               <a:t>This thesis tests the alternative: pull safety out of the reward</a:t>
             </a:r>
+          </a:p>
+        </p:txBody>
+      </p:sp>
+      <p:sp>
+        <p:nvSpPr>
+          <p:cNvPr id="6" name="TextBox 5">
+            <a:extLst>
+              <a:ext uri="{FF2B5EF4-FFF2-40B4-BE49-F238E27FC236}">
+                <a16:creationId xmlns:a16="http://schemas.microsoft.com/office/drawing/2014/main" id="{D2128113-CE26-65CF-5548-7547FEEFE753}"/>
+              </a:ext>
+            </a:extLst>
+          </p:cNvPr>
+          <p:cNvSpPr txBox="1"/>
+          <p:nvPr/>
+        </p:nvSpPr>
+        <p:spPr>
+          <a:xfrm>
+            <a:off x="17373600" y="9563100"/>
+            <a:ext cx="312906" cy="400110"/>
+          </a:xfrm>
+          <a:prstGeom prst="rect">
+            <a:avLst/>
+          </a:prstGeom>
+          <a:noFill/>
+        </p:spPr>
+        <p:txBody>
+          <a:bodyPr wrap="none" rtlCol="0">
+            <a:spAutoFit/>
+          </a:bodyPr>
+          <a:lstStyle/>
+          <a:p>
+            <a:r>
+              <a:rPr lang="en-FI" sz="2000" dirty="0">
+                <a:latin typeface="Times New Roman" panose="02020603050405020304" pitchFamily="18" charset="0"/>
+                <a:cs typeface="Times New Roman" panose="02020603050405020304" pitchFamily="18" charset="0"/>
+              </a:rPr>
+              <a:t>3</a:t>
+            </a:r>
+            <a:endParaRPr lang="en-GB" sz="2000" dirty="0">
+              <a:latin typeface="Times New Roman" panose="02020603050405020304" pitchFamily="18" charset="0"/>
+              <a:cs typeface="Times New Roman" panose="02020603050405020304" pitchFamily="18" charset="0"/>
+            </a:endParaRPr>
           </a:p>
         </p:txBody>
       </p:sp>
@@ -12757,6 +13523,44 @@
           </a:graphicData>
         </a:graphic>
       </p:graphicFrame>
+      <p:sp>
+        <p:nvSpPr>
+          <p:cNvPr id="5" name="TextBox 4">
+            <a:extLst>
+              <a:ext uri="{FF2B5EF4-FFF2-40B4-BE49-F238E27FC236}">
+                <a16:creationId xmlns:a16="http://schemas.microsoft.com/office/drawing/2014/main" id="{2A04FD1C-B630-A4FE-7130-71F015D26585}"/>
+              </a:ext>
+            </a:extLst>
+          </p:cNvPr>
+          <p:cNvSpPr txBox="1"/>
+          <p:nvPr/>
+        </p:nvSpPr>
+        <p:spPr>
+          <a:xfrm>
+            <a:off x="17373600" y="9563100"/>
+            <a:ext cx="312906" cy="400110"/>
+          </a:xfrm>
+          <a:prstGeom prst="rect">
+            <a:avLst/>
+          </a:prstGeom>
+          <a:noFill/>
+        </p:spPr>
+        <p:txBody>
+          <a:bodyPr wrap="none" rtlCol="0">
+            <a:spAutoFit/>
+          </a:bodyPr>
+          <a:lstStyle/>
+          <a:p>
+            <a:r>
+              <a:rPr lang="en-FI" sz="2000" dirty="0">
+                <a:latin typeface="Times New Roman" panose="02020603050405020304" pitchFamily="18" charset="0"/>
+                <a:cs typeface="Times New Roman" panose="02020603050405020304" pitchFamily="18" charset="0"/>
+              </a:rPr>
+              <a:t>4</a:t>
+            </a:r>
+          </a:p>
+        </p:txBody>
+      </p:sp>
     </p:spTree>
     <p:extLst>
       <p:ext uri="{BB962C8B-B14F-4D97-AF65-F5344CB8AC3E}">
@@ -12934,14 +13738,14 @@
           <p:nvPr>
             <p:extLst>
               <p:ext uri="{D42A27DB-BD31-4B8C-83A1-F6EECF244321}">
-                <p14:modId xmlns:p14="http://schemas.microsoft.com/office/powerpoint/2010/main" val="1326124680"/>
+                <p14:modId xmlns:p14="http://schemas.microsoft.com/office/powerpoint/2010/main" val="1012707298"/>
               </p:ext>
             </p:extLst>
           </p:nvPr>
         </p:nvGraphicFramePr>
         <p:xfrm>
-          <a:off x="1912772" y="2781300"/>
-          <a:ext cx="14462457" cy="4936013"/>
+          <a:off x="2137485" y="2933700"/>
+          <a:ext cx="14013029" cy="4961534"/>
         </p:xfrm>
         <a:graphic>
           <a:graphicData uri="http://schemas.openxmlformats.org/drawingml/2006/table">
@@ -12950,21 +13754,21 @@
                 <a:tableStyleId>{5C22544A-7EE6-4342-B048-85BDC9FD1C3A}</a:tableStyleId>
               </a:tblPr>
               <a:tblGrid>
-                <a:gridCol w="3006927">
+                <a:gridCol w="2913485">
                   <a:extLst>
                     <a:ext uri="{9D8B030D-6E8A-4147-A177-3AD203B41FA5}">
                       <a16:colId xmlns:a16="http://schemas.microsoft.com/office/drawing/2014/main" val="1158292444"/>
                     </a:ext>
                   </a:extLst>
                 </a:gridCol>
-                <a:gridCol w="5350939">
+                <a:gridCol w="5184656">
                   <a:extLst>
                     <a:ext uri="{9D8B030D-6E8A-4147-A177-3AD203B41FA5}">
                       <a16:colId xmlns:a16="http://schemas.microsoft.com/office/drawing/2014/main" val="1569507600"/>
                     </a:ext>
                   </a:extLst>
                 </a:gridCol>
-                <a:gridCol w="6104591">
+                <a:gridCol w="5914888">
                   <a:extLst>
                     <a:ext uri="{9D8B030D-6E8A-4147-A177-3AD203B41FA5}">
                       <a16:colId xmlns:a16="http://schemas.microsoft.com/office/drawing/2014/main" val="4104253261"/>
@@ -12972,7 +13776,7 @@
                   </a:extLst>
                 </a:gridCol>
               </a:tblGrid>
-              <a:tr h="1119372">
+              <a:tr h="1061784">
                 <a:tc>
                   <a:txBody>
                     <a:bodyPr/>
@@ -13183,7 +13987,7 @@
                   </a:ext>
                 </a:extLst>
               </a:tr>
-              <a:tr h="1312388">
+              <a:tr h="1244870">
                 <a:tc>
                   <a:txBody>
                     <a:bodyPr/>
@@ -13445,7 +14249,7 @@
                   </a:ext>
                 </a:extLst>
               </a:tr>
-              <a:tr h="1132653">
+              <a:tr h="1074381">
                 <a:tc>
                   <a:txBody>
                     <a:bodyPr/>
@@ -13689,7 +14493,7 @@
                   </a:ext>
                 </a:extLst>
               </a:tr>
-              <a:tr h="1312388">
+              <a:tr h="1301035">
                 <a:tc>
                   <a:txBody>
                     <a:bodyPr/>
@@ -13980,6 +14784,48 @@
           </a:graphicData>
         </a:graphic>
       </p:graphicFrame>
+      <p:sp>
+        <p:nvSpPr>
+          <p:cNvPr id="5" name="TextBox 4">
+            <a:extLst>
+              <a:ext uri="{FF2B5EF4-FFF2-40B4-BE49-F238E27FC236}">
+                <a16:creationId xmlns:a16="http://schemas.microsoft.com/office/drawing/2014/main" id="{FE57D0D2-C6E5-E0ED-D89A-C56A2C44A30D}"/>
+              </a:ext>
+            </a:extLst>
+          </p:cNvPr>
+          <p:cNvSpPr txBox="1"/>
+          <p:nvPr/>
+        </p:nvSpPr>
+        <p:spPr>
+          <a:xfrm>
+            <a:off x="17373600" y="9563100"/>
+            <a:ext cx="312906" cy="400110"/>
+          </a:xfrm>
+          <a:prstGeom prst="rect">
+            <a:avLst/>
+          </a:prstGeom>
+          <a:noFill/>
+        </p:spPr>
+        <p:txBody>
+          <a:bodyPr wrap="none" rtlCol="0">
+            <a:spAutoFit/>
+          </a:bodyPr>
+          <a:lstStyle/>
+          <a:p>
+            <a:r>
+              <a:rPr lang="en-FI" sz="2000" dirty="0">
+                <a:latin typeface="Times New Roman" panose="02020603050405020304" pitchFamily="18" charset="0"/>
+                <a:cs typeface="Times New Roman" panose="02020603050405020304" pitchFamily="18" charset="0"/>
+              </a:rPr>
+              <a:t>5</a:t>
+            </a:r>
+            <a:endParaRPr lang="en-GB" sz="2000" dirty="0">
+              <a:latin typeface="Times New Roman" panose="02020603050405020304" pitchFamily="18" charset="0"/>
+              <a:cs typeface="Times New Roman" panose="02020603050405020304" pitchFamily="18" charset="0"/>
+            </a:endParaRPr>
+          </a:p>
+        </p:txBody>
+      </p:sp>
     </p:spTree>
   </p:cSld>
   <p:clrMapOvr>
@@ -14249,6 +15095,48 @@
               <a:ea typeface="Times New Roman"/>
               <a:cs typeface="Times New Roman"/>
               <a:sym typeface="Times New Roman"/>
+            </a:endParaRPr>
+          </a:p>
+        </p:txBody>
+      </p:sp>
+      <p:sp>
+        <p:nvSpPr>
+          <p:cNvPr id="7" name="TextBox 6">
+            <a:extLst>
+              <a:ext uri="{FF2B5EF4-FFF2-40B4-BE49-F238E27FC236}">
+                <a16:creationId xmlns:a16="http://schemas.microsoft.com/office/drawing/2014/main" id="{2CA1CB17-73AE-ADC9-C627-40CEA3270BD8}"/>
+              </a:ext>
+            </a:extLst>
+          </p:cNvPr>
+          <p:cNvSpPr txBox="1"/>
+          <p:nvPr/>
+        </p:nvSpPr>
+        <p:spPr>
+          <a:xfrm>
+            <a:off x="17373600" y="9563100"/>
+            <a:ext cx="312906" cy="400110"/>
+          </a:xfrm>
+          <a:prstGeom prst="rect">
+            <a:avLst/>
+          </a:prstGeom>
+          <a:noFill/>
+        </p:spPr>
+        <p:txBody>
+          <a:bodyPr wrap="none" rtlCol="0">
+            <a:spAutoFit/>
+          </a:bodyPr>
+          <a:lstStyle/>
+          <a:p>
+            <a:r>
+              <a:rPr lang="en-FI" sz="2000" dirty="0">
+                <a:latin typeface="Times New Roman" panose="02020603050405020304" pitchFamily="18" charset="0"/>
+                <a:cs typeface="Times New Roman" panose="02020603050405020304" pitchFamily="18" charset="0"/>
+              </a:rPr>
+              <a:t>6</a:t>
+            </a:r>
+            <a:endParaRPr lang="en-GB" sz="2000" dirty="0">
+              <a:latin typeface="Times New Roman" panose="02020603050405020304" pitchFamily="18" charset="0"/>
+              <a:cs typeface="Times New Roman" panose="02020603050405020304" pitchFamily="18" charset="0"/>
             </a:endParaRPr>
           </a:p>
         </p:txBody>
@@ -14885,6 +15773,48 @@
           </p:sp>
         </p:grpSp>
       </p:grpSp>
+      <p:sp>
+        <p:nvSpPr>
+          <p:cNvPr id="6" name="TextBox 5">
+            <a:extLst>
+              <a:ext uri="{FF2B5EF4-FFF2-40B4-BE49-F238E27FC236}">
+                <a16:creationId xmlns:a16="http://schemas.microsoft.com/office/drawing/2014/main" id="{D35FDB39-C5DE-2BD7-9D13-24E8C9C29946}"/>
+              </a:ext>
+            </a:extLst>
+          </p:cNvPr>
+          <p:cNvSpPr txBox="1"/>
+          <p:nvPr/>
+        </p:nvSpPr>
+        <p:spPr>
+          <a:xfrm>
+            <a:off x="17373600" y="9563100"/>
+            <a:ext cx="312906" cy="400110"/>
+          </a:xfrm>
+          <a:prstGeom prst="rect">
+            <a:avLst/>
+          </a:prstGeom>
+          <a:noFill/>
+        </p:spPr>
+        <p:txBody>
+          <a:bodyPr wrap="none" rtlCol="0">
+            <a:spAutoFit/>
+          </a:bodyPr>
+          <a:lstStyle/>
+          <a:p>
+            <a:r>
+              <a:rPr lang="en-FI" sz="2000" dirty="0">
+                <a:latin typeface="Times New Roman" panose="02020603050405020304" pitchFamily="18" charset="0"/>
+                <a:cs typeface="Times New Roman" panose="02020603050405020304" pitchFamily="18" charset="0"/>
+              </a:rPr>
+              <a:t>7</a:t>
+            </a:r>
+            <a:endParaRPr lang="en-GB" sz="2000" dirty="0">
+              <a:latin typeface="Times New Roman" panose="02020603050405020304" pitchFamily="18" charset="0"/>
+              <a:cs typeface="Times New Roman" panose="02020603050405020304" pitchFamily="18" charset="0"/>
+            </a:endParaRPr>
+          </a:p>
+        </p:txBody>
+      </p:sp>
     </p:spTree>
     <p:extLst>
       <p:ext uri="{BB962C8B-B14F-4D97-AF65-F5344CB8AC3E}">
@@ -15635,7 +16565,7 @@
                 <a:latin typeface="Times New Roman" panose="02020603050405020304" pitchFamily="18" charset="0"/>
                 <a:cs typeface="Times New Roman" panose="02020603050405020304" pitchFamily="18" charset="0"/>
               </a:rPr>
-              <a:t> </a:t>
+              <a:t> framework</a:t>
             </a:r>
           </a:p>
           <a:p>
@@ -15696,11 +16626,18 @@
               <a:buChar char="•"/>
             </a:pPr>
             <a:r>
+              <a:rPr lang="en-FI" sz="3200" b="1" dirty="0">
+                <a:latin typeface="Times New Roman" panose="02020603050405020304" pitchFamily="18" charset="0"/>
+                <a:cs typeface="Times New Roman" panose="02020603050405020304" pitchFamily="18" charset="0"/>
+              </a:rPr>
+              <a:t>4096</a:t>
+            </a:r>
+            <a:r>
               <a:rPr lang="en-FI" sz="3200" dirty="0">
                 <a:latin typeface="Times New Roman" panose="02020603050405020304" pitchFamily="18" charset="0"/>
                 <a:cs typeface="Times New Roman" panose="02020603050405020304" pitchFamily="18" charset="0"/>
               </a:rPr>
-              <a:t>4096 parallel robots for training</a:t>
+              <a:t> parallel robots for training</a:t>
             </a:r>
           </a:p>
           <a:p>
@@ -15719,11 +16656,18 @@
               <a:buChar char="•"/>
             </a:pPr>
             <a:r>
+              <a:rPr lang="en-FI" sz="3200" b="1" dirty="0">
+                <a:latin typeface="Times New Roman" panose="02020603050405020304" pitchFamily="18" charset="0"/>
+                <a:cs typeface="Times New Roman" panose="02020603050405020304" pitchFamily="18" charset="0"/>
+              </a:rPr>
+              <a:t>1500</a:t>
+            </a:r>
+            <a:r>
               <a:rPr lang="en-FI" sz="3200" dirty="0">
                 <a:latin typeface="Times New Roman" panose="02020603050405020304" pitchFamily="18" charset="0"/>
                 <a:cs typeface="Times New Roman" panose="02020603050405020304" pitchFamily="18" charset="0"/>
               </a:rPr>
-              <a:t>1500 iterations</a:t>
+              <a:t> iterations</a:t>
             </a:r>
           </a:p>
           <a:p>
@@ -15811,6 +16755,48 @@
           <a:p>
             <a:pPr algn="ctr"/>
             <a:endParaRPr lang="en-GB"/>
+          </a:p>
+        </p:txBody>
+      </p:sp>
+      <p:sp>
+        <p:nvSpPr>
+          <p:cNvPr id="9" name="TextBox 8">
+            <a:extLst>
+              <a:ext uri="{FF2B5EF4-FFF2-40B4-BE49-F238E27FC236}">
+                <a16:creationId xmlns:a16="http://schemas.microsoft.com/office/drawing/2014/main" id="{6DB1C626-B51A-E77A-54E1-02795519BE0B}"/>
+              </a:ext>
+            </a:extLst>
+          </p:cNvPr>
+          <p:cNvSpPr txBox="1"/>
+          <p:nvPr/>
+        </p:nvSpPr>
+        <p:spPr>
+          <a:xfrm>
+            <a:off x="17373600" y="9563100"/>
+            <a:ext cx="312906" cy="400110"/>
+          </a:xfrm>
+          <a:prstGeom prst="rect">
+            <a:avLst/>
+          </a:prstGeom>
+          <a:noFill/>
+        </p:spPr>
+        <p:txBody>
+          <a:bodyPr wrap="none" rtlCol="0">
+            <a:spAutoFit/>
+          </a:bodyPr>
+          <a:lstStyle/>
+          <a:p>
+            <a:r>
+              <a:rPr lang="en-FI" sz="2000" dirty="0">
+                <a:latin typeface="Times New Roman" panose="02020603050405020304" pitchFamily="18" charset="0"/>
+                <a:cs typeface="Times New Roman" panose="02020603050405020304" pitchFamily="18" charset="0"/>
+              </a:rPr>
+              <a:t>8</a:t>
+            </a:r>
+            <a:endParaRPr lang="en-GB" sz="2000" dirty="0">
+              <a:latin typeface="Times New Roman" panose="02020603050405020304" pitchFamily="18" charset="0"/>
+              <a:cs typeface="Times New Roman" panose="02020603050405020304" pitchFamily="18" charset="0"/>
+            </a:endParaRPr>
           </a:p>
         </p:txBody>
       </p:sp>
@@ -16631,7 +17617,7 @@
                 <a:latin typeface="Times New Roman"/>
                 <a:cs typeface="Times New Roman" panose="02020603050405020304" pitchFamily="18" charset="0"/>
               </a:rPr>
-              <a:t> different seeds (101, 102, 103)</a:t>
+              <a:t> different seeds</a:t>
             </a:r>
             <a:endParaRPr lang="en-FI" sz="3200" dirty="0">
               <a:latin typeface="Times New Roman" panose="02020603050405020304" pitchFamily="18" charset="0"/>
@@ -16687,11 +17673,18 @@
               <a:t> -- </a:t>
             </a:r>
             <a:r>
+              <a:rPr lang="en-GB" sz="3200" b="1" dirty="0">
+                <a:latin typeface="Times New Roman" panose="02020603050405020304" pitchFamily="18" charset="0"/>
+                <a:cs typeface="Times New Roman" panose="02020603050405020304" pitchFamily="18" charset="0"/>
+              </a:rPr>
+              <a:t>5</a:t>
+            </a:r>
+            <a:r>
               <a:rPr lang="en-GB" sz="3200" dirty="0">
                 <a:latin typeface="Times New Roman" panose="02020603050405020304" pitchFamily="18" charset="0"/>
                 <a:cs typeface="Times New Roman" panose="02020603050405020304" pitchFamily="18" charset="0"/>
               </a:rPr>
-              <a:t>5 cm above table</a:t>
+              <a:t> cm above table</a:t>
             </a:r>
           </a:p>
           <a:p>
@@ -16724,11 +17717,18 @@
               <a:t> -- </a:t>
             </a:r>
             <a:r>
+              <a:rPr lang="en-GB" sz="3200" b="1" dirty="0">
+                <a:latin typeface="Times New Roman" panose="02020603050405020304" pitchFamily="18" charset="0"/>
+                <a:cs typeface="Times New Roman" panose="02020603050405020304" pitchFamily="18" charset="0"/>
+              </a:rPr>
+              <a:t>0.175</a:t>
+            </a:r>
+            <a:r>
               <a:rPr lang="en-GB" sz="3200" dirty="0">
                 <a:latin typeface="Times New Roman" panose="02020603050405020304" pitchFamily="18" charset="0"/>
                 <a:cs typeface="Times New Roman" panose="02020603050405020304" pitchFamily="18" charset="0"/>
               </a:rPr>
-              <a:t>0.175 rad (10°)</a:t>
+              <a:t> rad (10°)</a:t>
             </a:r>
           </a:p>
           <a:p>
@@ -16764,12 +17764,82 @@
               <a:t> --       </a:t>
             </a:r>
             <a:r>
+              <a:rPr lang="en-GB" sz="3200" b="1" dirty="0">
+                <a:latin typeface="Times New Roman" panose="02020603050405020304" pitchFamily="18" charset="0"/>
+                <a:cs typeface="Times New Roman" panose="02020603050405020304" pitchFamily="18" charset="0"/>
+              </a:rPr>
+              <a:t>w</a:t>
+            </a:r>
+            <a:r>
               <a:rPr lang="en-GB" sz="3200" dirty="0">
                 <a:latin typeface="Times New Roman" panose="02020603050405020304" pitchFamily="18" charset="0"/>
                 <a:cs typeface="Times New Roman" panose="02020603050405020304" pitchFamily="18" charset="0"/>
               </a:rPr>
-              <a:t>w &lt; 0.06</a:t>
-            </a:r>
+              <a:t> </a:t>
+            </a:r>
+            <a:r>
+              <a:rPr lang="en-GB" sz="3200" b="1" dirty="0">
+                <a:latin typeface="Times New Roman" panose="02020603050405020304" pitchFamily="18" charset="0"/>
+                <a:cs typeface="Times New Roman" panose="02020603050405020304" pitchFamily="18" charset="0"/>
+              </a:rPr>
+              <a:t>&lt;</a:t>
+            </a:r>
+            <a:r>
+              <a:rPr lang="en-GB" sz="3200" dirty="0">
+                <a:latin typeface="Times New Roman" panose="02020603050405020304" pitchFamily="18" charset="0"/>
+                <a:cs typeface="Times New Roman" panose="02020603050405020304" pitchFamily="18" charset="0"/>
+              </a:rPr>
+              <a:t> </a:t>
+            </a:r>
+            <a:r>
+              <a:rPr lang="en-GB" sz="3200" b="1" dirty="0">
+                <a:latin typeface="Times New Roman" panose="02020603050405020304" pitchFamily="18" charset="0"/>
+                <a:cs typeface="Times New Roman" panose="02020603050405020304" pitchFamily="18" charset="0"/>
+              </a:rPr>
+              <a:t>0.06</a:t>
+            </a:r>
+          </a:p>
+        </p:txBody>
+      </p:sp>
+      <p:sp>
+        <p:nvSpPr>
+          <p:cNvPr id="9" name="TextBox 8">
+            <a:extLst>
+              <a:ext uri="{FF2B5EF4-FFF2-40B4-BE49-F238E27FC236}">
+                <a16:creationId xmlns:a16="http://schemas.microsoft.com/office/drawing/2014/main" id="{69F707A2-A62F-37F3-B8E3-99F7D3C9866A}"/>
+              </a:ext>
+            </a:extLst>
+          </p:cNvPr>
+          <p:cNvSpPr txBox="1"/>
+          <p:nvPr/>
+        </p:nvSpPr>
+        <p:spPr>
+          <a:xfrm>
+            <a:off x="17373600" y="9563100"/>
+            <a:ext cx="312906" cy="400110"/>
+          </a:xfrm>
+          <a:prstGeom prst="rect">
+            <a:avLst/>
+          </a:prstGeom>
+          <a:noFill/>
+        </p:spPr>
+        <p:txBody>
+          <a:bodyPr wrap="none" rtlCol="0">
+            <a:spAutoFit/>
+          </a:bodyPr>
+          <a:lstStyle/>
+          <a:p>
+            <a:r>
+              <a:rPr lang="en-FI" sz="2000" dirty="0">
+                <a:latin typeface="Times New Roman" panose="02020603050405020304" pitchFamily="18" charset="0"/>
+                <a:cs typeface="Times New Roman" panose="02020603050405020304" pitchFamily="18" charset="0"/>
+              </a:rPr>
+              <a:t>9</a:t>
+            </a:r>
+            <a:endParaRPr lang="en-GB" sz="2000" dirty="0">
+              <a:latin typeface="Times New Roman" panose="02020603050405020304" pitchFamily="18" charset="0"/>
+              <a:cs typeface="Times New Roman" panose="02020603050405020304" pitchFamily="18" charset="0"/>
+            </a:endParaRPr>
           </a:p>
         </p:txBody>
       </p:sp>
